--- a/ledwave-comercial/apresentacoes/LedWave_Varejo_de_Moda_e_Vitrines.pptx
+++ b/ledwave-comercial/apresentacoes/LedWave_Varejo_de_Moda_e_Vitrines.pptx
@@ -18,9 +18,10 @@
     <p:sldId id="266" r:id="rId12"/>
     <p:sldId id="267" r:id="rId13"/>
     <p:sldId id="268" r:id="rId14"/>
+    <p:sldId id="269" r:id="rId15"/>
   </p:sldIdLst>
   <p:notesMasterIdLst>
-    <p:notesMasterId r:id="rId15"/>
+    <p:notesMasterId r:id="rId16"/>
   </p:notesMasterIdLst>
   <p:sldSz cx="12192000" cy="6858000"/>
   <p:notesSz cx="6858000" cy="12192000"/>
@@ -119,41 +120,42 @@
   <p:extLst>
     <p:ext uri="{521415D9-36F7-43E2-AB2F-B90AF26B5E84}">
       <p14:sectionLst xmlns:p14="http://schemas.microsoft.com/office/powerpoint/2010/main">
-        <p14:section name="Abertura" id="{62299533-66e9-d26e-4861-e04fd2679540}">
+        <p14:section name="Abertura" id="{91f34ebb-f6b5-2f56-bada-42d8202a9631}">
           <p14:sldIdLst>
             <p14:sldId id="256"/>
             <p14:sldId id="257"/>
           </p14:sldIdLst>
         </p14:section>
-        <p14:section name="O seu cenário" id="{30f3267f-9239-d695-6e1f-afc11e9d37b2}">
+        <p14:section name="O seu cenário" id="{8d9ad57c-2658-03b0-e225-29aba54401a9}">
           <p14:sldIdLst>
             <p14:sldId id="258"/>
           </p14:sldIdLst>
         </p14:section>
-        <p14:section name="LedWave" id="{f49b9264-d32b-8919-a032-c80b0d5f19bc}">
+        <p14:section name="LedWave" id="{33150ff6-426a-7d88-bec9-c21c965c8182}">
           <p14:sldIdLst>
             <p14:sldId id="259"/>
             <p14:sldId id="260"/>
             <p14:sldId id="261"/>
             <p14:sldId id="262"/>
+            <p14:sldId id="263"/>
           </p14:sldIdLst>
         </p14:section>
-        <p14:section name="Por que digitalizar" id="{1a3af8ea-7e8a-805a-bb13-e318a9ceda51}">
+        <p14:section name="Por que digitalizar" id="{62c7a57d-9c98-6943-bf62-fb624086948c}">
           <p14:sldIdLst>
-            <p14:sldId id="263"/>
             <p14:sldId id="264"/>
+            <p14:sldId id="265"/>
           </p14:sldIdLst>
         </p14:section>
-        <p14:section name="Ganhos e solução" id="{973c2368-d51b-4b4d-c0e5-92502a7a967f}">
+        <p14:section name="Ganhos e solução" id="{aac13c33-6070-6568-506b-4edafa110d70}">
           <p14:sldIdLst>
-            <p14:sldId id="265"/>
             <p14:sldId id="266"/>
             <p14:sldId id="267"/>
+            <p14:sldId id="268"/>
           </p14:sldIdLst>
         </p14:section>
-        <p14:section name="Próximo passo" id="{c9bc3a24-896b-4453-8f52-c9f66c9c615c}">
+        <p14:section name="Próximo passo" id="{5a202989-fa3a-21d8-cfb5-4e8bac060df8}">
           <p14:sldIdLst>
-            <p14:sldId id="268"/>
+            <p14:sldId id="269"/>
           </p14:sldIdLst>
         </p14:section>
       </p14:sectionLst>
@@ -649,7 +651,8 @@
           <a:p>
             <a:r>
               <a:rPr lang="en-US" dirty="0"/>
-              <a:t>[Ganhos · ~2,5 min] Um ganho por vez. Para cada um, conecte com o que o cliente disse na descoberta: "Você comentou que... é aqui que isso muda."</a:t>
+              <a:t>[História · ~1,5 min] Conte a história como cena, no presente. Se tiver o mockup do espaço do cliente, este é o momento de mostrar: antes e depois.
+Frase de efeito: "Vitrine parada é vendedor dormindo."</a:t>
             </a:r>
             <a:endParaRPr lang="en-US" dirty="0"/>
           </a:p>
@@ -737,9 +740,7 @@
           <a:p>
             <a:r>
               <a:rPr lang="en-US" dirty="0"/>
-              <a:t>[Solução · ~1,5 min] Mostre só o que faz sentido para o espaço do cliente; apague o resto.
-Objeção provável: Painel de LED é caro para uma loja só.
-Resposta: Compare com o custo de 12 meses de impressos, instalação e mídia local. O painel substitui esses custos e ainda fica com você. Podemos montar a conta juntos agora.</a:t>
+              <a:t>[Ganhos · ~2,5 min] Um ganho por vez. Para cada um, conecte com o que o cliente disse na descoberta: "Você comentou que... é aqui que isso muda."</a:t>
             </a:r>
             <a:endParaRPr lang="en-US" dirty="0"/>
           </a:p>
@@ -827,7 +828,15 @@
           <a:p>
             <a:r>
               <a:rPr lang="en-US" dirty="0"/>
-              <a:t>[Prova · ~1 min] Preencha o case do segmento com um cliente real antes da reunião. Sem case do segmento, apague o card da direita e fale só do Boulevard.Live.</a:t>
+              <a:t>[Solução · ~1,5 min] Mostre só o que faz sentido para o espaço do cliente; apague o resto.
+Objeção provável: Painel de LED é caro para uma loja só.
+Resposta: Compare com o custo de 12 meses de impressos, instalação e mídia local. O painel substitui esses custos e ainda fica com você. Podemos montar a conta juntos agora.
+Objeção (comercial): Preço
+Resposta: Vamos comparar o custo total: impressos, locações e vendas perdidas de um ano contra o investimento no painel, que fica com você por muitos anos.
+Objeção (comercial): Gestão de conteúdo
+Resposta: Você não fica sozinho: entregamos o software, o treinamento e, se quiser, a produção e a programação do conteúdo.
+Objeção (comercial): Percepção de valor
+Resposta: O valor não está na tela, está no que ela gera: receita de mídia, economia de impressos, fluxo e marca. Vamos colocar esses números lado a lado.</a:t>
             </a:r>
             <a:endParaRPr lang="en-US" dirty="0"/>
           </a:p>
@@ -915,8 +924,7 @@
           <a:p>
             <a:r>
               <a:rPr lang="en-US" dirty="0"/>
-              <a:t>[Fechamento · ~1,5 min] Termine no ponto alto: repita a frase de efeito e proponha o próximo passo com duas opções de data ("quinta ou sexta?"). Nunca termine com "alguma dúvida?".
-Pergunta de necessidade: Se você pudesse trocar a vitrine de todas as lojas pelo celular, em minutos, o que faria diferente na próxima campanha?</a:t>
+              <a:t>[Prova · ~1 min] Preencha o case do segmento com um cliente real antes da reunião. Sem case do segmento, apague o card da direita e fale só do Boulevard.Live.</a:t>
             </a:r>
             <a:endParaRPr lang="en-US" dirty="0"/>
           </a:p>
@@ -940,6 +948,95 @@
             <a:fld id="{F7021451-1387-4CA6-816F-3879F97B5CBC}" type="slidenum">
               <a:rPr lang="en-US"/>
               <a:t>13</a:t>
+            </a:fld>
+            <a:endParaRPr lang="en-US"/>
+          </a:p>
+        </p:txBody>
+      </p:sp>
+    </p:spTree>
+    <p:extLst>
+      <p:ext uri="{BB962C8B-B14F-4D97-AF65-F5344CB8AC3E}">
+        <p14:creationId xmlns:p14="http://schemas.microsoft.com/office/powerpoint/2010/main" val="1024086991"/>
+      </p:ext>
+    </p:extLst>
+  </p:cSld>
+  <p:clrMapOvr>
+    <a:masterClrMapping/>
+  </p:clrMapOvr>
+</p:notes>
+</file>
+
+<file path=ppt/notesSlides/notesSlide14.xml><?xml version="1.0" encoding="utf-8"?>
+<p:notes xmlns:a="http://schemas.openxmlformats.org/drawingml/2006/main" xmlns:r="http://schemas.openxmlformats.org/officeDocument/2006/relationships" xmlns:p="http://schemas.openxmlformats.org/presentationml/2006/main">
+  <p:cSld>
+    <p:spTree>
+      <p:nvGrpSpPr>
+        <p:cNvPr id="1" name=""/>
+        <p:cNvGrpSpPr/>
+        <p:nvPr/>
+      </p:nvGrpSpPr>
+      <p:grpSpPr>
+        <a:xfrm>
+          <a:off x="0" y="0"/>
+          <a:ext cx="0" cy="0"/>
+          <a:chOff x="0" y="0"/>
+          <a:chExt cx="0" cy="0"/>
+        </a:xfrm>
+      </p:grpSpPr>
+      <p:sp>
+        <p:nvSpPr>
+          <p:cNvPr id="2" name="Slide Image Placeholder 1"/>
+          <p:cNvSpPr>
+            <a:spLocks noGrp="1" noRot="1" noChangeAspect="1"/>
+          </p:cNvSpPr>
+          <p:nvPr>
+            <p:ph type="sldImg"/>
+          </p:nvPr>
+        </p:nvSpPr>
+        <p:spPr/>
+      </p:sp>
+      <p:sp>
+        <p:nvSpPr>
+          <p:cNvPr id="3" name="Notes Placeholder 2"/>
+          <p:cNvSpPr>
+            <a:spLocks noGrp="1"/>
+          </p:cNvSpPr>
+          <p:nvPr>
+            <p:ph type="body" idx="1"/>
+          </p:nvPr>
+        </p:nvSpPr>
+        <p:spPr/>
+        <p:txBody>
+          <a:bodyPr/>
+          <a:lstStyle/>
+          <a:p>
+            <a:r>
+              <a:rPr lang="en-US" dirty="0"/>
+              <a:t>[Fechamento · ~1,5 min] Termine no ponto alto: repita a frase de efeito e proponha o próximo passo com duas opções de data ("quinta ou sexta?"). Nunca termine com "alguma dúvida?".
+Pergunta de necessidade: Se você pudesse trocar a vitrine de todas as lojas pelo celular, em minutos, o que faria diferente na próxima campanha?</a:t>
+            </a:r>
+            <a:endParaRPr lang="en-US" dirty="0"/>
+          </a:p>
+        </p:txBody>
+      </p:sp>
+      <p:sp>
+        <p:nvSpPr>
+          <p:cNvPr id="4" name="Slide Number Placeholder 3"/>
+          <p:cNvSpPr>
+            <a:spLocks noGrp="1"/>
+          </p:cNvSpPr>
+          <p:nvPr>
+            <p:ph type="sldNum" sz="quarter" idx="10"/>
+          </p:nvPr>
+        </p:nvSpPr>
+        <p:spPr/>
+        <p:txBody>
+          <a:bodyPr/>
+          <a:lstStyle/>
+          <a:p>
+            <a:fld id="{F7021451-1387-4CA6-816F-3879F97B5CBC}" type="slidenum">
+              <a:rPr lang="en-US"/>
+              <a:t>14</a:t>
             </a:fld>
             <a:endParaRPr lang="en-US"/>
           </a:p>
@@ -1450,7 +1547,7 @@
           <a:p>
             <a:r>
               <a:rPr lang="en-US" dirty="0"/>
-              <a:t>[Prova social · ~1 min] Se houver cliente do mesmo segmento, troque um dos nomes por ele e conte o resultado em uma frase. Apague a linha de instrução antes de enviar o arquivo.</a:t>
+              <a:t>[Diferenciais · ~1 min] Não leia os oito. Escolha os 2 ou 3 que respondem ao propósito de compra do cliente (Branding, Experiência, Trade) e conte cada um em uma frase.</a:t>
             </a:r>
             <a:endParaRPr lang="en-US" dirty="0"/>
           </a:p>
@@ -1538,7 +1635,7 @@
           <a:p>
             <a:r>
               <a:rPr lang="en-US" dirty="0"/>
-              <a:t>[Propósito · ~1 min] Fale devagar. Este é o porquê da conversa. Pausa de 3 segundos no final.</a:t>
+              <a:t>[Prova social · ~1 min] Sem case mapeado do segmento: escolha o cliente com o propósito de compra mais parecido. Apague a linha de instrução antes de enviar o arquivo.</a:t>
             </a:r>
             <a:endParaRPr lang="en-US" dirty="0"/>
           </a:p>
@@ -1626,8 +1723,8 @@
           <a:p>
             <a:r>
               <a:rPr lang="en-US" dirty="0"/>
-              <a:t>[História · ~1,5 min] Conte a história como cena, no presente. Se tiver o mockup do espaço do cliente, este é o momento de mostrar: antes e depois.
-Frase de efeito: "Vitrine parada é vendedor dormindo."</a:t>
+              <a:t>[Propósito · ~1 min] Fale devagar. Este é o porquê da conversa. Pausa de 3 segundos no final.
+Propósitos de compra mais comuns neste nicho: Branding, Experiência, Trade. Confirme qual pesa mais para este cliente e apague os outros.</a:t>
             </a:r>
             <a:endParaRPr lang="en-US" dirty="0"/>
           </a:p>
@@ -2101,7 +2198,7 @@
         <p:spPr>
           <a:xfrm>
             <a:off x="822960" y="2011680"/>
-            <a:ext cx="8229600" cy="3840480"/>
+            <a:ext cx="8229600" cy="3291840"/>
           </a:xfrm>
           <a:prstGeom prst="rect">
             <a:avLst/>
@@ -2845,7 +2942,7 @@
                   <a:schemeClr val="tx1"/>
                 </a:solidFill>
               </a:rPr>
-              <a:t>Três ganhos para o seu negócio</a:t>
+              <a:t>Imagine o seu espaço</a:t>
             </a:r>
             <a:endParaRPr lang="en-US" sz="3200" dirty="0"/>
           </a:p>
@@ -2853,49 +2950,126 @@
       </p:sp>
       <p:sp>
         <p:nvSpPr>
-          <p:cNvPr id="3" name="Ganho Mais receita"/>
+          <p:cNvPr id="3" name="História"/>
+          <p:cNvSpPr txBox="1"/>
+          <p:nvPr/>
+        </p:nvSpPr>
+        <p:spPr>
+          <a:xfrm>
+            <a:off x="548640" y="1691640"/>
+            <a:ext cx="4937760" cy="3291840"/>
+          </a:xfrm>
+          <a:prstGeom prst="rect">
+            <a:avLst/>
+          </a:prstGeom>
+          <a:noFill/>
+          <a:ln/>
+        </p:spPr>
+        <p:txBody>
+          <a:bodyPr wrap="square" lIns="0" tIns="0" rIns="0" bIns="0" rtlCol="0" anchor="t"/>
+          <a:lstStyle/>
+          <a:p>
+            <a:pPr indent="0" marL="0">
+              <a:buNone/>
+            </a:pPr>
+            <a:r>
+              <a:rPr lang="en-US" sz="1800" dirty="0">
+                <a:solidFill>
+                  <a:schemeClr val="tx1"/>
+                </a:solidFill>
+              </a:rPr>
+              <a:t>Antes x depois: a mesma vitrine com um banner de liquidação desbotado e, ao lado, a coleção nova em movimento, com troca de conteúdo do celular em minutos. O olho humano é programado para seguir movimento.</a:t>
+            </a:r>
+            <a:endParaRPr lang="en-US" sz="1800" dirty="0"/>
+          </a:p>
+        </p:txBody>
+      </p:sp>
+      <p:sp>
+        <p:nvSpPr>
+          <p:cNvPr id="4" name="Frase de efeito"/>
+          <p:cNvSpPr txBox="1"/>
+          <p:nvPr/>
+        </p:nvSpPr>
+        <p:spPr>
+          <a:xfrm>
+            <a:off x="548640" y="5029200"/>
+            <a:ext cx="4937760" cy="914400"/>
+          </a:xfrm>
+          <a:prstGeom prst="rect">
+            <a:avLst/>
+          </a:prstGeom>
+          <a:noFill/>
+          <a:ln/>
+        </p:spPr>
+        <p:txBody>
+          <a:bodyPr wrap="square" lIns="0" tIns="0" rIns="0" bIns="0" rtlCol="0" anchor="t"/>
+          <a:lstStyle/>
+          <a:p>
+            <a:pPr indent="0" marL="0">
+              <a:buNone/>
+            </a:pPr>
+            <a:r>
+              <a:rPr lang="en-US" sz="2000" b="1" i="1" dirty="0">
+                <a:solidFill>
+                  <a:schemeClr val="accent1"/>
+                </a:solidFill>
+              </a:rPr>
+              <a:t>Vitrine parada é vendedor dormindo.</a:t>
+            </a:r>
+            <a:endParaRPr lang="en-US" sz="2000" dirty="0"/>
+          </a:p>
+        </p:txBody>
+      </p:sp>
+      <p:sp>
+        <p:nvSpPr>
+          <p:cNvPr id="5" name="Área da simulação"/>
           <p:cNvSpPr/>
           <p:nvPr/>
         </p:nvSpPr>
         <p:spPr>
           <a:xfrm>
-            <a:off x="548640" y="1600200"/>
-            <a:ext cx="3474720" cy="4389120"/>
+            <a:off x="5943600" y="1600200"/>
+            <a:ext cx="5669280" cy="4343400"/>
           </a:xfrm>
           <a:prstGeom prst="roundRect">
             <a:avLst>
-              <a:gd name="adj" fmla="val 3158"/>
+              <a:gd name="adj" fmla="val 2526"/>
             </a:avLst>
           </a:prstGeom>
           <a:solidFill>
             <a:schemeClr val="bg2"/>
           </a:solidFill>
-          <a:ln/>
-        </p:spPr>
-      </p:sp>
-      <p:sp>
-        <p:nvSpPr>
-          <p:cNvPr id="4" name="Mais receita círculo"/>
+          <a:ln w="19050">
+            <a:solidFill>
+              <a:srgbClr val="8B5CF6"/>
+            </a:solidFill>
+            <a:prstDash val="dash"/>
+          </a:ln>
+        </p:spPr>
+      </p:sp>
+      <p:sp>
+        <p:nvSpPr>
+          <p:cNvPr id="6" name="Simulação círculo"/>
           <p:cNvSpPr/>
           <p:nvPr/>
         </p:nvSpPr>
         <p:spPr>
           <a:xfrm>
-            <a:off x="868680" y="1920240"/>
-            <a:ext cx="868680" cy="868680"/>
+            <a:off x="8366760" y="2743200"/>
+            <a:ext cx="822960" cy="822960"/>
           </a:xfrm>
           <a:prstGeom prst="ellipse">
             <a:avLst/>
           </a:prstGeom>
           <a:solidFill>
-            <a:srgbClr val="E0218A"/>
+            <a:srgbClr val="8B5CF6"/>
           </a:solidFill>
           <a:ln/>
         </p:spPr>
       </p:sp>
       <p:pic>
         <p:nvPicPr>
-          <p:cNvPr id="5" name="Mais receita ícone" descr="preencoded.png">    </p:cNvPr>
+          <p:cNvPr id="7" name="Simulação ícone" descr="preencoded.png">    </p:cNvPr>
           <p:cNvPicPr>
             <a:picLocks noChangeAspect="1"/>
           </p:cNvPicPr>
@@ -2909,8 +3083,8 @@
         </p:blipFill>
         <p:spPr>
           <a:xfrm>
-            <a:off x="1085850" y="2137410"/>
-            <a:ext cx="434340" cy="434340"/>
+            <a:off x="8572500" y="2948940"/>
+            <a:ext cx="411480" cy="411480"/>
           </a:xfrm>
           <a:prstGeom prst="rect">
             <a:avLst/>
@@ -2919,14 +3093,14 @@
       </p:pic>
       <p:sp>
         <p:nvSpPr>
-          <p:cNvPr id="6" name="Mais receita título"/>
+          <p:cNvPr id="8" name="Instrução simulação"/>
           <p:cNvSpPr txBox="1"/>
           <p:nvPr/>
         </p:nvSpPr>
         <p:spPr>
           <a:xfrm>
-            <a:off x="868680" y="2971800"/>
-            <a:ext cx="2834640" cy="457200"/>
+            <a:off x="6217920" y="3749040"/>
+            <a:ext cx="5120640" cy="822960"/>
           </a:xfrm>
           <a:prstGeom prst="rect">
             <a:avLst/>
@@ -2938,330 +3112,32 @@
           <a:bodyPr wrap="square" lIns="0" tIns="0" rIns="0" bIns="0" rtlCol="0" anchor="t"/>
           <a:lstStyle/>
           <a:p>
-            <a:pPr indent="0" marL="0">
-              <a:buNone/>
-            </a:pPr>
-            <a:r>
-              <a:rPr lang="en-US" sz="2100" b="1" dirty="0">
-                <a:solidFill>
-                  <a:schemeClr val="tx1"/>
-                </a:solidFill>
-              </a:rPr>
-              <a:t>Mais receita</a:t>
-            </a:r>
-            <a:endParaRPr lang="en-US" sz="2100" dirty="0"/>
-          </a:p>
-        </p:txBody>
-      </p:sp>
-      <p:sp>
-        <p:nvSpPr>
-          <p:cNvPr id="7" name="Mais receita texto"/>
-          <p:cNvSpPr txBox="1"/>
-          <p:nvPr/>
-        </p:nvSpPr>
-        <p:spPr>
-          <a:xfrm>
-            <a:off x="868680" y="3520440"/>
-            <a:ext cx="2834640" cy="2286000"/>
-          </a:xfrm>
-          <a:prstGeom prst="rect">
-            <a:avLst/>
-          </a:prstGeom>
-          <a:noFill/>
-          <a:ln/>
-        </p:spPr>
-        <p:txBody>
-          <a:bodyPr wrap="square" lIns="0" tIns="0" rIns="0" bIns="0" rtlCol="0" anchor="t"/>
-          <a:lstStyle/>
-          <a:p>
-            <a:pPr indent="0" marL="0">
-              <a:buNone/>
-            </a:pPr>
-            <a:r>
-              <a:rPr lang="en-US" sz="1500" dirty="0">
-                <a:solidFill>
-                  <a:schemeClr val="tx1"/>
-                </a:solidFill>
-              </a:rPr>
-              <a:t>Mais paradas na vitrine geram mais entradas na loja; promoções relâmpago (horário de almoço, fim de tarde) entram no ar na hora, sem gráfica.</a:t>
-            </a:r>
-            <a:endParaRPr lang="en-US" sz="1500" dirty="0"/>
-          </a:p>
-        </p:txBody>
-      </p:sp>
-      <p:sp>
-        <p:nvSpPr>
-          <p:cNvPr id="8" name="Ganho Mais experiência"/>
-          <p:cNvSpPr/>
-          <p:nvPr/>
-        </p:nvSpPr>
-        <p:spPr>
-          <a:xfrm>
-            <a:off x="4297680" y="1600200"/>
-            <a:ext cx="3474720" cy="4389120"/>
-          </a:xfrm>
-          <a:prstGeom prst="roundRect">
-            <a:avLst>
-              <a:gd name="adj" fmla="val 3158"/>
-            </a:avLst>
-          </a:prstGeom>
-          <a:solidFill>
-            <a:schemeClr val="bg2"/>
-          </a:solidFill>
-          <a:ln/>
-        </p:spPr>
-      </p:sp>
-      <p:sp>
-        <p:nvSpPr>
-          <p:cNvPr id="9" name="Mais experiência círculo"/>
-          <p:cNvSpPr/>
-          <p:nvPr/>
-        </p:nvSpPr>
-        <p:spPr>
-          <a:xfrm>
-            <a:off x="4617720" y="1920240"/>
-            <a:ext cx="868680" cy="868680"/>
-          </a:xfrm>
-          <a:prstGeom prst="ellipse">
-            <a:avLst/>
-          </a:prstGeom>
-          <a:solidFill>
-            <a:srgbClr val="4F6BFF"/>
-          </a:solidFill>
-          <a:ln/>
-        </p:spPr>
-      </p:sp>
-      <p:pic>
-        <p:nvPicPr>
-          <p:cNvPr id="10" name="Mais experiência ícone" descr="preencoded.png">    </p:cNvPr>
-          <p:cNvPicPr>
-            <a:picLocks noChangeAspect="1"/>
-          </p:cNvPicPr>
-          <p:nvPr/>
-        </p:nvPicPr>
-        <p:blipFill>
-          <a:blip r:embed="rId2"/>
-          <a:stretch>
-            <a:fillRect/>
-          </a:stretch>
-        </p:blipFill>
-        <p:spPr>
-          <a:xfrm>
-            <a:off x="4834890" y="2137410"/>
-            <a:ext cx="434340" cy="434340"/>
-          </a:xfrm>
-          <a:prstGeom prst="rect">
-            <a:avLst/>
-          </a:prstGeom>
-        </p:spPr>
-      </p:pic>
-      <p:sp>
-        <p:nvSpPr>
-          <p:cNvPr id="11" name="Mais experiência título"/>
-          <p:cNvSpPr txBox="1"/>
-          <p:nvPr/>
-        </p:nvSpPr>
-        <p:spPr>
-          <a:xfrm>
-            <a:off x="4617720" y="2971800"/>
-            <a:ext cx="2834640" cy="457200"/>
-          </a:xfrm>
-          <a:prstGeom prst="rect">
-            <a:avLst/>
-          </a:prstGeom>
-          <a:noFill/>
-          <a:ln/>
-        </p:spPr>
-        <p:txBody>
-          <a:bodyPr wrap="square" lIns="0" tIns="0" rIns="0" bIns="0" rtlCol="0" anchor="t"/>
-          <a:lstStyle/>
-          <a:p>
-            <a:pPr indent="0" marL="0">
-              <a:buNone/>
-            </a:pPr>
-            <a:r>
-              <a:rPr lang="en-US" sz="2100" b="1" dirty="0">
-                <a:solidFill>
-                  <a:schemeClr val="tx1"/>
-                </a:solidFill>
-              </a:rPr>
-              <a:t>Mais experiência</a:t>
-            </a:r>
-            <a:endParaRPr lang="en-US" sz="2100" dirty="0"/>
-          </a:p>
-        </p:txBody>
-      </p:sp>
-      <p:sp>
-        <p:nvSpPr>
-          <p:cNvPr id="12" name="Mais experiência texto"/>
-          <p:cNvSpPr txBox="1"/>
-          <p:nvPr/>
-        </p:nvSpPr>
-        <p:spPr>
-          <a:xfrm>
-            <a:off x="4617720" y="3520440"/>
-            <a:ext cx="2834640" cy="2286000"/>
-          </a:xfrm>
-          <a:prstGeom prst="rect">
-            <a:avLst/>
-          </a:prstGeom>
-          <a:noFill/>
-          <a:ln/>
-        </p:spPr>
-        <p:txBody>
-          <a:bodyPr wrap="square" lIns="0" tIns="0" rIns="0" bIns="0" rtlCol="0" anchor="t"/>
-          <a:lstStyle/>
-          <a:p>
-            <a:pPr indent="0" marL="0">
-              <a:buNone/>
-            </a:pPr>
-            <a:r>
-              <a:rPr lang="en-US" sz="1500" dirty="0">
-                <a:solidFill>
-                  <a:schemeClr val="tx1"/>
-                </a:solidFill>
-              </a:rPr>
-              <a:t>A marca passa a ter cara de flagship: a loja de rua ou de shopping conversa com o padrão das grandes marcas internacionais.</a:t>
-            </a:r>
-            <a:endParaRPr lang="en-US" sz="1500" dirty="0"/>
-          </a:p>
-        </p:txBody>
-      </p:sp>
-      <p:sp>
-        <p:nvSpPr>
-          <p:cNvPr id="13" name="Ganho Menos custo"/>
-          <p:cNvSpPr/>
-          <p:nvPr/>
-        </p:nvSpPr>
-        <p:spPr>
-          <a:xfrm>
-            <a:off x="8046720" y="1600200"/>
-            <a:ext cx="3474720" cy="4389120"/>
-          </a:xfrm>
-          <a:prstGeom prst="roundRect">
-            <a:avLst>
-              <a:gd name="adj" fmla="val 3158"/>
-            </a:avLst>
-          </a:prstGeom>
-          <a:solidFill>
-            <a:schemeClr val="bg2"/>
-          </a:solidFill>
-          <a:ln/>
-        </p:spPr>
-      </p:sp>
-      <p:sp>
-        <p:nvSpPr>
-          <p:cNvPr id="14" name="Menos custo círculo"/>
-          <p:cNvSpPr/>
-          <p:nvPr/>
-        </p:nvSpPr>
-        <p:spPr>
-          <a:xfrm>
-            <a:off x="8366760" y="1920240"/>
-            <a:ext cx="868680" cy="868680"/>
-          </a:xfrm>
-          <a:prstGeom prst="ellipse">
-            <a:avLst/>
-          </a:prstGeom>
-          <a:solidFill>
-            <a:srgbClr val="8B5CF6"/>
-          </a:solidFill>
-          <a:ln/>
-        </p:spPr>
-      </p:sp>
-      <p:pic>
-        <p:nvPicPr>
-          <p:cNvPr id="15" name="Menos custo ícone" descr="preencoded.png">    </p:cNvPr>
-          <p:cNvPicPr>
-            <a:picLocks noChangeAspect="1"/>
-          </p:cNvPicPr>
-          <p:nvPr/>
-        </p:nvPicPr>
-        <p:blipFill>
-          <a:blip r:embed="rId3"/>
-          <a:stretch>
-            <a:fillRect/>
-          </a:stretch>
-        </p:blipFill>
-        <p:spPr>
-          <a:xfrm>
-            <a:off x="8583930" y="2137410"/>
-            <a:ext cx="434340" cy="434340"/>
-          </a:xfrm>
-          <a:prstGeom prst="rect">
-            <a:avLst/>
-          </a:prstGeom>
-        </p:spPr>
-      </p:pic>
-      <p:sp>
-        <p:nvSpPr>
-          <p:cNvPr id="16" name="Menos custo título"/>
-          <p:cNvSpPr txBox="1"/>
-          <p:nvPr/>
-        </p:nvSpPr>
-        <p:spPr>
-          <a:xfrm>
-            <a:off x="8366760" y="2971800"/>
-            <a:ext cx="2834640" cy="457200"/>
-          </a:xfrm>
-          <a:prstGeom prst="rect">
-            <a:avLst/>
-          </a:prstGeom>
-          <a:noFill/>
-          <a:ln/>
-        </p:spPr>
-        <p:txBody>
-          <a:bodyPr wrap="square" lIns="0" tIns="0" rIns="0" bIns="0" rtlCol="0" anchor="t"/>
-          <a:lstStyle/>
-          <a:p>
-            <a:pPr indent="0" marL="0">
-              <a:buNone/>
-            </a:pPr>
-            <a:r>
-              <a:rPr lang="en-US" sz="2100" b="1" dirty="0">
-                <a:solidFill>
-                  <a:schemeClr val="tx1"/>
-                </a:solidFill>
-              </a:rPr>
-              <a:t>Menos custo</a:t>
-            </a:r>
-            <a:endParaRPr lang="en-US" sz="2100" dirty="0"/>
-          </a:p>
-        </p:txBody>
-      </p:sp>
-      <p:sp>
-        <p:nvSpPr>
-          <p:cNvPr id="17" name="Menos custo texto"/>
-          <p:cNvSpPr txBox="1"/>
-          <p:nvPr/>
-        </p:nvSpPr>
-        <p:spPr>
-          <a:xfrm>
-            <a:off x="8366760" y="3520440"/>
-            <a:ext cx="2834640" cy="2286000"/>
-          </a:xfrm>
-          <a:prstGeom prst="rect">
-            <a:avLst/>
-          </a:prstGeom>
-          <a:noFill/>
-          <a:ln/>
-        </p:spPr>
-        <p:txBody>
-          <a:bodyPr wrap="square" lIns="0" tIns="0" rIns="0" bIns="0" rtlCol="0" anchor="t"/>
-          <a:lstStyle/>
-          <a:p>
-            <a:pPr indent="0" marL="0">
-              <a:buNone/>
-            </a:pPr>
-            <a:r>
-              <a:rPr lang="en-US" sz="1500" dirty="0">
-                <a:solidFill>
-                  <a:schemeClr val="tx1"/>
-                </a:solidFill>
-              </a:rPr>
-              <a:t>Fim do custo recorrente de impressão e instalação a cada coleção; gestão centralizada do conteúdo para todas as lojas da rede.</a:t>
-            </a:r>
-            <a:endParaRPr lang="en-US" sz="1500" dirty="0"/>
+            <a:pPr algn="ctr" indent="0" marL="0">
+              <a:buNone/>
+            </a:pPr>
+            <a:r>
+              <a:rPr lang="en-US" sz="1400" dirty="0">
+                <a:solidFill>
+                  <a:schemeClr val="tx2"/>
+                </a:solidFill>
+              </a:rPr>
+              <a:t>Simulação do painel no espaço do cliente</a:t>
+            </a:r>
+            <a:endParaRPr lang="en-US" sz="1400" dirty="0"/>
+          </a:p>
+          <a:p>
+            <a:pPr algn="ctr" indent="0" marL="0">
+              <a:buNone/>
+            </a:pPr>
+            <a:r>
+              <a:rPr lang="en-US" sz="1400" dirty="0">
+                <a:solidFill>
+                  <a:schemeClr val="tx2"/>
+                </a:solidFill>
+              </a:rPr>
+              <a:t>(insira aqui o mockup antes da reunião)</a:t>
+            </a:r>
+            <a:endParaRPr lang="en-US" sz="1400" dirty="0"/>
           </a:p>
         </p:txBody>
       </p:sp>
@@ -3367,7 +3243,7 @@
                   <a:schemeClr val="tx1"/>
                 </a:solidFill>
               </a:rPr>
-              <a:t>A solução para o seu espaço</a:t>
+              <a:t>Três ganhos para o seu negócio</a:t>
             </a:r>
             <a:endParaRPr lang="en-US" sz="3200" dirty="0"/>
           </a:p>
@@ -3375,63 +3251,49 @@
       </p:sp>
       <p:sp>
         <p:nvSpPr>
-          <p:cNvPr id="3" name="Título solução"/>
-          <p:cNvSpPr txBox="1"/>
-          <p:nvPr/>
-        </p:nvSpPr>
-        <p:spPr>
-          <a:xfrm>
-            <a:off x="548640" y="1554480"/>
-            <a:ext cx="5486400" cy="411480"/>
-          </a:xfrm>
-          <a:prstGeom prst="rect">
-            <a:avLst/>
-          </a:prstGeom>
-          <a:noFill/>
-          <a:ln/>
-        </p:spPr>
-        <p:txBody>
-          <a:bodyPr wrap="square" lIns="0" tIns="0" rIns="0" bIns="0" rtlCol="0" anchor="t"/>
-          <a:lstStyle/>
-          <a:p>
-            <a:pPr indent="0" marL="0">
-              <a:buNone/>
-            </a:pPr>
-            <a:r>
-              <a:rPr lang="en-US" sz="2000" b="1" dirty="0">
-                <a:solidFill>
-                  <a:schemeClr val="accent1"/>
-                </a:solidFill>
-              </a:rPr>
-              <a:t>O que propomos</a:t>
-            </a:r>
-            <a:endParaRPr lang="en-US" sz="2000" dirty="0"/>
-          </a:p>
-        </p:txBody>
-      </p:sp>
-      <p:sp>
-        <p:nvSpPr>
-          <p:cNvPr id="4" name="Item 1 círculo"/>
+          <p:cNvPr id="3" name="Ganho Mais receita"/>
           <p:cNvSpPr/>
           <p:nvPr/>
         </p:nvSpPr>
         <p:spPr>
           <a:xfrm>
-            <a:off x="548640" y="2103120"/>
-            <a:ext cx="457200" cy="457200"/>
+            <a:off x="548640" y="1600200"/>
+            <a:ext cx="3474720" cy="4389120"/>
+          </a:xfrm>
+          <a:prstGeom prst="roundRect">
+            <a:avLst>
+              <a:gd name="adj" fmla="val 3158"/>
+            </a:avLst>
+          </a:prstGeom>
+          <a:solidFill>
+            <a:schemeClr val="bg2"/>
+          </a:solidFill>
+          <a:ln/>
+        </p:spPr>
+      </p:sp>
+      <p:sp>
+        <p:nvSpPr>
+          <p:cNvPr id="4" name="Mais receita círculo"/>
+          <p:cNvSpPr/>
+          <p:nvPr/>
+        </p:nvSpPr>
+        <p:spPr>
+          <a:xfrm>
+            <a:off x="868680" y="1920240"/>
+            <a:ext cx="868680" cy="868680"/>
           </a:xfrm>
           <a:prstGeom prst="ellipse">
             <a:avLst/>
           </a:prstGeom>
           <a:solidFill>
-            <a:srgbClr val="2B1A63"/>
+            <a:srgbClr val="E0218A"/>
           </a:solidFill>
           <a:ln/>
         </p:spPr>
       </p:sp>
       <p:pic>
         <p:nvPicPr>
-          <p:cNvPr id="5" name="Item 1 ícone" descr="preencoded.png">    </p:cNvPr>
+          <p:cNvPr id="5" name="Mais receita ícone" descr="preencoded.png">    </p:cNvPr>
           <p:cNvPicPr>
             <a:picLocks noChangeAspect="1"/>
           </p:cNvPicPr>
@@ -3445,8 +3307,8 @@
         </p:blipFill>
         <p:spPr>
           <a:xfrm>
-            <a:off x="662940" y="2217420"/>
-            <a:ext cx="228600" cy="228600"/>
+            <a:off x="1085850" y="2137410"/>
+            <a:ext cx="434340" cy="434340"/>
           </a:xfrm>
           <a:prstGeom prst="rect">
             <a:avLst/>
@@ -3455,35 +3317,71 @@
       </p:pic>
       <p:sp>
         <p:nvSpPr>
-          <p:cNvPr id="6" name="Solução 1"/>
+          <p:cNvPr id="6" name="Mais receita título"/>
           <p:cNvSpPr txBox="1"/>
           <p:nvPr/>
         </p:nvSpPr>
         <p:spPr>
           <a:xfrm>
-            <a:off x="1188720" y="2057400"/>
-            <a:ext cx="4846320" cy="685800"/>
-          </a:xfrm>
-          <a:prstGeom prst="rect">
-            <a:avLst/>
-          </a:prstGeom>
-          <a:noFill/>
-          <a:ln/>
-        </p:spPr>
-        <p:txBody>
-          <a:bodyPr wrap="square" lIns="0" tIns="0" rIns="0" bIns="0" rtlCol="0" anchor="ctr"/>
+            <a:off x="868680" y="2971800"/>
+            <a:ext cx="2834640" cy="457200"/>
+          </a:xfrm>
+          <a:prstGeom prst="rect">
+            <a:avLst/>
+          </a:prstGeom>
+          <a:noFill/>
+          <a:ln/>
+        </p:spPr>
+        <p:txBody>
+          <a:bodyPr wrap="square" lIns="0" tIns="0" rIns="0" bIns="0" rtlCol="0" anchor="t"/>
           <a:lstStyle/>
           <a:p>
             <a:pPr indent="0" marL="0">
               <a:buNone/>
             </a:pPr>
             <a:r>
+              <a:rPr lang="en-US" sz="2100" b="1" dirty="0">
+                <a:solidFill>
+                  <a:schemeClr val="tx1"/>
+                </a:solidFill>
+              </a:rPr>
+              <a:t>Mais receita</a:t>
+            </a:r>
+            <a:endParaRPr lang="en-US" sz="2100" dirty="0"/>
+          </a:p>
+        </p:txBody>
+      </p:sp>
+      <p:sp>
+        <p:nvSpPr>
+          <p:cNvPr id="7" name="Mais receita texto"/>
+          <p:cNvSpPr txBox="1"/>
+          <p:nvPr/>
+        </p:nvSpPr>
+        <p:spPr>
+          <a:xfrm>
+            <a:off x="868680" y="3520440"/>
+            <a:ext cx="2834640" cy="2286000"/>
+          </a:xfrm>
+          <a:prstGeom prst="rect">
+            <a:avLst/>
+          </a:prstGeom>
+          <a:noFill/>
+          <a:ln/>
+        </p:spPr>
+        <p:txBody>
+          <a:bodyPr wrap="square" lIns="0" tIns="0" rIns="0" bIns="0" rtlCol="0" anchor="t"/>
+          <a:lstStyle/>
+          <a:p>
+            <a:pPr indent="0" marL="0">
+              <a:buNone/>
+            </a:pPr>
+            <a:r>
               <a:rPr lang="en-US" sz="1500" dirty="0">
                 <a:solidFill>
                   <a:schemeClr val="tx1"/>
                 </a:solidFill>
               </a:rPr>
-              <a:t>Painel de vitrine de alto brilho</a:t>
+              <a:t>Mais paradas na vitrine geram mais entradas na loja; promoções relâmpago (horário de almoço, fim de tarde) entram no ar na hora, sem gráfica.</a:t>
             </a:r>
             <a:endParaRPr lang="en-US" sz="1500" dirty="0"/>
           </a:p>
@@ -3491,27 +3389,49 @@
       </p:sp>
       <p:sp>
         <p:nvSpPr>
-          <p:cNvPr id="7" name="Item 2 círculo"/>
+          <p:cNvPr id="8" name="Ganho Mais experiência"/>
           <p:cNvSpPr/>
           <p:nvPr/>
         </p:nvSpPr>
         <p:spPr>
           <a:xfrm>
-            <a:off x="548640" y="2880360"/>
-            <a:ext cx="457200" cy="457200"/>
+            <a:off x="4297680" y="1600200"/>
+            <a:ext cx="3474720" cy="4389120"/>
+          </a:xfrm>
+          <a:prstGeom prst="roundRect">
+            <a:avLst>
+              <a:gd name="adj" fmla="val 3158"/>
+            </a:avLst>
+          </a:prstGeom>
+          <a:solidFill>
+            <a:schemeClr val="bg2"/>
+          </a:solidFill>
+          <a:ln/>
+        </p:spPr>
+      </p:sp>
+      <p:sp>
+        <p:nvSpPr>
+          <p:cNvPr id="9" name="Mais experiência círculo"/>
+          <p:cNvSpPr/>
+          <p:nvPr/>
+        </p:nvSpPr>
+        <p:spPr>
+          <a:xfrm>
+            <a:off x="4617720" y="1920240"/>
+            <a:ext cx="868680" cy="868680"/>
           </a:xfrm>
           <a:prstGeom prst="ellipse">
             <a:avLst/>
           </a:prstGeom>
           <a:solidFill>
-            <a:srgbClr val="2B1A63"/>
+            <a:srgbClr val="4F6BFF"/>
           </a:solidFill>
           <a:ln/>
         </p:spPr>
       </p:sp>
       <p:pic>
         <p:nvPicPr>
-          <p:cNvPr id="8" name="Item 2 ícone" descr="preencoded.png">    </p:cNvPr>
+          <p:cNvPr id="10" name="Mais experiência ícone" descr="preencoded.png">    </p:cNvPr>
           <p:cNvPicPr>
             <a:picLocks noChangeAspect="1"/>
           </p:cNvPicPr>
@@ -3525,8 +3445,8 @@
         </p:blipFill>
         <p:spPr>
           <a:xfrm>
-            <a:off x="662940" y="2994660"/>
-            <a:ext cx="228600" cy="228600"/>
+            <a:off x="4834890" y="2137410"/>
+            <a:ext cx="434340" cy="434340"/>
           </a:xfrm>
           <a:prstGeom prst="rect">
             <a:avLst/>
@@ -3535,35 +3455,71 @@
       </p:pic>
       <p:sp>
         <p:nvSpPr>
-          <p:cNvPr id="9" name="Solução 2"/>
+          <p:cNvPr id="11" name="Mais experiência título"/>
           <p:cNvSpPr txBox="1"/>
           <p:nvPr/>
         </p:nvSpPr>
         <p:spPr>
           <a:xfrm>
-            <a:off x="1188720" y="2834640"/>
-            <a:ext cx="4846320" cy="685800"/>
-          </a:xfrm>
-          <a:prstGeom prst="rect">
-            <a:avLst/>
-          </a:prstGeom>
-          <a:noFill/>
-          <a:ln/>
-        </p:spPr>
-        <p:txBody>
-          <a:bodyPr wrap="square" lIns="0" tIns="0" rIns="0" bIns="0" rtlCol="0" anchor="ctr"/>
+            <a:off x="4617720" y="2971800"/>
+            <a:ext cx="2834640" cy="457200"/>
+          </a:xfrm>
+          <a:prstGeom prst="rect">
+            <a:avLst/>
+          </a:prstGeom>
+          <a:noFill/>
+          <a:ln/>
+        </p:spPr>
+        <p:txBody>
+          <a:bodyPr wrap="square" lIns="0" tIns="0" rIns="0" bIns="0" rtlCol="0" anchor="t"/>
           <a:lstStyle/>
           <a:p>
             <a:pPr indent="0" marL="0">
               <a:buNone/>
             </a:pPr>
             <a:r>
+              <a:rPr lang="en-US" sz="2100" b="1" dirty="0">
+                <a:solidFill>
+                  <a:schemeClr val="tx1"/>
+                </a:solidFill>
+              </a:rPr>
+              <a:t>Mais experiência</a:t>
+            </a:r>
+            <a:endParaRPr lang="en-US" sz="2100" dirty="0"/>
+          </a:p>
+        </p:txBody>
+      </p:sp>
+      <p:sp>
+        <p:nvSpPr>
+          <p:cNvPr id="12" name="Mais experiência texto"/>
+          <p:cNvSpPr txBox="1"/>
+          <p:nvPr/>
+        </p:nvSpPr>
+        <p:spPr>
+          <a:xfrm>
+            <a:off x="4617720" y="3520440"/>
+            <a:ext cx="2834640" cy="2286000"/>
+          </a:xfrm>
+          <a:prstGeom prst="rect">
+            <a:avLst/>
+          </a:prstGeom>
+          <a:noFill/>
+          <a:ln/>
+        </p:spPr>
+        <p:txBody>
+          <a:bodyPr wrap="square" lIns="0" tIns="0" rIns="0" bIns="0" rtlCol="0" anchor="t"/>
+          <a:lstStyle/>
+          <a:p>
+            <a:pPr indent="0" marL="0">
+              <a:buNone/>
+            </a:pPr>
+            <a:r>
               <a:rPr lang="en-US" sz="1500" dirty="0">
                 <a:solidFill>
                   <a:schemeClr val="tx1"/>
                 </a:solidFill>
               </a:rPr>
-              <a:t>LED transparente para fachadas de vidro</a:t>
+              <a:t>A marca passa a ter cara de flagship: a loja de rua ou de shopping conversa com o padrão das grandes marcas internacionais.</a:t>
             </a:r>
             <a:endParaRPr lang="en-US" sz="1500" dirty="0"/>
           </a:p>
@@ -3571,27 +3527,49 @@
       </p:sp>
       <p:sp>
         <p:nvSpPr>
-          <p:cNvPr id="10" name="Item 3 círculo"/>
+          <p:cNvPr id="13" name="Ganho Menos custo"/>
           <p:cNvSpPr/>
           <p:nvPr/>
         </p:nvSpPr>
         <p:spPr>
           <a:xfrm>
-            <a:off x="548640" y="3657600"/>
-            <a:ext cx="457200" cy="457200"/>
+            <a:off x="8046720" y="1600200"/>
+            <a:ext cx="3474720" cy="4389120"/>
+          </a:xfrm>
+          <a:prstGeom prst="roundRect">
+            <a:avLst>
+              <a:gd name="adj" fmla="val 3158"/>
+            </a:avLst>
+          </a:prstGeom>
+          <a:solidFill>
+            <a:schemeClr val="bg2"/>
+          </a:solidFill>
+          <a:ln/>
+        </p:spPr>
+      </p:sp>
+      <p:sp>
+        <p:nvSpPr>
+          <p:cNvPr id="14" name="Menos custo círculo"/>
+          <p:cNvSpPr/>
+          <p:nvPr/>
+        </p:nvSpPr>
+        <p:spPr>
+          <a:xfrm>
+            <a:off x="8366760" y="1920240"/>
+            <a:ext cx="868680" cy="868680"/>
           </a:xfrm>
           <a:prstGeom prst="ellipse">
             <a:avLst/>
           </a:prstGeom>
           <a:solidFill>
-            <a:srgbClr val="2B1A63"/>
+            <a:srgbClr val="8B5CF6"/>
           </a:solidFill>
           <a:ln/>
         </p:spPr>
       </p:sp>
       <p:pic>
         <p:nvPicPr>
-          <p:cNvPr id="11" name="Item 3 ícone" descr="preencoded.png">    </p:cNvPr>
+          <p:cNvPr id="15" name="Menos custo ícone" descr="preencoded.png">    </p:cNvPr>
           <p:cNvPicPr>
             <a:picLocks noChangeAspect="1"/>
           </p:cNvPicPr>
@@ -3605,8 +3583,8 @@
         </p:blipFill>
         <p:spPr>
           <a:xfrm>
-            <a:off x="662940" y="3771900"/>
-            <a:ext cx="228600" cy="228600"/>
+            <a:off x="8583930" y="2137410"/>
+            <a:ext cx="434340" cy="434340"/>
           </a:xfrm>
           <a:prstGeom prst="rect">
             <a:avLst/>
@@ -3615,269 +3593,73 @@
       </p:pic>
       <p:sp>
         <p:nvSpPr>
-          <p:cNvPr id="12" name="Solução 3"/>
+          <p:cNvPr id="16" name="Menos custo título"/>
           <p:cNvSpPr txBox="1"/>
           <p:nvPr/>
         </p:nvSpPr>
         <p:spPr>
           <a:xfrm>
-            <a:off x="1188720" y="3611880"/>
-            <a:ext cx="4846320" cy="685800"/>
-          </a:xfrm>
-          <a:prstGeom prst="rect">
-            <a:avLst/>
-          </a:prstGeom>
-          <a:noFill/>
-          <a:ln/>
-        </p:spPr>
-        <p:txBody>
-          <a:bodyPr wrap="square" lIns="0" tIns="0" rIns="0" bIns="0" rtlCol="0" anchor="ctr"/>
+            <a:off x="8366760" y="2971800"/>
+            <a:ext cx="2834640" cy="457200"/>
+          </a:xfrm>
+          <a:prstGeom prst="rect">
+            <a:avLst/>
+          </a:prstGeom>
+          <a:noFill/>
+          <a:ln/>
+        </p:spPr>
+        <p:txBody>
+          <a:bodyPr wrap="square" lIns="0" tIns="0" rIns="0" bIns="0" rtlCol="0" anchor="t"/>
           <a:lstStyle/>
           <a:p>
             <a:pPr indent="0" marL="0">
               <a:buNone/>
             </a:pPr>
             <a:r>
+              <a:rPr lang="en-US" sz="2100" b="1" dirty="0">
+                <a:solidFill>
+                  <a:schemeClr val="tx1"/>
+                </a:solidFill>
+              </a:rPr>
+              <a:t>Menos custo</a:t>
+            </a:r>
+            <a:endParaRPr lang="en-US" sz="2100" dirty="0"/>
+          </a:p>
+        </p:txBody>
+      </p:sp>
+      <p:sp>
+        <p:nvSpPr>
+          <p:cNvPr id="17" name="Menos custo texto"/>
+          <p:cNvSpPr txBox="1"/>
+          <p:nvPr/>
+        </p:nvSpPr>
+        <p:spPr>
+          <a:xfrm>
+            <a:off x="8366760" y="3520440"/>
+            <a:ext cx="2834640" cy="2286000"/>
+          </a:xfrm>
+          <a:prstGeom prst="rect">
+            <a:avLst/>
+          </a:prstGeom>
+          <a:noFill/>
+          <a:ln/>
+        </p:spPr>
+        <p:txBody>
+          <a:bodyPr wrap="square" lIns="0" tIns="0" rIns="0" bIns="0" rtlCol="0" anchor="t"/>
+          <a:lstStyle/>
+          <a:p>
+            <a:pPr indent="0" marL="0">
+              <a:buNone/>
+            </a:pPr>
+            <a:r>
               <a:rPr lang="en-US" sz="1500" dirty="0">
                 <a:solidFill>
                   <a:schemeClr val="tx1"/>
                 </a:solidFill>
               </a:rPr>
-              <a:t>Totens digitais internos</a:t>
+              <a:t>Fim do custo recorrente de impressão e instalação a cada coleção; gestão centralizada do conteúdo para todas as lojas da rede.</a:t>
             </a:r>
             <a:endParaRPr lang="en-US" sz="1500" dirty="0"/>
-          </a:p>
-        </p:txBody>
-      </p:sp>
-      <p:sp>
-        <p:nvSpPr>
-          <p:cNvPr id="13" name="Item 4 círculo"/>
-          <p:cNvSpPr/>
-          <p:nvPr/>
-        </p:nvSpPr>
-        <p:spPr>
-          <a:xfrm>
-            <a:off x="548640" y="4434840"/>
-            <a:ext cx="457200" cy="457200"/>
-          </a:xfrm>
-          <a:prstGeom prst="ellipse">
-            <a:avLst/>
-          </a:prstGeom>
-          <a:solidFill>
-            <a:srgbClr val="2B1A63"/>
-          </a:solidFill>
-          <a:ln/>
-        </p:spPr>
-      </p:sp>
-      <p:pic>
-        <p:nvPicPr>
-          <p:cNvPr id="14" name="Item 4 ícone" descr="preencoded.png">    </p:cNvPr>
-          <p:cNvPicPr>
-            <a:picLocks noChangeAspect="1"/>
-          </p:cNvPicPr>
-          <p:nvPr/>
-        </p:nvPicPr>
-        <p:blipFill>
-          <a:blip r:embed="rId4"/>
-          <a:stretch>
-            <a:fillRect/>
-          </a:stretch>
-        </p:blipFill>
-        <p:spPr>
-          <a:xfrm>
-            <a:off x="662940" y="4549140"/>
-            <a:ext cx="228600" cy="228600"/>
-          </a:xfrm>
-          <a:prstGeom prst="rect">
-            <a:avLst/>
-          </a:prstGeom>
-        </p:spPr>
-      </p:pic>
-      <p:sp>
-        <p:nvSpPr>
-          <p:cNvPr id="15" name="Solução 4"/>
-          <p:cNvSpPr txBox="1"/>
-          <p:nvPr/>
-        </p:nvSpPr>
-        <p:spPr>
-          <a:xfrm>
-            <a:off x="1188720" y="4389120"/>
-            <a:ext cx="4846320" cy="685800"/>
-          </a:xfrm>
-          <a:prstGeom prst="rect">
-            <a:avLst/>
-          </a:prstGeom>
-          <a:noFill/>
-          <a:ln/>
-        </p:spPr>
-        <p:txBody>
-          <a:bodyPr wrap="square" lIns="0" tIns="0" rIns="0" bIns="0" rtlCol="0" anchor="ctr"/>
-          <a:lstStyle/>
-          <a:p>
-            <a:pPr indent="0" marL="0">
-              <a:buNone/>
-            </a:pPr>
-            <a:r>
-              <a:rPr lang="en-US" sz="1500" dirty="0">
-                <a:solidFill>
-                  <a:schemeClr val="tx1"/>
-                </a:solidFill>
-              </a:rPr>
-              <a:t>Gestão de conteúdo em rede</a:t>
-            </a:r>
-            <a:endParaRPr lang="en-US" sz="1500" dirty="0"/>
-          </a:p>
-        </p:txBody>
-      </p:sp>
-      <p:sp>
-        <p:nvSpPr>
-          <p:cNvPr id="16" name="Card indicadores"/>
-          <p:cNvSpPr/>
-          <p:nvPr/>
-        </p:nvSpPr>
-        <p:spPr>
-          <a:xfrm>
-            <a:off x="6583680" y="1554480"/>
-            <a:ext cx="5029200" cy="4434840"/>
-          </a:xfrm>
-          <a:prstGeom prst="roundRect">
-            <a:avLst>
-              <a:gd name="adj" fmla="val 2474"/>
-            </a:avLst>
-          </a:prstGeom>
-          <a:solidFill>
-            <a:schemeClr val="tx2"/>
-          </a:solidFill>
-          <a:ln/>
-        </p:spPr>
-      </p:sp>
-      <p:sp>
-        <p:nvSpPr>
-          <p:cNvPr id="17" name="Título indicadores"/>
-          <p:cNvSpPr txBox="1"/>
-          <p:nvPr/>
-        </p:nvSpPr>
-        <p:spPr>
-          <a:xfrm>
-            <a:off x="6949440" y="1828800"/>
-            <a:ext cx="4389120" cy="457200"/>
-          </a:xfrm>
-          <a:prstGeom prst="rect">
-            <a:avLst/>
-          </a:prstGeom>
-          <a:noFill/>
-          <a:ln/>
-        </p:spPr>
-        <p:txBody>
-          <a:bodyPr wrap="square" lIns="0" tIns="0" rIns="0" bIns="0" rtlCol="0" anchor="t"/>
-          <a:lstStyle/>
-          <a:p>
-            <a:pPr indent="0" marL="0">
-              <a:buNone/>
-            </a:pPr>
-            <a:r>
-              <a:rPr lang="en-US" sz="2000" b="1" dirty="0">
-                <a:solidFill>
-                  <a:schemeClr val="bg1"/>
-                </a:solidFill>
-              </a:rPr>
-              <a:t>O que você vai medir</a:t>
-            </a:r>
-            <a:endParaRPr lang="en-US" sz="2000" dirty="0"/>
-          </a:p>
-        </p:txBody>
-      </p:sp>
-      <p:sp>
-        <p:nvSpPr>
-          <p:cNvPr id="18" name="Indicadores"/>
-          <p:cNvSpPr txBox="1"/>
-          <p:nvPr/>
-        </p:nvSpPr>
-        <p:spPr>
-          <a:xfrm>
-            <a:off x="6949440" y="2423160"/>
-            <a:ext cx="4389120" cy="3383280"/>
-          </a:xfrm>
-          <a:prstGeom prst="rect">
-            <a:avLst/>
-          </a:prstGeom>
-          <a:noFill/>
-          <a:ln/>
-        </p:spPr>
-        <p:txBody>
-          <a:bodyPr wrap="square" lIns="0" tIns="0" rIns="0" bIns="0" rtlCol="0" anchor="t"/>
-          <a:lstStyle/>
-          <a:p>
-            <a:pPr marL="342900" indent="-342900">
-              <a:spcAft>
-                <a:spcPts val="1000"/>
-              </a:spcAft>
-              <a:buSzPct val="100000"/>
-              <a:buChar char="•"/>
-            </a:pPr>
-            <a:r>
-              <a:rPr lang="en-US" sz="1600" dirty="0">
-                <a:solidFill>
-                  <a:schemeClr val="bg1"/>
-                </a:solidFill>
-              </a:rPr>
-              <a:t>Taxa de parada na vitrine</a:t>
-            </a:r>
-            <a:endParaRPr lang="en-US" sz="1600" dirty="0"/>
-          </a:p>
-          <a:p>
-            <a:pPr marL="342900" indent="-342900">
-              <a:spcAft>
-                <a:spcPts val="1000"/>
-              </a:spcAft>
-              <a:buSzPct val="100000"/>
-              <a:buChar char="•"/>
-            </a:pPr>
-            <a:r>
-              <a:rPr lang="en-US" sz="1600" dirty="0">
-                <a:solidFill>
-                  <a:schemeClr val="bg1"/>
-                </a:solidFill>
-              </a:rPr>
-              <a:t>Entrada em loja</a:t>
-            </a:r>
-            <a:endParaRPr lang="en-US" sz="1600" dirty="0"/>
-          </a:p>
-          <a:p>
-            <a:pPr marL="342900" indent="-342900">
-              <a:spcAft>
-                <a:spcPts val="1000"/>
-              </a:spcAft>
-              <a:buSzPct val="100000"/>
-              <a:buChar char="•"/>
-            </a:pPr>
-            <a:r>
-              <a:rPr lang="en-US" sz="1600" dirty="0">
-                <a:solidFill>
-                  <a:schemeClr val="bg1"/>
-                </a:solidFill>
-              </a:rPr>
-              <a:t>Vendas da peça anunciada</a:t>
-            </a:r>
-            <a:endParaRPr lang="en-US" sz="1600" dirty="0"/>
-          </a:p>
-          <a:p>
-            <a:pPr marL="342900" indent="-342900">
-              <a:spcAft>
-                <a:spcPts val="1000"/>
-              </a:spcAft>
-              <a:buSzPct val="100000"/>
-              <a:buChar char="•"/>
-            </a:pPr>
-            <a:r>
-              <a:rPr lang="en-US" sz="1600" dirty="0">
-                <a:solidFill>
-                  <a:schemeClr val="bg1"/>
-                </a:solidFill>
-              </a:rPr>
-              <a:t>Economia com impressos</a:t>
-            </a:r>
-            <a:endParaRPr lang="en-US" sz="1600" dirty="0"/>
           </a:p>
         </p:txBody>
       </p:sp>
@@ -3983,7 +3765,7 @@
                   <a:schemeClr val="tx1"/>
                 </a:solidFill>
               </a:rPr>
-              <a:t>Projeto em destaque</a:t>
+              <a:t>A solução para o seu espaço</a:t>
             </a:r>
             <a:endParaRPr lang="en-US" sz="3200" dirty="0"/>
           </a:p>
@@ -3991,36 +3773,392 @@
       </p:sp>
       <p:sp>
         <p:nvSpPr>
-          <p:cNvPr id="3" name="Card Boulevard"/>
+          <p:cNvPr id="3" name="Título solução"/>
+          <p:cNvSpPr txBox="1"/>
+          <p:nvPr/>
+        </p:nvSpPr>
+        <p:spPr>
+          <a:xfrm>
+            <a:off x="548640" y="1554480"/>
+            <a:ext cx="5486400" cy="411480"/>
+          </a:xfrm>
+          <a:prstGeom prst="rect">
+            <a:avLst/>
+          </a:prstGeom>
+          <a:noFill/>
+          <a:ln/>
+        </p:spPr>
+        <p:txBody>
+          <a:bodyPr wrap="square" lIns="0" tIns="0" rIns="0" bIns="0" rtlCol="0" anchor="t"/>
+          <a:lstStyle/>
+          <a:p>
+            <a:pPr indent="0" marL="0">
+              <a:buNone/>
+            </a:pPr>
+            <a:r>
+              <a:rPr lang="en-US" sz="2000" b="1" dirty="0">
+                <a:solidFill>
+                  <a:schemeClr val="accent1"/>
+                </a:solidFill>
+              </a:rPr>
+              <a:t>O que propomos</a:t>
+            </a:r>
+            <a:endParaRPr lang="en-US" sz="2000" dirty="0"/>
+          </a:p>
+        </p:txBody>
+      </p:sp>
+      <p:sp>
+        <p:nvSpPr>
+          <p:cNvPr id="4" name="Item 1 círculo"/>
           <p:cNvSpPr/>
           <p:nvPr/>
         </p:nvSpPr>
         <p:spPr>
           <a:xfrm>
-            <a:off x="548640" y="1600200"/>
-            <a:ext cx="5486400" cy="4389120"/>
+            <a:off x="548640" y="2103120"/>
+            <a:ext cx="457200" cy="457200"/>
+          </a:xfrm>
+          <a:prstGeom prst="ellipse">
+            <a:avLst/>
+          </a:prstGeom>
+          <a:solidFill>
+            <a:srgbClr val="2B1A63"/>
+          </a:solidFill>
+          <a:ln/>
+        </p:spPr>
+      </p:sp>
+      <p:pic>
+        <p:nvPicPr>
+          <p:cNvPr id="5" name="Item 1 ícone" descr="preencoded.png">    </p:cNvPr>
+          <p:cNvPicPr>
+            <a:picLocks noChangeAspect="1"/>
+          </p:cNvPicPr>
+          <p:nvPr/>
+        </p:nvPicPr>
+        <p:blipFill>
+          <a:blip r:embed="rId1"/>
+          <a:stretch>
+            <a:fillRect/>
+          </a:stretch>
+        </p:blipFill>
+        <p:spPr>
+          <a:xfrm>
+            <a:off x="662940" y="2217420"/>
+            <a:ext cx="228600" cy="228600"/>
+          </a:xfrm>
+          <a:prstGeom prst="rect">
+            <a:avLst/>
+          </a:prstGeom>
+        </p:spPr>
+      </p:pic>
+      <p:sp>
+        <p:nvSpPr>
+          <p:cNvPr id="6" name="Solução 1"/>
+          <p:cNvSpPr txBox="1"/>
+          <p:nvPr/>
+        </p:nvSpPr>
+        <p:spPr>
+          <a:xfrm>
+            <a:off x="1188720" y="2057400"/>
+            <a:ext cx="4846320" cy="685800"/>
+          </a:xfrm>
+          <a:prstGeom prst="rect">
+            <a:avLst/>
+          </a:prstGeom>
+          <a:noFill/>
+          <a:ln/>
+        </p:spPr>
+        <p:txBody>
+          <a:bodyPr wrap="square" lIns="0" tIns="0" rIns="0" bIns="0" rtlCol="0" anchor="ctr"/>
+          <a:lstStyle/>
+          <a:p>
+            <a:pPr indent="0" marL="0">
+              <a:buNone/>
+            </a:pPr>
+            <a:r>
+              <a:rPr lang="en-US" sz="1500" dirty="0">
+                <a:solidFill>
+                  <a:schemeClr val="tx1"/>
+                </a:solidFill>
+              </a:rPr>
+              <a:t>Painel de vitrine de alto brilho</a:t>
+            </a:r>
+            <a:endParaRPr lang="en-US" sz="1500" dirty="0"/>
+          </a:p>
+        </p:txBody>
+      </p:sp>
+      <p:sp>
+        <p:nvSpPr>
+          <p:cNvPr id="7" name="Item 2 círculo"/>
+          <p:cNvSpPr/>
+          <p:nvPr/>
+        </p:nvSpPr>
+        <p:spPr>
+          <a:xfrm>
+            <a:off x="548640" y="2880360"/>
+            <a:ext cx="457200" cy="457200"/>
+          </a:xfrm>
+          <a:prstGeom prst="ellipse">
+            <a:avLst/>
+          </a:prstGeom>
+          <a:solidFill>
+            <a:srgbClr val="2B1A63"/>
+          </a:solidFill>
+          <a:ln/>
+        </p:spPr>
+      </p:sp>
+      <p:pic>
+        <p:nvPicPr>
+          <p:cNvPr id="8" name="Item 2 ícone" descr="preencoded.png">    </p:cNvPr>
+          <p:cNvPicPr>
+            <a:picLocks noChangeAspect="1"/>
+          </p:cNvPicPr>
+          <p:nvPr/>
+        </p:nvPicPr>
+        <p:blipFill>
+          <a:blip r:embed="rId2"/>
+          <a:stretch>
+            <a:fillRect/>
+          </a:stretch>
+        </p:blipFill>
+        <p:spPr>
+          <a:xfrm>
+            <a:off x="662940" y="2994660"/>
+            <a:ext cx="228600" cy="228600"/>
+          </a:xfrm>
+          <a:prstGeom prst="rect">
+            <a:avLst/>
+          </a:prstGeom>
+        </p:spPr>
+      </p:pic>
+      <p:sp>
+        <p:nvSpPr>
+          <p:cNvPr id="9" name="Solução 2"/>
+          <p:cNvSpPr txBox="1"/>
+          <p:nvPr/>
+        </p:nvSpPr>
+        <p:spPr>
+          <a:xfrm>
+            <a:off x="1188720" y="2834640"/>
+            <a:ext cx="4846320" cy="685800"/>
+          </a:xfrm>
+          <a:prstGeom prst="rect">
+            <a:avLst/>
+          </a:prstGeom>
+          <a:noFill/>
+          <a:ln/>
+        </p:spPr>
+        <p:txBody>
+          <a:bodyPr wrap="square" lIns="0" tIns="0" rIns="0" bIns="0" rtlCol="0" anchor="ctr"/>
+          <a:lstStyle/>
+          <a:p>
+            <a:pPr indent="0" marL="0">
+              <a:buNone/>
+            </a:pPr>
+            <a:r>
+              <a:rPr lang="en-US" sz="1500" dirty="0">
+                <a:solidFill>
+                  <a:schemeClr val="tx1"/>
+                </a:solidFill>
+              </a:rPr>
+              <a:t>LED transparente para fachadas de vidro</a:t>
+            </a:r>
+            <a:endParaRPr lang="en-US" sz="1500" dirty="0"/>
+          </a:p>
+        </p:txBody>
+      </p:sp>
+      <p:sp>
+        <p:nvSpPr>
+          <p:cNvPr id="10" name="Item 3 círculo"/>
+          <p:cNvSpPr/>
+          <p:nvPr/>
+        </p:nvSpPr>
+        <p:spPr>
+          <a:xfrm>
+            <a:off x="548640" y="3657600"/>
+            <a:ext cx="457200" cy="457200"/>
+          </a:xfrm>
+          <a:prstGeom prst="ellipse">
+            <a:avLst/>
+          </a:prstGeom>
+          <a:solidFill>
+            <a:srgbClr val="2B1A63"/>
+          </a:solidFill>
+          <a:ln/>
+        </p:spPr>
+      </p:sp>
+      <p:pic>
+        <p:nvPicPr>
+          <p:cNvPr id="11" name="Item 3 ícone" descr="preencoded.png">    </p:cNvPr>
+          <p:cNvPicPr>
+            <a:picLocks noChangeAspect="1"/>
+          </p:cNvPicPr>
+          <p:nvPr/>
+        </p:nvPicPr>
+        <p:blipFill>
+          <a:blip r:embed="rId3"/>
+          <a:stretch>
+            <a:fillRect/>
+          </a:stretch>
+        </p:blipFill>
+        <p:spPr>
+          <a:xfrm>
+            <a:off x="662940" y="3771900"/>
+            <a:ext cx="228600" cy="228600"/>
+          </a:xfrm>
+          <a:prstGeom prst="rect">
+            <a:avLst/>
+          </a:prstGeom>
+        </p:spPr>
+      </p:pic>
+      <p:sp>
+        <p:nvSpPr>
+          <p:cNvPr id="12" name="Solução 3"/>
+          <p:cNvSpPr txBox="1"/>
+          <p:nvPr/>
+        </p:nvSpPr>
+        <p:spPr>
+          <a:xfrm>
+            <a:off x="1188720" y="3611880"/>
+            <a:ext cx="4846320" cy="685800"/>
+          </a:xfrm>
+          <a:prstGeom prst="rect">
+            <a:avLst/>
+          </a:prstGeom>
+          <a:noFill/>
+          <a:ln/>
+        </p:spPr>
+        <p:txBody>
+          <a:bodyPr wrap="square" lIns="0" tIns="0" rIns="0" bIns="0" rtlCol="0" anchor="ctr"/>
+          <a:lstStyle/>
+          <a:p>
+            <a:pPr indent="0" marL="0">
+              <a:buNone/>
+            </a:pPr>
+            <a:r>
+              <a:rPr lang="en-US" sz="1500" dirty="0">
+                <a:solidFill>
+                  <a:schemeClr val="tx1"/>
+                </a:solidFill>
+              </a:rPr>
+              <a:t>Totens digitais internos</a:t>
+            </a:r>
+            <a:endParaRPr lang="en-US" sz="1500" dirty="0"/>
+          </a:p>
+        </p:txBody>
+      </p:sp>
+      <p:sp>
+        <p:nvSpPr>
+          <p:cNvPr id="13" name="Item 4 círculo"/>
+          <p:cNvSpPr/>
+          <p:nvPr/>
+        </p:nvSpPr>
+        <p:spPr>
+          <a:xfrm>
+            <a:off x="548640" y="4434840"/>
+            <a:ext cx="457200" cy="457200"/>
+          </a:xfrm>
+          <a:prstGeom prst="ellipse">
+            <a:avLst/>
+          </a:prstGeom>
+          <a:solidFill>
+            <a:srgbClr val="2B1A63"/>
+          </a:solidFill>
+          <a:ln/>
+        </p:spPr>
+      </p:sp>
+      <p:pic>
+        <p:nvPicPr>
+          <p:cNvPr id="14" name="Item 4 ícone" descr="preencoded.png">    </p:cNvPr>
+          <p:cNvPicPr>
+            <a:picLocks noChangeAspect="1"/>
+          </p:cNvPicPr>
+          <p:nvPr/>
+        </p:nvPicPr>
+        <p:blipFill>
+          <a:blip r:embed="rId4"/>
+          <a:stretch>
+            <a:fillRect/>
+          </a:stretch>
+        </p:blipFill>
+        <p:spPr>
+          <a:xfrm>
+            <a:off x="662940" y="4549140"/>
+            <a:ext cx="228600" cy="228600"/>
+          </a:xfrm>
+          <a:prstGeom prst="rect">
+            <a:avLst/>
+          </a:prstGeom>
+        </p:spPr>
+      </p:pic>
+      <p:sp>
+        <p:nvSpPr>
+          <p:cNvPr id="15" name="Solução 4"/>
+          <p:cNvSpPr txBox="1"/>
+          <p:nvPr/>
+        </p:nvSpPr>
+        <p:spPr>
+          <a:xfrm>
+            <a:off x="1188720" y="4389120"/>
+            <a:ext cx="4846320" cy="685800"/>
+          </a:xfrm>
+          <a:prstGeom prst="rect">
+            <a:avLst/>
+          </a:prstGeom>
+          <a:noFill/>
+          <a:ln/>
+        </p:spPr>
+        <p:txBody>
+          <a:bodyPr wrap="square" lIns="0" tIns="0" rIns="0" bIns="0" rtlCol="0" anchor="ctr"/>
+          <a:lstStyle/>
+          <a:p>
+            <a:pPr indent="0" marL="0">
+              <a:buNone/>
+            </a:pPr>
+            <a:r>
+              <a:rPr lang="en-US" sz="1500" dirty="0">
+                <a:solidFill>
+                  <a:schemeClr val="tx1"/>
+                </a:solidFill>
+              </a:rPr>
+              <a:t>Gestão de conteúdo em rede</a:t>
+            </a:r>
+            <a:endParaRPr lang="en-US" sz="1500" dirty="0"/>
+          </a:p>
+        </p:txBody>
+      </p:sp>
+      <p:sp>
+        <p:nvSpPr>
+          <p:cNvPr id="16" name="Card indicadores"/>
+          <p:cNvSpPr/>
+          <p:nvPr/>
+        </p:nvSpPr>
+        <p:spPr>
+          <a:xfrm>
+            <a:off x="6583680" y="1554480"/>
+            <a:ext cx="5029200" cy="4434840"/>
           </a:xfrm>
           <a:prstGeom prst="roundRect">
             <a:avLst>
-              <a:gd name="adj" fmla="val 2500"/>
+              <a:gd name="adj" fmla="val 2474"/>
             </a:avLst>
           </a:prstGeom>
           <a:solidFill>
-            <a:schemeClr val="tx1"/>
+            <a:schemeClr val="tx2"/>
           </a:solidFill>
           <a:ln/>
         </p:spPr>
       </p:sp>
       <p:sp>
         <p:nvSpPr>
-          <p:cNvPr id="4" name="Boulevard título"/>
+          <p:cNvPr id="17" name="Título indicadores"/>
           <p:cNvSpPr txBox="1"/>
           <p:nvPr/>
         </p:nvSpPr>
         <p:spPr>
           <a:xfrm>
-            <a:off x="914400" y="1920240"/>
-            <a:ext cx="4754880" cy="457200"/>
+            <a:off x="6949440" y="1828800"/>
+            <a:ext cx="4389120" cy="457200"/>
           </a:xfrm>
           <a:prstGeom prst="rect">
             <a:avLst/>
@@ -4036,27 +4174,27 @@
               <a:buNone/>
             </a:pPr>
             <a:r>
-              <a:rPr lang="en-US" sz="1800" b="1" dirty="0">
-                <a:solidFill>
-                  <a:schemeClr val="accent1"/>
-                </a:solidFill>
-              </a:rPr>
-              <a:t>Boulevard.Live</a:t>
-            </a:r>
-            <a:endParaRPr lang="en-US" sz="1800" dirty="0"/>
-          </a:p>
-        </p:txBody>
-      </p:sp>
-      <p:sp>
-        <p:nvSpPr>
-          <p:cNvPr id="5" name="Boulevard número"/>
+              <a:rPr lang="en-US" sz="2000" b="1" dirty="0">
+                <a:solidFill>
+                  <a:schemeClr val="bg1"/>
+                </a:solidFill>
+              </a:rPr>
+              <a:t>O que você vai medir</a:t>
+            </a:r>
+            <a:endParaRPr lang="en-US" sz="2000" dirty="0"/>
+          </a:p>
+        </p:txBody>
+      </p:sp>
+      <p:sp>
+        <p:nvSpPr>
+          <p:cNvPr id="18" name="Indicadores"/>
           <p:cNvSpPr txBox="1"/>
           <p:nvPr/>
         </p:nvSpPr>
         <p:spPr>
           <a:xfrm>
-            <a:off x="914400" y="2423160"/>
-            <a:ext cx="4754880" cy="1097280"/>
+            <a:off x="6949440" y="2423160"/>
+            <a:ext cx="4389120" cy="3383280"/>
           </a:xfrm>
           <a:prstGeom prst="rect">
             <a:avLst/>
@@ -4068,44 +4206,30 @@
           <a:bodyPr wrap="square" lIns="0" tIns="0" rIns="0" bIns="0" rtlCol="0" anchor="t"/>
           <a:lstStyle/>
           <a:p>
-            <a:pPr indent="0" marL="0">
-              <a:buNone/>
-            </a:pPr>
-            <a:r>
-              <a:rPr lang="en-US" sz="6000" b="1" dirty="0">
+            <a:pPr marL="342900" indent="-342900">
+              <a:spcAft>
+                <a:spcPts val="1000"/>
+              </a:spcAft>
+              <a:buSzPct val="100000"/>
+              <a:buChar char="•"/>
+            </a:pPr>
+            <a:r>
+              <a:rPr lang="en-US" sz="1600" dirty="0">
                 <a:solidFill>
                   <a:schemeClr val="bg1"/>
                 </a:solidFill>
               </a:rPr>
-              <a:t>1.125 m²</a:t>
-            </a:r>
-            <a:endParaRPr lang="en-US" sz="6000" dirty="0"/>
-          </a:p>
-        </p:txBody>
-      </p:sp>
-      <p:sp>
-        <p:nvSpPr>
-          <p:cNvPr id="6" name="Boulevard texto"/>
-          <p:cNvSpPr txBox="1"/>
-          <p:nvPr/>
-        </p:nvSpPr>
-        <p:spPr>
-          <a:xfrm>
-            <a:off x="914400" y="3703320"/>
-            <a:ext cx="4754880" cy="2011680"/>
-          </a:xfrm>
-          <a:prstGeom prst="rect">
-            <a:avLst/>
-          </a:prstGeom>
-          <a:noFill/>
-          <a:ln/>
-        </p:spPr>
-        <p:txBody>
-          <a:bodyPr wrap="square" lIns="0" tIns="0" rIns="0" bIns="0" rtlCol="0" anchor="t"/>
-          <a:lstStyle/>
-          <a:p>
-            <a:pPr indent="0" marL="0">
-              <a:buNone/>
+              <a:t>Taxa de parada na vitrine</a:t>
+            </a:r>
+            <a:endParaRPr lang="en-US" sz="1600" dirty="0"/>
+          </a:p>
+          <a:p>
+            <a:pPr marL="342900" indent="-342900">
+              <a:spcAft>
+                <a:spcPts val="1000"/>
+              </a:spcAft>
+              <a:buSzPct val="100000"/>
+              <a:buChar char="•"/>
             </a:pPr>
             <a:r>
               <a:rPr lang="en-US" sz="1600" dirty="0">
@@ -4113,168 +4237,45 @@
                   <a:schemeClr val="bg1"/>
                 </a:solidFill>
               </a:rPr>
-              <a:t>O maior painel de LED da América Latina, em Brasília. Inspirado na Times Square e instalado no ponto de maior fluxo de pessoas e veículos da cidade.</a:t>
+              <a:t>Entrada em loja</a:t>
             </a:r>
             <a:endParaRPr lang="en-US" sz="1600" dirty="0"/>
           </a:p>
-        </p:txBody>
-      </p:sp>
-      <p:sp>
-        <p:nvSpPr>
-          <p:cNvPr id="7" name="Área case do segmento"/>
-          <p:cNvSpPr/>
-          <p:nvPr/>
-        </p:nvSpPr>
-        <p:spPr>
-          <a:xfrm>
-            <a:off x="6309360" y="1600200"/>
-            <a:ext cx="5303520" cy="4389120"/>
-          </a:xfrm>
-          <a:prstGeom prst="roundRect">
-            <a:avLst>
-              <a:gd name="adj" fmla="val 2500"/>
-            </a:avLst>
-          </a:prstGeom>
-          <a:solidFill>
-            <a:schemeClr val="bg2"/>
-          </a:solidFill>
-          <a:ln w="19050">
-            <a:solidFill>
-              <a:srgbClr val="8B5CF6"/>
-            </a:solidFill>
-            <a:prstDash val="dash"/>
-          </a:ln>
-        </p:spPr>
-      </p:sp>
-      <p:sp>
-        <p:nvSpPr>
-          <p:cNvPr id="8" name="Case título"/>
-          <p:cNvSpPr txBox="1"/>
-          <p:nvPr/>
-        </p:nvSpPr>
-        <p:spPr>
-          <a:xfrm>
-            <a:off x="6675120" y="1920240"/>
-            <a:ext cx="4572000" cy="457200"/>
-          </a:xfrm>
-          <a:prstGeom prst="rect">
-            <a:avLst/>
-          </a:prstGeom>
-          <a:noFill/>
-          <a:ln/>
-        </p:spPr>
-        <p:txBody>
-          <a:bodyPr wrap="square" lIns="0" tIns="0" rIns="0" bIns="0" rtlCol="0" anchor="t"/>
-          <a:lstStyle/>
-          <a:p>
-            <a:pPr indent="0" marL="0">
-              <a:buNone/>
-            </a:pPr>
-            <a:r>
-              <a:rPr lang="en-US" sz="1800" b="1" dirty="0">
-                <a:solidFill>
-                  <a:schemeClr val="accent1"/>
-                </a:solidFill>
-              </a:rPr>
-              <a:t>Case do seu segmento</a:t>
-            </a:r>
-            <a:endParaRPr lang="en-US" sz="1800" dirty="0"/>
-          </a:p>
-        </p:txBody>
-      </p:sp>
-      <p:sp>
-        <p:nvSpPr>
-          <p:cNvPr id="9" name="Case conteúdo"/>
-          <p:cNvSpPr txBox="1"/>
-          <p:nvPr/>
-        </p:nvSpPr>
-        <p:spPr>
-          <a:xfrm>
-            <a:off x="6675120" y="2514600"/>
-            <a:ext cx="4572000" cy="3200400"/>
-          </a:xfrm>
-          <a:prstGeom prst="rect">
-            <a:avLst/>
-          </a:prstGeom>
-          <a:noFill/>
-          <a:ln/>
-        </p:spPr>
-        <p:txBody>
-          <a:bodyPr wrap="square" lIns="0" tIns="0" rIns="0" bIns="0" rtlCol="0" anchor="t"/>
-          <a:lstStyle/>
-          <a:p>
-            <a:pPr indent="0" marL="0">
-              <a:buNone/>
-            </a:pPr>
-            <a:r>
-              <a:rPr lang="en-US" sz="1500" dirty="0">
-                <a:solidFill>
-                  <a:schemeClr val="tx2"/>
-                </a:solidFill>
-              </a:rPr>
-              <a:t>[Nome do cliente do segmento]</a:t>
-            </a:r>
-            <a:endParaRPr lang="en-US" sz="1500" dirty="0"/>
-          </a:p>
-          <a:p>
-            <a:pPr indent="0" marL="0">
-              <a:buNone/>
-            </a:pPr>
-            <a:endParaRPr lang="en-US" sz="1500" dirty="0"/>
-          </a:p>
-          <a:p>
-            <a:pPr indent="0" marL="0">
-              <a:buNone/>
-            </a:pPr>
-            <a:r>
-              <a:rPr lang="en-US" sz="1500" dirty="0">
-                <a:solidFill>
-                  <a:schemeClr val="tx2"/>
-                </a:solidFill>
-              </a:rPr>
-              <a:t>[Desafio em uma frase]</a:t>
-            </a:r>
-            <a:endParaRPr lang="en-US" sz="1500" dirty="0"/>
-          </a:p>
-          <a:p>
-            <a:pPr indent="0" marL="0">
-              <a:buNone/>
-            </a:pPr>
-            <a:endParaRPr lang="en-US" sz="1500" dirty="0"/>
-          </a:p>
-          <a:p>
-            <a:pPr indent="0" marL="0">
-              <a:buNone/>
-            </a:pPr>
-            <a:r>
-              <a:rPr lang="en-US" sz="1500" dirty="0">
-                <a:solidFill>
-                  <a:schemeClr val="tx2"/>
-                </a:solidFill>
-              </a:rPr>
-              <a:t>[O que a LedWave entregou]</a:t>
-            </a:r>
-            <a:endParaRPr lang="en-US" sz="1500" dirty="0"/>
-          </a:p>
-          <a:p>
-            <a:pPr indent="0" marL="0">
-              <a:buNone/>
-            </a:pPr>
-            <a:endParaRPr lang="en-US" sz="1500" dirty="0"/>
-          </a:p>
-          <a:p>
-            <a:pPr indent="0" marL="0">
-              <a:buNone/>
-            </a:pPr>
-            <a:r>
-              <a:rPr lang="en-US" sz="1500" dirty="0">
-                <a:solidFill>
-                  <a:schemeClr val="tx2"/>
-                </a:solidFill>
-              </a:rPr>
-              <a:t>[Resultado]</a:t>
-            </a:r>
-            <a:endParaRPr lang="en-US" sz="1500" dirty="0"/>
+          <a:p>
+            <a:pPr marL="342900" indent="-342900">
+              <a:spcAft>
+                <a:spcPts val="1000"/>
+              </a:spcAft>
+              <a:buSzPct val="100000"/>
+              <a:buChar char="•"/>
+            </a:pPr>
+            <a:r>
+              <a:rPr lang="en-US" sz="1600" dirty="0">
+                <a:solidFill>
+                  <a:schemeClr val="bg1"/>
+                </a:solidFill>
+              </a:rPr>
+              <a:t>Vendas da peça anunciada</a:t>
+            </a:r>
+            <a:endParaRPr lang="en-US" sz="1600" dirty="0"/>
+          </a:p>
+          <a:p>
+            <a:pPr marL="342900" indent="-342900">
+              <a:spcAft>
+                <a:spcPts val="1000"/>
+              </a:spcAft>
+              <a:buSzPct val="100000"/>
+              <a:buChar char="•"/>
+            </a:pPr>
+            <a:r>
+              <a:rPr lang="en-US" sz="1600" dirty="0">
+                <a:solidFill>
+                  <a:schemeClr val="bg1"/>
+                </a:solidFill>
+              </a:rPr>
+              <a:t>Economia com impressos</a:t>
+            </a:r>
+            <a:endParaRPr lang="en-US" sz="1600" dirty="0"/>
           </a:p>
         </p:txBody>
       </p:sp>
@@ -4358,6 +4359,403 @@
         </p:nvSpPr>
         <p:spPr>
           <a:xfrm>
+            <a:off x="548640" y="411480"/>
+            <a:ext cx="11064240" cy="822960"/>
+          </a:xfrm>
+          <a:prstGeom prst="rect">
+            <a:avLst/>
+          </a:prstGeom>
+          <a:noFill/>
+          <a:ln/>
+        </p:spPr>
+        <p:txBody>
+          <a:bodyPr wrap="square" lIns="0" tIns="0" rIns="0" bIns="0" rtlCol="0" anchor="ctr"/>
+          <a:lstStyle/>
+          <a:p>
+            <a:pPr algn="l" indent="0" marL="0">
+              <a:buNone/>
+            </a:pPr>
+            <a:r>
+              <a:rPr lang="en-US" sz="3200" b="1" dirty="0">
+                <a:solidFill>
+                  <a:schemeClr val="tx1"/>
+                </a:solidFill>
+              </a:rPr>
+              <a:t>Projeto em destaque</a:t>
+            </a:r>
+            <a:endParaRPr lang="en-US" sz="3200" dirty="0"/>
+          </a:p>
+        </p:txBody>
+      </p:sp>
+      <p:sp>
+        <p:nvSpPr>
+          <p:cNvPr id="3" name="Card Boulevard"/>
+          <p:cNvSpPr/>
+          <p:nvPr/>
+        </p:nvSpPr>
+        <p:spPr>
+          <a:xfrm>
+            <a:off x="548640" y="1600200"/>
+            <a:ext cx="5486400" cy="4389120"/>
+          </a:xfrm>
+          <a:prstGeom prst="roundRect">
+            <a:avLst>
+              <a:gd name="adj" fmla="val 2500"/>
+            </a:avLst>
+          </a:prstGeom>
+          <a:solidFill>
+            <a:schemeClr val="tx1"/>
+          </a:solidFill>
+          <a:ln/>
+        </p:spPr>
+      </p:sp>
+      <p:sp>
+        <p:nvSpPr>
+          <p:cNvPr id="4" name="Boulevard título"/>
+          <p:cNvSpPr txBox="1"/>
+          <p:nvPr/>
+        </p:nvSpPr>
+        <p:spPr>
+          <a:xfrm>
+            <a:off x="914400" y="1920240"/>
+            <a:ext cx="4754880" cy="457200"/>
+          </a:xfrm>
+          <a:prstGeom prst="rect">
+            <a:avLst/>
+          </a:prstGeom>
+          <a:noFill/>
+          <a:ln/>
+        </p:spPr>
+        <p:txBody>
+          <a:bodyPr wrap="square" lIns="0" tIns="0" rIns="0" bIns="0" rtlCol="0" anchor="t"/>
+          <a:lstStyle/>
+          <a:p>
+            <a:pPr indent="0" marL="0">
+              <a:buNone/>
+            </a:pPr>
+            <a:r>
+              <a:rPr lang="en-US" sz="1800" b="1" dirty="0">
+                <a:solidFill>
+                  <a:schemeClr val="accent1"/>
+                </a:solidFill>
+              </a:rPr>
+              <a:t>Boulevard.Live</a:t>
+            </a:r>
+            <a:endParaRPr lang="en-US" sz="1800" dirty="0"/>
+          </a:p>
+        </p:txBody>
+      </p:sp>
+      <p:sp>
+        <p:nvSpPr>
+          <p:cNvPr id="5" name="Boulevard número"/>
+          <p:cNvSpPr txBox="1"/>
+          <p:nvPr/>
+        </p:nvSpPr>
+        <p:spPr>
+          <a:xfrm>
+            <a:off x="914400" y="2423160"/>
+            <a:ext cx="4754880" cy="1097280"/>
+          </a:xfrm>
+          <a:prstGeom prst="rect">
+            <a:avLst/>
+          </a:prstGeom>
+          <a:noFill/>
+          <a:ln/>
+        </p:spPr>
+        <p:txBody>
+          <a:bodyPr wrap="square" lIns="0" tIns="0" rIns="0" bIns="0" rtlCol="0" anchor="t"/>
+          <a:lstStyle/>
+          <a:p>
+            <a:pPr indent="0" marL="0">
+              <a:buNone/>
+            </a:pPr>
+            <a:r>
+              <a:rPr lang="en-US" sz="6000" b="1" dirty="0">
+                <a:solidFill>
+                  <a:schemeClr val="bg1"/>
+                </a:solidFill>
+              </a:rPr>
+              <a:t>1.125 m²</a:t>
+            </a:r>
+            <a:endParaRPr lang="en-US" sz="6000" dirty="0"/>
+          </a:p>
+        </p:txBody>
+      </p:sp>
+      <p:sp>
+        <p:nvSpPr>
+          <p:cNvPr id="6" name="Boulevard texto"/>
+          <p:cNvSpPr txBox="1"/>
+          <p:nvPr/>
+        </p:nvSpPr>
+        <p:spPr>
+          <a:xfrm>
+            <a:off x="914400" y="3703320"/>
+            <a:ext cx="4754880" cy="2011680"/>
+          </a:xfrm>
+          <a:prstGeom prst="rect">
+            <a:avLst/>
+          </a:prstGeom>
+          <a:noFill/>
+          <a:ln/>
+        </p:spPr>
+        <p:txBody>
+          <a:bodyPr wrap="square" lIns="0" tIns="0" rIns="0" bIns="0" rtlCol="0" anchor="t"/>
+          <a:lstStyle/>
+          <a:p>
+            <a:pPr indent="0" marL="0">
+              <a:buNone/>
+            </a:pPr>
+            <a:r>
+              <a:rPr lang="en-US" sz="1600" dirty="0">
+                <a:solidFill>
+                  <a:schemeClr val="bg1"/>
+                </a:solidFill>
+              </a:rPr>
+              <a:t>O maior painel de LED da América Latina, em Brasília. Inspirado na Times Square e instalado no ponto de maior fluxo de pessoas e veículos da cidade.</a:t>
+            </a:r>
+            <a:endParaRPr lang="en-US" sz="1600" dirty="0"/>
+          </a:p>
+        </p:txBody>
+      </p:sp>
+      <p:sp>
+        <p:nvSpPr>
+          <p:cNvPr id="7" name="Área case do segmento"/>
+          <p:cNvSpPr/>
+          <p:nvPr/>
+        </p:nvSpPr>
+        <p:spPr>
+          <a:xfrm>
+            <a:off x="6309360" y="1600200"/>
+            <a:ext cx="5303520" cy="4389120"/>
+          </a:xfrm>
+          <a:prstGeom prst="roundRect">
+            <a:avLst>
+              <a:gd name="adj" fmla="val 2500"/>
+            </a:avLst>
+          </a:prstGeom>
+          <a:solidFill>
+            <a:schemeClr val="bg2"/>
+          </a:solidFill>
+          <a:ln w="19050">
+            <a:solidFill>
+              <a:srgbClr val="8B5CF6"/>
+            </a:solidFill>
+            <a:prstDash val="dash"/>
+          </a:ln>
+        </p:spPr>
+      </p:sp>
+      <p:sp>
+        <p:nvSpPr>
+          <p:cNvPr id="8" name="Case título"/>
+          <p:cNvSpPr txBox="1"/>
+          <p:nvPr/>
+        </p:nvSpPr>
+        <p:spPr>
+          <a:xfrm>
+            <a:off x="6675120" y="1920240"/>
+            <a:ext cx="4572000" cy="457200"/>
+          </a:xfrm>
+          <a:prstGeom prst="rect">
+            <a:avLst/>
+          </a:prstGeom>
+          <a:noFill/>
+          <a:ln/>
+        </p:spPr>
+        <p:txBody>
+          <a:bodyPr wrap="square" lIns="0" tIns="0" rIns="0" bIns="0" rtlCol="0" anchor="t"/>
+          <a:lstStyle/>
+          <a:p>
+            <a:pPr indent="0" marL="0">
+              <a:buNone/>
+            </a:pPr>
+            <a:r>
+              <a:rPr lang="en-US" sz="1800" b="1" dirty="0">
+                <a:solidFill>
+                  <a:schemeClr val="accent1"/>
+                </a:solidFill>
+              </a:rPr>
+              <a:t>Case do seu segmento</a:t>
+            </a:r>
+            <a:endParaRPr lang="en-US" sz="1800" dirty="0"/>
+          </a:p>
+        </p:txBody>
+      </p:sp>
+      <p:sp>
+        <p:nvSpPr>
+          <p:cNvPr id="9" name="Case conteúdo"/>
+          <p:cNvSpPr txBox="1"/>
+          <p:nvPr/>
+        </p:nvSpPr>
+        <p:spPr>
+          <a:xfrm>
+            <a:off x="6675120" y="2514600"/>
+            <a:ext cx="4572000" cy="3200400"/>
+          </a:xfrm>
+          <a:prstGeom prst="rect">
+            <a:avLst/>
+          </a:prstGeom>
+          <a:noFill/>
+          <a:ln/>
+        </p:spPr>
+        <p:txBody>
+          <a:bodyPr wrap="square" lIns="0" tIns="0" rIns="0" bIns="0" rtlCol="0" anchor="t"/>
+          <a:lstStyle/>
+          <a:p>
+            <a:pPr indent="0" marL="0">
+              <a:buNone/>
+            </a:pPr>
+            <a:r>
+              <a:rPr lang="en-US" sz="1500" dirty="0">
+                <a:solidFill>
+                  <a:schemeClr val="tx2"/>
+                </a:solidFill>
+              </a:rPr>
+              <a:t>[Nome do cliente do segmento]</a:t>
+            </a:r>
+            <a:endParaRPr lang="en-US" sz="1500" dirty="0"/>
+          </a:p>
+          <a:p>
+            <a:pPr indent="0" marL="0">
+              <a:buNone/>
+            </a:pPr>
+            <a:endParaRPr lang="en-US" sz="1500" dirty="0"/>
+          </a:p>
+          <a:p>
+            <a:pPr indent="0" marL="0">
+              <a:buNone/>
+            </a:pPr>
+            <a:r>
+              <a:rPr lang="en-US" sz="1500" dirty="0">
+                <a:solidFill>
+                  <a:schemeClr val="tx2"/>
+                </a:solidFill>
+              </a:rPr>
+              <a:t>[Desafio em uma frase]</a:t>
+            </a:r>
+            <a:endParaRPr lang="en-US" sz="1500" dirty="0"/>
+          </a:p>
+          <a:p>
+            <a:pPr indent="0" marL="0">
+              <a:buNone/>
+            </a:pPr>
+            <a:endParaRPr lang="en-US" sz="1500" dirty="0"/>
+          </a:p>
+          <a:p>
+            <a:pPr indent="0" marL="0">
+              <a:buNone/>
+            </a:pPr>
+            <a:r>
+              <a:rPr lang="en-US" sz="1500" dirty="0">
+                <a:solidFill>
+                  <a:schemeClr val="tx2"/>
+                </a:solidFill>
+              </a:rPr>
+              <a:t>[O que a LedWave entregou]</a:t>
+            </a:r>
+            <a:endParaRPr lang="en-US" sz="1500" dirty="0"/>
+          </a:p>
+          <a:p>
+            <a:pPr indent="0" marL="0">
+              <a:buNone/>
+            </a:pPr>
+            <a:endParaRPr lang="en-US" sz="1500" dirty="0"/>
+          </a:p>
+          <a:p>
+            <a:pPr indent="0" marL="0">
+              <a:buNone/>
+            </a:pPr>
+            <a:r>
+              <a:rPr lang="en-US" sz="1500" dirty="0">
+                <a:solidFill>
+                  <a:schemeClr val="tx2"/>
+                </a:solidFill>
+              </a:rPr>
+              <a:t>[Resultado]</a:t>
+            </a:r>
+            <a:endParaRPr lang="en-US" sz="1500" dirty="0"/>
+          </a:p>
+        </p:txBody>
+      </p:sp>
+      <p:sp>
+        <p:nvSpPr>
+          <p:cNvPr id="25" name="Slide Number Placeholder 0"/>
+          <p:cNvSpPr>
+            <a:spLocks noGrp="1"/>
+          </p:cNvSpPr>
+          <p:nvPr>
+            <p:ph type="sldNum" sz="quarter" idx="4294967295"/>
+          </p:nvPr>
+        </p:nvSpPr>
+        <p:spPr>
+          <a:xfrm>
+            <a:off x="11155680" y="6355080"/>
+            <a:ext cx="457200" cy="274320"/>
+          </a:xfrm>
+          <a:prstGeom prst="rect">
+            <a:avLst/>
+          </a:prstGeom>
+          <a:extLst>
+            <a:ext uri="{C572A759-6A51-4108-AA02-DFA0A04FC94B}">
+              <ma14:wrappingTextBoxFlag xmlns:ma14="http://schemas.microsoft.com/office/mac/drawingml/2011/main" val="0"/>
+            </a:ext>
+          </a:extLst>
+        </p:spPr>
+        <p:txBody>
+          <a:bodyPr/>
+          <a:lstStyle>
+            <a:lvl1pPr>
+              <a:defRPr sz="1000">
+                <a:solidFill>
+                  <a:srgbClr val="6B6385"/>
+                </a:solidFill>
+              </a:defRPr>
+            </a:lvl1pPr>
+          </a:lstStyle>
+          <a:p>
+            <a:pPr algn="r"/>
+            <a:fld id="{F7021451-1387-4CA6-816F-3879F97B5CBC}" type="slidenum">
+              <a:rPr b="0" lang="en-US"/>
+              <a:t>13</a:t>
+            </a:fld>
+            <a:endParaRPr lang="en-US"/>
+          </a:p>
+        </p:txBody>
+      </p:sp>
+    </p:spTree>
+  </p:cSld>
+  <p:clrMapOvr>
+    <a:masterClrMapping/>
+  </p:clrMapOvr>
+</p:sld>
+</file>
+
+<file path=ppt/slides/slide14.xml><?xml version="1.0" encoding="utf-8"?>
+<p:sld xmlns:a="http://schemas.openxmlformats.org/drawingml/2006/main" xmlns:r="http://schemas.openxmlformats.org/officeDocument/2006/relationships" xmlns:p="http://schemas.openxmlformats.org/presentationml/2006/main">
+  <p:cSld name="Slide 14">
+    <p:spTree>
+      <p:nvGrpSpPr>
+        <p:cNvPr id="1" name=""/>
+        <p:cNvGrpSpPr/>
+        <p:nvPr/>
+      </p:nvGrpSpPr>
+      <p:grpSpPr>
+        <a:xfrm>
+          <a:off x="0" y="0"/>
+          <a:ext cx="0" cy="0"/>
+          <a:chOff x="0" y="0"/>
+          <a:chExt cx="0" cy="0"/>
+        </a:xfrm>
+      </p:grpSpPr>
+      <p:sp>
+        <p:nvSpPr>
+          <p:cNvPr id="2" name="Text 1"/>
+          <p:cNvSpPr/>
+          <p:nvPr>
+            <p:ph idx="101" type="title" hasCustomPrompt="1"/>
+          </p:nvPr>
+        </p:nvSpPr>
+        <p:spPr>
+          <a:xfrm>
             <a:off x="548640" y="1463040"/>
             <a:ext cx="6949440" cy="2468880"/>
           </a:xfrm>
@@ -4628,7 +5026,7 @@
         <p:spPr>
           <a:xfrm>
             <a:off x="822960" y="2011680"/>
-            <a:ext cx="8229600" cy="3840480"/>
+            <a:ext cx="8229600" cy="3291840"/>
           </a:xfrm>
           <a:prstGeom prst="rect">
             <a:avLst/>
@@ -7124,7 +7522,7 @@
                   <a:schemeClr val="tx1"/>
                 </a:solidFill>
               </a:rPr>
-              <a:t>Quem confia na LedWave</a:t>
+              <a:t>Por que a LedWave</a:t>
             </a:r>
             <a:endParaRPr lang="en-US" sz="3200" dirty="0"/>
           </a:p>
@@ -7132,18 +7530,18 @@
       </p:sp>
       <p:sp>
         <p:nvSpPr>
-          <p:cNvPr id="3" name="Marca Volkswagen"/>
+          <p:cNvPr id="3" name="Diferencial Solução 360°"/>
           <p:cNvSpPr/>
           <p:nvPr/>
         </p:nvSpPr>
         <p:spPr>
           <a:xfrm>
-            <a:off x="548640" y="1691640"/>
-            <a:ext cx="3474720" cy="1554480"/>
+            <a:off x="548640" y="1600200"/>
+            <a:ext cx="2606040" cy="2011680"/>
           </a:xfrm>
           <a:prstGeom prst="roundRect">
             <a:avLst>
-              <a:gd name="adj" fmla="val 7059"/>
+              <a:gd name="adj" fmla="val 5455"/>
             </a:avLst>
           </a:prstGeom>
           <a:solidFill>
@@ -7154,179 +7552,27 @@
       </p:sp>
       <p:sp>
         <p:nvSpPr>
-          <p:cNvPr id="4" name="Marca nome 1"/>
-          <p:cNvSpPr txBox="1"/>
-          <p:nvPr/>
-        </p:nvSpPr>
-        <p:spPr>
-          <a:xfrm>
-            <a:off x="548640" y="1691640"/>
-            <a:ext cx="3474720" cy="1554480"/>
-          </a:xfrm>
-          <a:prstGeom prst="rect">
-            <a:avLst/>
-          </a:prstGeom>
-          <a:noFill/>
-          <a:ln/>
-        </p:spPr>
-        <p:txBody>
-          <a:bodyPr wrap="square" lIns="0" tIns="0" rIns="0" bIns="0" rtlCol="0" anchor="ctr"/>
-          <a:lstStyle/>
-          <a:p>
-            <a:pPr algn="ctr" indent="0" marL="0">
-              <a:buNone/>
-            </a:pPr>
-            <a:r>
-              <a:rPr lang="en-US" sz="2800" b="1" dirty="0">
-                <a:solidFill>
-                  <a:schemeClr val="tx2"/>
-                </a:solidFill>
-              </a:rPr>
-              <a:t>Volkswagen</a:t>
-            </a:r>
-            <a:endParaRPr lang="en-US" sz="2800" dirty="0"/>
-          </a:p>
-        </p:txBody>
-      </p:sp>
-      <p:sp>
-        <p:nvSpPr>
-          <p:cNvPr id="5" name="Marca Globo"/>
+          <p:cNvPr id="4" name="Solução 360° círculo"/>
           <p:cNvSpPr/>
           <p:nvPr/>
         </p:nvSpPr>
         <p:spPr>
           <a:xfrm>
-            <a:off x="4297680" y="1691640"/>
-            <a:ext cx="3474720" cy="1554480"/>
-          </a:xfrm>
-          <a:prstGeom prst="roundRect">
-            <a:avLst>
-              <a:gd name="adj" fmla="val 7059"/>
-            </a:avLst>
+            <a:off x="822960" y="1874520"/>
+            <a:ext cx="640080" cy="640080"/>
+          </a:xfrm>
+          <a:prstGeom prst="ellipse">
+            <a:avLst/>
           </a:prstGeom>
           <a:solidFill>
-            <a:schemeClr val="bg2"/>
-          </a:solidFill>
-          <a:ln/>
-        </p:spPr>
-      </p:sp>
-      <p:sp>
-        <p:nvSpPr>
-          <p:cNvPr id="6" name="Marca nome 2"/>
-          <p:cNvSpPr txBox="1"/>
-          <p:nvPr/>
-        </p:nvSpPr>
-        <p:spPr>
-          <a:xfrm>
-            <a:off x="4297680" y="1691640"/>
-            <a:ext cx="3474720" cy="1554480"/>
-          </a:xfrm>
-          <a:prstGeom prst="rect">
-            <a:avLst/>
-          </a:prstGeom>
-          <a:noFill/>
-          <a:ln/>
-        </p:spPr>
-        <p:txBody>
-          <a:bodyPr wrap="square" lIns="0" tIns="0" rIns="0" bIns="0" rtlCol="0" anchor="ctr"/>
-          <a:lstStyle/>
-          <a:p>
-            <a:pPr algn="ctr" indent="0" marL="0">
-              <a:buNone/>
-            </a:pPr>
-            <a:r>
-              <a:rPr lang="en-US" sz="2800" b="1" dirty="0">
-                <a:solidFill>
-                  <a:schemeClr val="tx2"/>
-                </a:solidFill>
-              </a:rPr>
-              <a:t>Globo</a:t>
-            </a:r>
-            <a:endParaRPr lang="en-US" sz="2800" dirty="0"/>
-          </a:p>
-        </p:txBody>
-      </p:sp>
-      <p:sp>
-        <p:nvSpPr>
-          <p:cNvPr id="7" name="Marca Riachuelo"/>
-          <p:cNvSpPr/>
-          <p:nvPr/>
-        </p:nvSpPr>
-        <p:spPr>
-          <a:xfrm>
-            <a:off x="8046720" y="1691640"/>
-            <a:ext cx="3474720" cy="1554480"/>
-          </a:xfrm>
-          <a:prstGeom prst="roundRect">
-            <a:avLst>
-              <a:gd name="adj" fmla="val 7059"/>
-            </a:avLst>
-          </a:prstGeom>
-          <a:solidFill>
-            <a:schemeClr val="bg2"/>
-          </a:solidFill>
-          <a:ln/>
-        </p:spPr>
-      </p:sp>
-      <p:sp>
-        <p:nvSpPr>
-          <p:cNvPr id="8" name="Marca nome 3"/>
-          <p:cNvSpPr txBox="1"/>
-          <p:nvPr/>
-        </p:nvSpPr>
-        <p:spPr>
-          <a:xfrm>
-            <a:off x="8046720" y="1691640"/>
-            <a:ext cx="3474720" cy="1554480"/>
-          </a:xfrm>
-          <a:prstGeom prst="rect">
-            <a:avLst/>
-          </a:prstGeom>
-          <a:noFill/>
-          <a:ln/>
-        </p:spPr>
-        <p:txBody>
-          <a:bodyPr wrap="square" lIns="0" tIns="0" rIns="0" bIns="0" rtlCol="0" anchor="ctr"/>
-          <a:lstStyle/>
-          <a:p>
-            <a:pPr algn="ctr" indent="0" marL="0">
-              <a:buNone/>
-            </a:pPr>
-            <a:r>
-              <a:rPr lang="en-US" sz="2800" b="1" dirty="0">
-                <a:solidFill>
-                  <a:schemeClr val="tx2"/>
-                </a:solidFill>
-              </a:rPr>
-              <a:t>Riachuelo</a:t>
-            </a:r>
-            <a:endParaRPr lang="en-US" sz="2800" dirty="0"/>
-          </a:p>
-        </p:txBody>
-      </p:sp>
-      <p:sp>
-        <p:nvSpPr>
-          <p:cNvPr id="9" name="Ranking Exame círculo"/>
-          <p:cNvSpPr/>
-          <p:nvPr/>
-        </p:nvSpPr>
-        <p:spPr>
-          <a:xfrm>
-            <a:off x="548640" y="3749040"/>
-            <a:ext cx="777240" cy="777240"/>
-          </a:xfrm>
-          <a:prstGeom prst="ellipse">
-            <a:avLst/>
-          </a:prstGeom>
-          <a:solidFill>
-            <a:srgbClr val="E0218A"/>
+            <a:srgbClr val="2B1A63"/>
           </a:solidFill>
           <a:ln/>
         </p:spPr>
       </p:sp>
       <p:pic>
         <p:nvPicPr>
-          <p:cNvPr id="10" name="Ranking Exame ícone" descr="preencoded.png">    </p:cNvPr>
+          <p:cNvPr id="5" name="Solução 360° ícone" descr="preencoded.png">    </p:cNvPr>
           <p:cNvPicPr>
             <a:picLocks noChangeAspect="1"/>
           </p:cNvPicPr>
@@ -7340,8 +7586,8 @@
         </p:blipFill>
         <p:spPr>
           <a:xfrm>
-            <a:off x="742950" y="3943350"/>
-            <a:ext cx="388620" cy="388620"/>
+            <a:off x="982980" y="2034540"/>
+            <a:ext cx="320040" cy="320040"/>
           </a:xfrm>
           <a:prstGeom prst="rect">
             <a:avLst/>
@@ -7350,14 +7596,14 @@
       </p:pic>
       <p:sp>
         <p:nvSpPr>
-          <p:cNvPr id="11" name="Ranking Exame título"/>
+          <p:cNvPr id="6" name="Solução 360° título"/>
           <p:cNvSpPr txBox="1"/>
           <p:nvPr/>
         </p:nvSpPr>
         <p:spPr>
           <a:xfrm>
-            <a:off x="1508760" y="3749040"/>
-            <a:ext cx="2514600" cy="411480"/>
+            <a:off x="822960" y="2606040"/>
+            <a:ext cx="2148840" cy="365760"/>
           </a:xfrm>
           <a:prstGeom prst="rect">
             <a:avLst/>
@@ -7373,27 +7619,27 @@
               <a:buNone/>
             </a:pPr>
             <a:r>
-              <a:rPr lang="en-US" sz="1700" b="1" dirty="0">
+              <a:rPr lang="en-US" sz="1600" b="1" dirty="0">
                 <a:solidFill>
                   <a:schemeClr val="tx1"/>
                 </a:solidFill>
               </a:rPr>
-              <a:t>Ranking Exame</a:t>
-            </a:r>
-            <a:endParaRPr lang="en-US" sz="1700" dirty="0"/>
-          </a:p>
-        </p:txBody>
-      </p:sp>
-      <p:sp>
-        <p:nvSpPr>
-          <p:cNvPr id="12" name="Ranking Exame texto"/>
+              <a:t>Solução 360°</a:t>
+            </a:r>
+            <a:endParaRPr lang="en-US" sz="1600" dirty="0"/>
+          </a:p>
+        </p:txBody>
+      </p:sp>
+      <p:sp>
+        <p:nvSpPr>
+          <p:cNvPr id="7" name="Solução 360° texto"/>
           <p:cNvSpPr txBox="1"/>
           <p:nvPr/>
         </p:nvSpPr>
         <p:spPr>
           <a:xfrm>
-            <a:off x="1508760" y="4206240"/>
-            <a:ext cx="2514600" cy="914400"/>
+            <a:off x="822960" y="2971800"/>
+            <a:ext cx="2148840" cy="594360"/>
           </a:xfrm>
           <a:prstGeom prst="rect">
             <a:avLst/>
@@ -7414,7 +7660,7 @@
                   <a:schemeClr val="tx2"/>
                 </a:solidFill>
               </a:rPr>
-              <a:t>4 anos seguidos, nº 1 do segmento em 2025</a:t>
+              <a:t>Do projeto ao conteúdo, um só parceiro</a:t>
             </a:r>
             <a:endParaRPr lang="en-US" sz="1400" dirty="0"/>
           </a:p>
@@ -7422,14 +7668,36 @@
       </p:sp>
       <p:sp>
         <p:nvSpPr>
-          <p:cNvPr id="13" name="ABF Expo círculo"/>
+          <p:cNvPr id="8" name="Diferencial Fábrica própria"/>
           <p:cNvSpPr/>
           <p:nvPr/>
         </p:nvSpPr>
         <p:spPr>
           <a:xfrm>
-            <a:off x="4297680" y="3749040"/>
-            <a:ext cx="777240" cy="777240"/>
+            <a:off x="3364992" y="1600200"/>
+            <a:ext cx="2606040" cy="2011680"/>
+          </a:xfrm>
+          <a:prstGeom prst="roundRect">
+            <a:avLst>
+              <a:gd name="adj" fmla="val 5455"/>
+            </a:avLst>
+          </a:prstGeom>
+          <a:solidFill>
+            <a:schemeClr val="bg2"/>
+          </a:solidFill>
+          <a:ln/>
+        </p:spPr>
+      </p:sp>
+      <p:sp>
+        <p:nvSpPr>
+          <p:cNvPr id="9" name="Fábrica própria círculo"/>
+          <p:cNvSpPr/>
+          <p:nvPr/>
+        </p:nvSpPr>
+        <p:spPr>
+          <a:xfrm>
+            <a:off x="3639312" y="1874520"/>
+            <a:ext cx="640080" cy="640080"/>
           </a:xfrm>
           <a:prstGeom prst="ellipse">
             <a:avLst/>
@@ -7442,7 +7710,7 @@
       </p:sp>
       <p:pic>
         <p:nvPicPr>
-          <p:cNvPr id="14" name="ABF Expo ícone" descr="preencoded.png">    </p:cNvPr>
+          <p:cNvPr id="10" name="Fábrica própria ícone" descr="preencoded.png">    </p:cNvPr>
           <p:cNvPicPr>
             <a:picLocks noChangeAspect="1"/>
           </p:cNvPicPr>
@@ -7456,8 +7724,8 @@
         </p:blipFill>
         <p:spPr>
           <a:xfrm>
-            <a:off x="4491990" y="3943350"/>
-            <a:ext cx="388620" cy="388620"/>
+            <a:off x="3799332" y="2034540"/>
+            <a:ext cx="320040" cy="320040"/>
           </a:xfrm>
           <a:prstGeom prst="rect">
             <a:avLst/>
@@ -7466,14 +7734,14 @@
       </p:pic>
       <p:sp>
         <p:nvSpPr>
-          <p:cNvPr id="15" name="ABF Expo título"/>
+          <p:cNvPr id="11" name="Fábrica própria título"/>
           <p:cNvSpPr txBox="1"/>
           <p:nvPr/>
         </p:nvSpPr>
         <p:spPr>
           <a:xfrm>
-            <a:off x="5257800" y="3749040"/>
-            <a:ext cx="2514600" cy="411480"/>
+            <a:off x="3639312" y="2606040"/>
+            <a:ext cx="2148840" cy="365760"/>
           </a:xfrm>
           <a:prstGeom prst="rect">
             <a:avLst/>
@@ -7489,27 +7757,27 @@
               <a:buNone/>
             </a:pPr>
             <a:r>
-              <a:rPr lang="en-US" sz="1700" b="1" dirty="0">
+              <a:rPr lang="en-US" sz="1600" b="1" dirty="0">
                 <a:solidFill>
                   <a:schemeClr val="tx1"/>
                 </a:solidFill>
               </a:rPr>
-              <a:t>ABF Expo</a:t>
-            </a:r>
-            <a:endParaRPr lang="en-US" sz="1700" dirty="0"/>
-          </a:p>
-        </p:txBody>
-      </p:sp>
-      <p:sp>
-        <p:nvSpPr>
-          <p:cNvPr id="16" name="ABF Expo texto"/>
+              <a:t>Fábrica própria</a:t>
+            </a:r>
+            <a:endParaRPr lang="en-US" sz="1600" dirty="0"/>
+          </a:p>
+        </p:txBody>
+      </p:sp>
+      <p:sp>
+        <p:nvSpPr>
+          <p:cNvPr id="12" name="Fábrica própria texto"/>
           <p:cNvSpPr txBox="1"/>
           <p:nvPr/>
         </p:nvSpPr>
         <p:spPr>
           <a:xfrm>
-            <a:off x="5257800" y="4206240"/>
-            <a:ext cx="2514600" cy="914400"/>
+            <a:off x="3639312" y="2971800"/>
+            <a:ext cx="2148840" cy="594360"/>
           </a:xfrm>
           <a:prstGeom prst="rect">
             <a:avLst/>
@@ -7530,7 +7798,7 @@
                   <a:schemeClr val="tx2"/>
                 </a:solidFill>
               </a:rPr>
-              <a:t>Parceira oficial da maior feira de franquias do país</a:t>
+              <a:t>Linha de produção no Brasil, em Goiânia</a:t>
             </a:r>
             <a:endParaRPr lang="en-US" sz="1400" dirty="0"/>
           </a:p>
@@ -7538,27 +7806,49 @@
       </p:sp>
       <p:sp>
         <p:nvSpPr>
-          <p:cNvPr id="17" name="NRF 2026, Nova York círculo"/>
+          <p:cNvPr id="13" name="Diferencial Venda ou locação"/>
           <p:cNvSpPr/>
           <p:nvPr/>
         </p:nvSpPr>
         <p:spPr>
           <a:xfrm>
-            <a:off x="8046720" y="3749040"/>
-            <a:ext cx="777240" cy="777240"/>
+            <a:off x="6181344" y="1600200"/>
+            <a:ext cx="2606040" cy="2011680"/>
+          </a:xfrm>
+          <a:prstGeom prst="roundRect">
+            <a:avLst>
+              <a:gd name="adj" fmla="val 5455"/>
+            </a:avLst>
+          </a:prstGeom>
+          <a:solidFill>
+            <a:schemeClr val="bg2"/>
+          </a:solidFill>
+          <a:ln/>
+        </p:spPr>
+      </p:sp>
+      <p:sp>
+        <p:nvSpPr>
+          <p:cNvPr id="14" name="Venda ou locação círculo"/>
+          <p:cNvSpPr/>
+          <p:nvPr/>
+        </p:nvSpPr>
+        <p:spPr>
+          <a:xfrm>
+            <a:off x="6455664" y="1874520"/>
+            <a:ext cx="640080" cy="640080"/>
           </a:xfrm>
           <a:prstGeom prst="ellipse">
             <a:avLst/>
           </a:prstGeom>
           <a:solidFill>
-            <a:srgbClr val="E0218A"/>
+            <a:srgbClr val="2B1A63"/>
           </a:solidFill>
           <a:ln/>
         </p:spPr>
       </p:sp>
       <p:pic>
         <p:nvPicPr>
-          <p:cNvPr id="18" name="NRF 2026, Nova York ícone" descr="preencoded.png">    </p:cNvPr>
+          <p:cNvPr id="15" name="Venda ou locação ícone" descr="preencoded.png">    </p:cNvPr>
           <p:cNvPicPr>
             <a:picLocks noChangeAspect="1"/>
           </p:cNvPicPr>
@@ -7572,8 +7862,8 @@
         </p:blipFill>
         <p:spPr>
           <a:xfrm>
-            <a:off x="8241030" y="3943350"/>
-            <a:ext cx="388620" cy="388620"/>
+            <a:off x="6615684" y="2034540"/>
+            <a:ext cx="320040" cy="320040"/>
           </a:xfrm>
           <a:prstGeom prst="rect">
             <a:avLst/>
@@ -7582,14 +7872,14 @@
       </p:pic>
       <p:sp>
         <p:nvSpPr>
-          <p:cNvPr id="19" name="NRF 2026, Nova York título"/>
+          <p:cNvPr id="16" name="Venda ou locação título"/>
           <p:cNvSpPr txBox="1"/>
           <p:nvPr/>
         </p:nvSpPr>
         <p:spPr>
           <a:xfrm>
-            <a:off x="9006840" y="3749040"/>
-            <a:ext cx="2514600" cy="411480"/>
+            <a:off x="6455664" y="2606040"/>
+            <a:ext cx="2148840" cy="365760"/>
           </a:xfrm>
           <a:prstGeom prst="rect">
             <a:avLst/>
@@ -7605,27 +7895,27 @@
               <a:buNone/>
             </a:pPr>
             <a:r>
-              <a:rPr lang="en-US" sz="1700" b="1" dirty="0">
+              <a:rPr lang="en-US" sz="1600" b="1" dirty="0">
                 <a:solidFill>
                   <a:schemeClr val="tx1"/>
                 </a:solidFill>
               </a:rPr>
-              <a:t>NRF 2026, Nova York</a:t>
-            </a:r>
-            <a:endParaRPr lang="en-US" sz="1700" dirty="0"/>
-          </a:p>
-        </p:txBody>
-      </p:sp>
-      <p:sp>
-        <p:nvSpPr>
-          <p:cNvPr id="20" name="NRF 2026, Nova York texto"/>
+              <a:t>Venda ou locação</a:t>
+            </a:r>
+            <a:endParaRPr lang="en-US" sz="1600" dirty="0"/>
+          </a:p>
+        </p:txBody>
+      </p:sp>
+      <p:sp>
+        <p:nvSpPr>
+          <p:cNvPr id="17" name="Venda ou locação texto"/>
           <p:cNvSpPr txBox="1"/>
           <p:nvPr/>
         </p:nvSpPr>
         <p:spPr>
           <a:xfrm>
-            <a:off x="9006840" y="4206240"/>
-            <a:ext cx="2514600" cy="914400"/>
+            <a:off x="6455664" y="2971800"/>
+            <a:ext cx="2148840" cy="594360"/>
           </a:xfrm>
           <a:prstGeom prst="rect">
             <a:avLst/>
@@ -7646,7 +7936,7 @@
                   <a:schemeClr val="tx2"/>
                 </a:solidFill>
               </a:rPr>
-              <a:t>Estande próprio na maior feira de varejo do mundo</a:t>
+              <a:t>O modelo comercial que cabe no seu negócio</a:t>
             </a:r>
             <a:endParaRPr lang="en-US" sz="1400" dirty="0"/>
           </a:p>
@@ -7654,14 +7944,80 @@
       </p:sp>
       <p:sp>
         <p:nvSpPr>
-          <p:cNvPr id="21" name="Instrução logos"/>
+          <p:cNvPr id="18" name="Diferencial Estoque próprio"/>
+          <p:cNvSpPr/>
+          <p:nvPr/>
+        </p:nvSpPr>
+        <p:spPr>
+          <a:xfrm>
+            <a:off x="8997696" y="1600200"/>
+            <a:ext cx="2606040" cy="2011680"/>
+          </a:xfrm>
+          <a:prstGeom prst="roundRect">
+            <a:avLst>
+              <a:gd name="adj" fmla="val 5455"/>
+            </a:avLst>
+          </a:prstGeom>
+          <a:solidFill>
+            <a:schemeClr val="bg2"/>
+          </a:solidFill>
+          <a:ln/>
+        </p:spPr>
+      </p:sp>
+      <p:sp>
+        <p:nvSpPr>
+          <p:cNvPr id="19" name="Estoque próprio círculo"/>
+          <p:cNvSpPr/>
+          <p:nvPr/>
+        </p:nvSpPr>
+        <p:spPr>
+          <a:xfrm>
+            <a:off x="9272016" y="1874520"/>
+            <a:ext cx="640080" cy="640080"/>
+          </a:xfrm>
+          <a:prstGeom prst="ellipse">
+            <a:avLst/>
+          </a:prstGeom>
+          <a:solidFill>
+            <a:srgbClr val="E0218A"/>
+          </a:solidFill>
+          <a:ln/>
+        </p:spPr>
+      </p:sp>
+      <p:pic>
+        <p:nvPicPr>
+          <p:cNvPr id="20" name="Estoque próprio ícone" descr="preencoded.png">    </p:cNvPr>
+          <p:cNvPicPr>
+            <a:picLocks noChangeAspect="1"/>
+          </p:cNvPicPr>
+          <p:nvPr/>
+        </p:nvPicPr>
+        <p:blipFill>
+          <a:blip r:embed="rId4"/>
+          <a:stretch>
+            <a:fillRect/>
+          </a:stretch>
+        </p:blipFill>
+        <p:spPr>
+          <a:xfrm>
+            <a:off x="9432036" y="2034540"/>
+            <a:ext cx="320040" cy="320040"/>
+          </a:xfrm>
+          <a:prstGeom prst="rect">
+            <a:avLst/>
+          </a:prstGeom>
+        </p:spPr>
+      </p:pic>
+      <p:sp>
+        <p:nvSpPr>
+          <p:cNvPr id="21" name="Estoque próprio título"/>
           <p:cNvSpPr txBox="1"/>
           <p:nvPr/>
         </p:nvSpPr>
         <p:spPr>
           <a:xfrm>
-            <a:off x="548640" y="5715000"/>
-            <a:ext cx="10972800" cy="274320"/>
+            <a:off x="9272016" y="2606040"/>
+            <a:ext cx="2148840" cy="365760"/>
           </a:xfrm>
           <a:prstGeom prst="rect">
             <a:avLst/>
@@ -7677,14 +8033,602 @@
               <a:buNone/>
             </a:pPr>
             <a:r>
-              <a:rPr lang="en-US" sz="1100" i="1" dirty="0">
-                <a:solidFill>
-                  <a:srgbClr val="6B6385"/>
-                </a:solidFill>
-              </a:rPr>
-              <a:t>Substitua ou complete com logos de clientes do segmento Varejo de Moda e Vitrines.</a:t>
-            </a:r>
-            <a:endParaRPr lang="en-US" sz="1100" dirty="0"/>
+              <a:rPr lang="en-US" sz="1600" b="1" dirty="0">
+                <a:solidFill>
+                  <a:schemeClr val="tx1"/>
+                </a:solidFill>
+              </a:rPr>
+              <a:t>Estoque próprio</a:t>
+            </a:r>
+            <a:endParaRPr lang="en-US" sz="1600" dirty="0"/>
+          </a:p>
+        </p:txBody>
+      </p:sp>
+      <p:sp>
+        <p:nvSpPr>
+          <p:cNvPr id="22" name="Estoque próprio texto"/>
+          <p:cNvSpPr txBox="1"/>
+          <p:nvPr/>
+        </p:nvSpPr>
+        <p:spPr>
+          <a:xfrm>
+            <a:off x="9272016" y="2971800"/>
+            <a:ext cx="2148840" cy="594360"/>
+          </a:xfrm>
+          <a:prstGeom prst="rect">
+            <a:avLst/>
+          </a:prstGeom>
+          <a:noFill/>
+          <a:ln/>
+        </p:spPr>
+        <p:txBody>
+          <a:bodyPr wrap="square" lIns="0" tIns="0" rIns="0" bIns="0" rtlCol="0" anchor="t"/>
+          <a:lstStyle/>
+          <a:p>
+            <a:pPr indent="0" marL="0">
+              <a:buNone/>
+            </a:pPr>
+            <a:r>
+              <a:rPr lang="en-US" sz="1400" dirty="0">
+                <a:solidFill>
+                  <a:schemeClr val="tx2"/>
+                </a:solidFill>
+              </a:rPr>
+              <a:t>Menos espera entre a assinatura e a tela acesa</a:t>
+            </a:r>
+            <a:endParaRPr lang="en-US" sz="1400" dirty="0"/>
+          </a:p>
+        </p:txBody>
+      </p:sp>
+      <p:sp>
+        <p:nvSpPr>
+          <p:cNvPr id="23" name="Diferencial Atendimento nacional"/>
+          <p:cNvSpPr/>
+          <p:nvPr/>
+        </p:nvSpPr>
+        <p:spPr>
+          <a:xfrm>
+            <a:off x="548640" y="3840480"/>
+            <a:ext cx="2606040" cy="2011680"/>
+          </a:xfrm>
+          <a:prstGeom prst="roundRect">
+            <a:avLst>
+              <a:gd name="adj" fmla="val 5455"/>
+            </a:avLst>
+          </a:prstGeom>
+          <a:solidFill>
+            <a:schemeClr val="bg2"/>
+          </a:solidFill>
+          <a:ln/>
+        </p:spPr>
+      </p:sp>
+      <p:sp>
+        <p:nvSpPr>
+          <p:cNvPr id="24" name="Atendimento nacional círculo"/>
+          <p:cNvSpPr/>
+          <p:nvPr/>
+        </p:nvSpPr>
+        <p:spPr>
+          <a:xfrm>
+            <a:off x="822960" y="4114800"/>
+            <a:ext cx="640080" cy="640080"/>
+          </a:xfrm>
+          <a:prstGeom prst="ellipse">
+            <a:avLst/>
+          </a:prstGeom>
+          <a:solidFill>
+            <a:srgbClr val="2B1A63"/>
+          </a:solidFill>
+          <a:ln/>
+        </p:spPr>
+      </p:sp>
+      <p:pic>
+        <p:nvPicPr>
+          <p:cNvPr id="25" name="Atendimento nacional ícone" descr="preencoded.png">    </p:cNvPr>
+          <p:cNvPicPr>
+            <a:picLocks noChangeAspect="1"/>
+          </p:cNvPicPr>
+          <p:nvPr/>
+        </p:nvPicPr>
+        <p:blipFill>
+          <a:blip r:embed="rId5"/>
+          <a:stretch>
+            <a:fillRect/>
+          </a:stretch>
+        </p:blipFill>
+        <p:spPr>
+          <a:xfrm>
+            <a:off x="982980" y="4274820"/>
+            <a:ext cx="320040" cy="320040"/>
+          </a:xfrm>
+          <a:prstGeom prst="rect">
+            <a:avLst/>
+          </a:prstGeom>
+        </p:spPr>
+      </p:pic>
+      <p:sp>
+        <p:nvSpPr>
+          <p:cNvPr id="26" name="Atendimento nacional título"/>
+          <p:cNvSpPr txBox="1"/>
+          <p:nvPr/>
+        </p:nvSpPr>
+        <p:spPr>
+          <a:xfrm>
+            <a:off x="822960" y="4846320"/>
+            <a:ext cx="2148840" cy="365760"/>
+          </a:xfrm>
+          <a:prstGeom prst="rect">
+            <a:avLst/>
+          </a:prstGeom>
+          <a:noFill/>
+          <a:ln/>
+        </p:spPr>
+        <p:txBody>
+          <a:bodyPr wrap="square" lIns="0" tIns="0" rIns="0" bIns="0" rtlCol="0" anchor="t"/>
+          <a:lstStyle/>
+          <a:p>
+            <a:pPr indent="0" marL="0">
+              <a:buNone/>
+            </a:pPr>
+            <a:r>
+              <a:rPr lang="en-US" sz="1600" b="1" dirty="0">
+                <a:solidFill>
+                  <a:schemeClr val="tx1"/>
+                </a:solidFill>
+              </a:rPr>
+              <a:t>Atendimento nacional</a:t>
+            </a:r>
+            <a:endParaRPr lang="en-US" sz="1600" dirty="0"/>
+          </a:p>
+        </p:txBody>
+      </p:sp>
+      <p:sp>
+        <p:nvSpPr>
+          <p:cNvPr id="27" name="Atendimento nacional texto"/>
+          <p:cNvSpPr txBox="1"/>
+          <p:nvPr/>
+        </p:nvSpPr>
+        <p:spPr>
+          <a:xfrm>
+            <a:off x="822960" y="5212080"/>
+            <a:ext cx="2148840" cy="594360"/>
+          </a:xfrm>
+          <a:prstGeom prst="rect">
+            <a:avLst/>
+          </a:prstGeom>
+          <a:noFill/>
+          <a:ln/>
+        </p:spPr>
+        <p:txBody>
+          <a:bodyPr wrap="square" lIns="0" tIns="0" rIns="0" bIns="0" rtlCol="0" anchor="t"/>
+          <a:lstStyle/>
+          <a:p>
+            <a:pPr indent="0" marL="0">
+              <a:buNone/>
+            </a:pPr>
+            <a:r>
+              <a:rPr lang="en-US" sz="1400" dirty="0">
+                <a:solidFill>
+                  <a:schemeClr val="tx2"/>
+                </a:solidFill>
+              </a:rPr>
+              <a:t>Goiânia, São Paulo, Brasília e Orlando (EUA)</a:t>
+            </a:r>
+            <a:endParaRPr lang="en-US" sz="1400" dirty="0"/>
+          </a:p>
+        </p:txBody>
+      </p:sp>
+      <p:sp>
+        <p:nvSpPr>
+          <p:cNvPr id="28" name="Diferencial Sob medida"/>
+          <p:cNvSpPr/>
+          <p:nvPr/>
+        </p:nvSpPr>
+        <p:spPr>
+          <a:xfrm>
+            <a:off x="3364992" y="3840480"/>
+            <a:ext cx="2606040" cy="2011680"/>
+          </a:xfrm>
+          <a:prstGeom prst="roundRect">
+            <a:avLst>
+              <a:gd name="adj" fmla="val 5455"/>
+            </a:avLst>
+          </a:prstGeom>
+          <a:solidFill>
+            <a:schemeClr val="bg2"/>
+          </a:solidFill>
+          <a:ln/>
+        </p:spPr>
+      </p:sp>
+      <p:sp>
+        <p:nvSpPr>
+          <p:cNvPr id="29" name="Sob medida círculo"/>
+          <p:cNvSpPr/>
+          <p:nvPr/>
+        </p:nvSpPr>
+        <p:spPr>
+          <a:xfrm>
+            <a:off x="3639312" y="4114800"/>
+            <a:ext cx="640080" cy="640080"/>
+          </a:xfrm>
+          <a:prstGeom prst="ellipse">
+            <a:avLst/>
+          </a:prstGeom>
+          <a:solidFill>
+            <a:srgbClr val="E0218A"/>
+          </a:solidFill>
+          <a:ln/>
+        </p:spPr>
+      </p:sp>
+      <p:pic>
+        <p:nvPicPr>
+          <p:cNvPr id="30" name="Sob medida ícone" descr="preencoded.png">    </p:cNvPr>
+          <p:cNvPicPr>
+            <a:picLocks noChangeAspect="1"/>
+          </p:cNvPicPr>
+          <p:nvPr/>
+        </p:nvPicPr>
+        <p:blipFill>
+          <a:blip r:embed="rId6"/>
+          <a:stretch>
+            <a:fillRect/>
+          </a:stretch>
+        </p:blipFill>
+        <p:spPr>
+          <a:xfrm>
+            <a:off x="3799332" y="4274820"/>
+            <a:ext cx="320040" cy="320040"/>
+          </a:xfrm>
+          <a:prstGeom prst="rect">
+            <a:avLst/>
+          </a:prstGeom>
+        </p:spPr>
+      </p:pic>
+      <p:sp>
+        <p:nvSpPr>
+          <p:cNvPr id="31" name="Sob medida título"/>
+          <p:cNvSpPr txBox="1"/>
+          <p:nvPr/>
+        </p:nvSpPr>
+        <p:spPr>
+          <a:xfrm>
+            <a:off x="3639312" y="4846320"/>
+            <a:ext cx="2148840" cy="365760"/>
+          </a:xfrm>
+          <a:prstGeom prst="rect">
+            <a:avLst/>
+          </a:prstGeom>
+          <a:noFill/>
+          <a:ln/>
+        </p:spPr>
+        <p:txBody>
+          <a:bodyPr wrap="square" lIns="0" tIns="0" rIns="0" bIns="0" rtlCol="0" anchor="t"/>
+          <a:lstStyle/>
+          <a:p>
+            <a:pPr indent="0" marL="0">
+              <a:buNone/>
+            </a:pPr>
+            <a:r>
+              <a:rPr lang="en-US" sz="1600" b="1" dirty="0">
+                <a:solidFill>
+                  <a:schemeClr val="tx1"/>
+                </a:solidFill>
+              </a:rPr>
+              <a:t>Sob medida</a:t>
+            </a:r>
+            <a:endParaRPr lang="en-US" sz="1600" dirty="0"/>
+          </a:p>
+        </p:txBody>
+      </p:sp>
+      <p:sp>
+        <p:nvSpPr>
+          <p:cNvPr id="32" name="Sob medida texto"/>
+          <p:cNvSpPr txBox="1"/>
+          <p:nvPr/>
+        </p:nvSpPr>
+        <p:spPr>
+          <a:xfrm>
+            <a:off x="3639312" y="5212080"/>
+            <a:ext cx="2148840" cy="594360"/>
+          </a:xfrm>
+          <a:prstGeom prst="rect">
+            <a:avLst/>
+          </a:prstGeom>
+          <a:noFill/>
+          <a:ln/>
+        </p:spPr>
+        <p:txBody>
+          <a:bodyPr wrap="square" lIns="0" tIns="0" rIns="0" bIns="0" rtlCol="0" anchor="t"/>
+          <a:lstStyle/>
+          <a:p>
+            <a:pPr indent="0" marL="0">
+              <a:buNone/>
+            </a:pPr>
+            <a:r>
+              <a:rPr lang="en-US" sz="1400" dirty="0">
+                <a:solidFill>
+                  <a:schemeClr val="tx2"/>
+                </a:solidFill>
+              </a:rPr>
+              <a:t>Formato e resolução para o seu espaço</a:t>
+            </a:r>
+            <a:endParaRPr lang="en-US" sz="1400" dirty="0"/>
+          </a:p>
+        </p:txBody>
+      </p:sp>
+      <p:sp>
+        <p:nvSpPr>
+          <p:cNvPr id="33" name="Diferencial Software de gestão"/>
+          <p:cNvSpPr/>
+          <p:nvPr/>
+        </p:nvSpPr>
+        <p:spPr>
+          <a:xfrm>
+            <a:off x="6181344" y="3840480"/>
+            <a:ext cx="2606040" cy="2011680"/>
+          </a:xfrm>
+          <a:prstGeom prst="roundRect">
+            <a:avLst>
+              <a:gd name="adj" fmla="val 5455"/>
+            </a:avLst>
+          </a:prstGeom>
+          <a:solidFill>
+            <a:schemeClr val="bg2"/>
+          </a:solidFill>
+          <a:ln/>
+        </p:spPr>
+      </p:sp>
+      <p:sp>
+        <p:nvSpPr>
+          <p:cNvPr id="34" name="Software de gestão círculo"/>
+          <p:cNvSpPr/>
+          <p:nvPr/>
+        </p:nvSpPr>
+        <p:spPr>
+          <a:xfrm>
+            <a:off x="6455664" y="4114800"/>
+            <a:ext cx="640080" cy="640080"/>
+          </a:xfrm>
+          <a:prstGeom prst="ellipse">
+            <a:avLst/>
+          </a:prstGeom>
+          <a:solidFill>
+            <a:srgbClr val="2B1A63"/>
+          </a:solidFill>
+          <a:ln/>
+        </p:spPr>
+      </p:sp>
+      <p:pic>
+        <p:nvPicPr>
+          <p:cNvPr id="35" name="Software de gestão ícone" descr="preencoded.png">    </p:cNvPr>
+          <p:cNvPicPr>
+            <a:picLocks noChangeAspect="1"/>
+          </p:cNvPicPr>
+          <p:nvPr/>
+        </p:nvPicPr>
+        <p:blipFill>
+          <a:blip r:embed="rId7"/>
+          <a:stretch>
+            <a:fillRect/>
+          </a:stretch>
+        </p:blipFill>
+        <p:spPr>
+          <a:xfrm>
+            <a:off x="6615684" y="4274820"/>
+            <a:ext cx="320040" cy="320040"/>
+          </a:xfrm>
+          <a:prstGeom prst="rect">
+            <a:avLst/>
+          </a:prstGeom>
+        </p:spPr>
+      </p:pic>
+      <p:sp>
+        <p:nvSpPr>
+          <p:cNvPr id="36" name="Software de gestão título"/>
+          <p:cNvSpPr txBox="1"/>
+          <p:nvPr/>
+        </p:nvSpPr>
+        <p:spPr>
+          <a:xfrm>
+            <a:off x="6455664" y="4846320"/>
+            <a:ext cx="2148840" cy="365760"/>
+          </a:xfrm>
+          <a:prstGeom prst="rect">
+            <a:avLst/>
+          </a:prstGeom>
+          <a:noFill/>
+          <a:ln/>
+        </p:spPr>
+        <p:txBody>
+          <a:bodyPr wrap="square" lIns="0" tIns="0" rIns="0" bIns="0" rtlCol="0" anchor="t"/>
+          <a:lstStyle/>
+          <a:p>
+            <a:pPr indent="0" marL="0">
+              <a:buNone/>
+            </a:pPr>
+            <a:r>
+              <a:rPr lang="en-US" sz="1600" b="1" dirty="0">
+                <a:solidFill>
+                  <a:schemeClr val="tx1"/>
+                </a:solidFill>
+              </a:rPr>
+              <a:t>Software de gestão</a:t>
+            </a:r>
+            <a:endParaRPr lang="en-US" sz="1600" dirty="0"/>
+          </a:p>
+        </p:txBody>
+      </p:sp>
+      <p:sp>
+        <p:nvSpPr>
+          <p:cNvPr id="37" name="Software de gestão texto"/>
+          <p:cNvSpPr txBox="1"/>
+          <p:nvPr/>
+        </p:nvSpPr>
+        <p:spPr>
+          <a:xfrm>
+            <a:off x="6455664" y="5212080"/>
+            <a:ext cx="2148840" cy="594360"/>
+          </a:xfrm>
+          <a:prstGeom prst="rect">
+            <a:avLst/>
+          </a:prstGeom>
+          <a:noFill/>
+          <a:ln/>
+        </p:spPr>
+        <p:txBody>
+          <a:bodyPr wrap="square" lIns="0" tIns="0" rIns="0" bIns="0" rtlCol="0" anchor="t"/>
+          <a:lstStyle/>
+          <a:p>
+            <a:pPr indent="0" marL="0">
+              <a:buNone/>
+            </a:pPr>
+            <a:r>
+              <a:rPr lang="en-US" sz="1400" dirty="0">
+                <a:solidFill>
+                  <a:schemeClr val="tx2"/>
+                </a:solidFill>
+              </a:rPr>
+              <a:t>Conteúdo e venda programática de mídia</a:t>
+            </a:r>
+            <a:endParaRPr lang="en-US" sz="1400" dirty="0"/>
+          </a:p>
+        </p:txBody>
+      </p:sp>
+      <p:sp>
+        <p:nvSpPr>
+          <p:cNvPr id="38" name="Diferencial Garantia e suporte"/>
+          <p:cNvSpPr/>
+          <p:nvPr/>
+        </p:nvSpPr>
+        <p:spPr>
+          <a:xfrm>
+            <a:off x="8997696" y="3840480"/>
+            <a:ext cx="2606040" cy="2011680"/>
+          </a:xfrm>
+          <a:prstGeom prst="roundRect">
+            <a:avLst>
+              <a:gd name="adj" fmla="val 5455"/>
+            </a:avLst>
+          </a:prstGeom>
+          <a:solidFill>
+            <a:schemeClr val="bg2"/>
+          </a:solidFill>
+          <a:ln/>
+        </p:spPr>
+      </p:sp>
+      <p:sp>
+        <p:nvSpPr>
+          <p:cNvPr id="39" name="Garantia e suporte círculo"/>
+          <p:cNvSpPr/>
+          <p:nvPr/>
+        </p:nvSpPr>
+        <p:spPr>
+          <a:xfrm>
+            <a:off x="9272016" y="4114800"/>
+            <a:ext cx="640080" cy="640080"/>
+          </a:xfrm>
+          <a:prstGeom prst="ellipse">
+            <a:avLst/>
+          </a:prstGeom>
+          <a:solidFill>
+            <a:srgbClr val="E0218A"/>
+          </a:solidFill>
+          <a:ln/>
+        </p:spPr>
+      </p:sp>
+      <p:pic>
+        <p:nvPicPr>
+          <p:cNvPr id="40" name="Garantia e suporte ícone" descr="preencoded.png">    </p:cNvPr>
+          <p:cNvPicPr>
+            <a:picLocks noChangeAspect="1"/>
+          </p:cNvPicPr>
+          <p:nvPr/>
+        </p:nvPicPr>
+        <p:blipFill>
+          <a:blip r:embed="rId8"/>
+          <a:stretch>
+            <a:fillRect/>
+          </a:stretch>
+        </p:blipFill>
+        <p:spPr>
+          <a:xfrm>
+            <a:off x="9432036" y="4274820"/>
+            <a:ext cx="320040" cy="320040"/>
+          </a:xfrm>
+          <a:prstGeom prst="rect">
+            <a:avLst/>
+          </a:prstGeom>
+        </p:spPr>
+      </p:pic>
+      <p:sp>
+        <p:nvSpPr>
+          <p:cNvPr id="41" name="Garantia e suporte título"/>
+          <p:cNvSpPr txBox="1"/>
+          <p:nvPr/>
+        </p:nvSpPr>
+        <p:spPr>
+          <a:xfrm>
+            <a:off x="9272016" y="4846320"/>
+            <a:ext cx="2148840" cy="365760"/>
+          </a:xfrm>
+          <a:prstGeom prst="rect">
+            <a:avLst/>
+          </a:prstGeom>
+          <a:noFill/>
+          <a:ln/>
+        </p:spPr>
+        <p:txBody>
+          <a:bodyPr wrap="square" lIns="0" tIns="0" rIns="0" bIns="0" rtlCol="0" anchor="t"/>
+          <a:lstStyle/>
+          <a:p>
+            <a:pPr indent="0" marL="0">
+              <a:buNone/>
+            </a:pPr>
+            <a:r>
+              <a:rPr lang="en-US" sz="1600" b="1" dirty="0">
+                <a:solidFill>
+                  <a:schemeClr val="tx1"/>
+                </a:solidFill>
+              </a:rPr>
+              <a:t>Garantia e suporte</a:t>
+            </a:r>
+            <a:endParaRPr lang="en-US" sz="1600" dirty="0"/>
+          </a:p>
+        </p:txBody>
+      </p:sp>
+      <p:sp>
+        <p:nvSpPr>
+          <p:cNvPr id="42" name="Garantia e suporte texto"/>
+          <p:cNvSpPr txBox="1"/>
+          <p:nvPr/>
+        </p:nvSpPr>
+        <p:spPr>
+          <a:xfrm>
+            <a:off x="9272016" y="5212080"/>
+            <a:ext cx="2148840" cy="594360"/>
+          </a:xfrm>
+          <a:prstGeom prst="rect">
+            <a:avLst/>
+          </a:prstGeom>
+          <a:noFill/>
+          <a:ln/>
+        </p:spPr>
+        <p:txBody>
+          <a:bodyPr wrap="square" lIns="0" tIns="0" rIns="0" bIns="0" rtlCol="0" anchor="t"/>
+          <a:lstStyle/>
+          <a:p>
+            <a:pPr indent="0" marL="0">
+              <a:buNone/>
+            </a:pPr>
+            <a:r>
+              <a:rPr lang="en-US" sz="1400" dirty="0">
+                <a:solidFill>
+                  <a:schemeClr val="tx2"/>
+                </a:solidFill>
+              </a:rPr>
+              <a:t>Equipe técnica própria para a tela não apagar</a:t>
+            </a:r>
+            <a:endParaRPr lang="en-US" sz="1400" dirty="0"/>
           </a:p>
         </p:txBody>
       </p:sp>
@@ -7768,95 +8712,405 @@
         </p:nvSpPr>
         <p:spPr>
           <a:xfrm>
-            <a:off x="822960" y="1371600"/>
-            <a:ext cx="10515600" cy="457200"/>
-          </a:xfrm>
-          <a:prstGeom prst="rect">
-            <a:avLst/>
-          </a:prstGeom>
-          <a:noFill/>
-          <a:ln/>
-        </p:spPr>
-        <p:txBody>
-          <a:bodyPr wrap="square" lIns="0" tIns="0" rIns="0" bIns="0" rtlCol="0"/>
+            <a:off x="548640" y="411480"/>
+            <a:ext cx="11064240" cy="822960"/>
+          </a:xfrm>
+          <a:prstGeom prst="rect">
+            <a:avLst/>
+          </a:prstGeom>
+          <a:noFill/>
+          <a:ln/>
+        </p:spPr>
+        <p:txBody>
+          <a:bodyPr wrap="square" lIns="0" tIns="0" rIns="0" bIns="0" rtlCol="0" anchor="ctr"/>
           <a:lstStyle/>
           <a:p>
             <a:pPr algn="l" indent="0" marL="0">
               <a:buNone/>
             </a:pPr>
             <a:r>
-              <a:rPr lang="en-US" sz="1800" b="1" dirty="0">
-                <a:solidFill>
-                  <a:schemeClr val="accent1"/>
-                </a:solidFill>
-              </a:rPr>
-              <a:t>Por que digitalizar o seu espaço</a:t>
-            </a:r>
-            <a:endParaRPr lang="en-US" sz="1800" dirty="0"/>
-          </a:p>
-        </p:txBody>
-      </p:sp>
-      <p:sp>
-        <p:nvSpPr>
-          <p:cNvPr id="3" name="Text 1"/>
+              <a:rPr lang="en-US" sz="3200" b="1" dirty="0">
+                <a:solidFill>
+                  <a:schemeClr val="tx1"/>
+                </a:solidFill>
+              </a:rPr>
+              <a:t>Quem confia na LedWave</a:t>
+            </a:r>
+            <a:endParaRPr lang="en-US" sz="3200" dirty="0"/>
+          </a:p>
+        </p:txBody>
+      </p:sp>
+      <p:sp>
+        <p:nvSpPr>
+          <p:cNvPr id="3" name="Marca Nordestão"/>
           <p:cNvSpPr/>
-          <p:nvPr>
-            <p:ph idx="102" type="body" hasCustomPrompt="1"/>
-          </p:nvPr>
-        </p:nvSpPr>
-        <p:spPr>
-          <a:xfrm>
-            <a:off x="822960" y="2011680"/>
-            <a:ext cx="8229600" cy="3840480"/>
-          </a:xfrm>
-          <a:prstGeom prst="rect">
-            <a:avLst/>
-          </a:prstGeom>
-          <a:noFill/>
-          <a:ln/>
-        </p:spPr>
-        <p:txBody>
-          <a:bodyPr wrap="square" lIns="0" tIns="0" rIns="0" bIns="0" rtlCol="0" anchor="t"/>
-          <a:lstStyle/>
-          <a:p>
-            <a:pPr algn="l" indent="0" marL="0">
-              <a:buNone/>
-            </a:pPr>
-            <a:r>
-              <a:rPr lang="en-US" sz="3200" b="1" dirty="0">
-                <a:solidFill>
-                  <a:schemeClr val="bg1"/>
-                </a:solidFill>
-              </a:rPr>
-              <a:t>Transformar a vitrine em um vendedor que trabalha 24h, chama o cliente pelo movimento e conta a história da coleção antes de ele entrar.</a:t>
-            </a:r>
-            <a:endParaRPr lang="en-US" sz="3200" dirty="0"/>
-          </a:p>
-        </p:txBody>
-      </p:sp>
-      <p:sp>
-        <p:nvSpPr>
-          <p:cNvPr id="4" name="Propósito círculo"/>
+          <p:nvPr/>
+        </p:nvSpPr>
+        <p:spPr>
+          <a:xfrm>
+            <a:off x="548640" y="1554480"/>
+            <a:ext cx="3474720" cy="868680"/>
+          </a:xfrm>
+          <a:prstGeom prst="roundRect">
+            <a:avLst>
+              <a:gd name="adj" fmla="val 12632"/>
+            </a:avLst>
+          </a:prstGeom>
+          <a:solidFill>
+            <a:schemeClr val="bg2"/>
+          </a:solidFill>
+          <a:ln/>
+        </p:spPr>
+      </p:sp>
+      <p:sp>
+        <p:nvSpPr>
+          <p:cNvPr id="4" name="Marca nome 1"/>
+          <p:cNvSpPr txBox="1"/>
+          <p:nvPr/>
+        </p:nvSpPr>
+        <p:spPr>
+          <a:xfrm>
+            <a:off x="548640" y="1554480"/>
+            <a:ext cx="3474720" cy="868680"/>
+          </a:xfrm>
+          <a:prstGeom prst="rect">
+            <a:avLst/>
+          </a:prstGeom>
+          <a:noFill/>
+          <a:ln/>
+        </p:spPr>
+        <p:txBody>
+          <a:bodyPr wrap="square" lIns="0" tIns="0" rIns="0" bIns="0" rtlCol="0" anchor="ctr"/>
+          <a:lstStyle/>
+          <a:p>
+            <a:pPr algn="ctr" indent="0" marL="0">
+              <a:buNone/>
+            </a:pPr>
+            <a:r>
+              <a:rPr lang="en-US" sz="2200" b="1" dirty="0">
+                <a:solidFill>
+                  <a:schemeClr val="tx2"/>
+                </a:solidFill>
+              </a:rPr>
+              <a:t>Nordestão</a:t>
+            </a:r>
+            <a:endParaRPr lang="en-US" sz="2200" dirty="0"/>
+          </a:p>
+        </p:txBody>
+      </p:sp>
+      <p:sp>
+        <p:nvSpPr>
+          <p:cNvPr id="5" name="Marca Rosewood"/>
           <p:cNvSpPr/>
           <p:nvPr/>
         </p:nvSpPr>
         <p:spPr>
           <a:xfrm>
-            <a:off x="9692640" y="2103120"/>
-            <a:ext cx="1737360" cy="1737360"/>
+            <a:off x="4297680" y="1554480"/>
+            <a:ext cx="3474720" cy="868680"/>
+          </a:xfrm>
+          <a:prstGeom prst="roundRect">
+            <a:avLst>
+              <a:gd name="adj" fmla="val 12632"/>
+            </a:avLst>
+          </a:prstGeom>
+          <a:solidFill>
+            <a:schemeClr val="bg2"/>
+          </a:solidFill>
+          <a:ln/>
+        </p:spPr>
+      </p:sp>
+      <p:sp>
+        <p:nvSpPr>
+          <p:cNvPr id="6" name="Marca nome 2"/>
+          <p:cNvSpPr txBox="1"/>
+          <p:nvPr/>
+        </p:nvSpPr>
+        <p:spPr>
+          <a:xfrm>
+            <a:off x="4297680" y="1554480"/>
+            <a:ext cx="3474720" cy="868680"/>
+          </a:xfrm>
+          <a:prstGeom prst="rect">
+            <a:avLst/>
+          </a:prstGeom>
+          <a:noFill/>
+          <a:ln/>
+        </p:spPr>
+        <p:txBody>
+          <a:bodyPr wrap="square" lIns="0" tIns="0" rIns="0" bIns="0" rtlCol="0" anchor="ctr"/>
+          <a:lstStyle/>
+          <a:p>
+            <a:pPr algn="ctr" indent="0" marL="0">
+              <a:buNone/>
+            </a:pPr>
+            <a:r>
+              <a:rPr lang="en-US" sz="2200" b="1" dirty="0">
+                <a:solidFill>
+                  <a:schemeClr val="tx2"/>
+                </a:solidFill>
+              </a:rPr>
+              <a:t>Rosewood</a:t>
+            </a:r>
+            <a:endParaRPr lang="en-US" sz="2200" dirty="0"/>
+          </a:p>
+        </p:txBody>
+      </p:sp>
+      <p:sp>
+        <p:nvSpPr>
+          <p:cNvPr id="7" name="Marca Beto Carrero World"/>
+          <p:cNvSpPr/>
+          <p:nvPr/>
+        </p:nvSpPr>
+        <p:spPr>
+          <a:xfrm>
+            <a:off x="8046720" y="1554480"/>
+            <a:ext cx="3474720" cy="868680"/>
+          </a:xfrm>
+          <a:prstGeom prst="roundRect">
+            <a:avLst>
+              <a:gd name="adj" fmla="val 12632"/>
+            </a:avLst>
+          </a:prstGeom>
+          <a:solidFill>
+            <a:schemeClr val="bg2"/>
+          </a:solidFill>
+          <a:ln/>
+        </p:spPr>
+      </p:sp>
+      <p:sp>
+        <p:nvSpPr>
+          <p:cNvPr id="8" name="Marca nome 3"/>
+          <p:cNvSpPr txBox="1"/>
+          <p:nvPr/>
+        </p:nvSpPr>
+        <p:spPr>
+          <a:xfrm>
+            <a:off x="8046720" y="1554480"/>
+            <a:ext cx="3474720" cy="868680"/>
+          </a:xfrm>
+          <a:prstGeom prst="rect">
+            <a:avLst/>
+          </a:prstGeom>
+          <a:noFill/>
+          <a:ln/>
+        </p:spPr>
+        <p:txBody>
+          <a:bodyPr wrap="square" lIns="0" tIns="0" rIns="0" bIns="0" rtlCol="0" anchor="ctr"/>
+          <a:lstStyle/>
+          <a:p>
+            <a:pPr algn="ctr" indent="0" marL="0">
+              <a:buNone/>
+            </a:pPr>
+            <a:r>
+              <a:rPr lang="en-US" sz="2200" b="1" dirty="0">
+                <a:solidFill>
+                  <a:schemeClr val="tx2"/>
+                </a:solidFill>
+              </a:rPr>
+              <a:t>Beto Carrero World</a:t>
+            </a:r>
+            <a:endParaRPr lang="en-US" sz="2200" dirty="0"/>
+          </a:p>
+        </p:txBody>
+      </p:sp>
+      <p:sp>
+        <p:nvSpPr>
+          <p:cNvPr id="9" name="Marca Museu do Amanhã"/>
+          <p:cNvSpPr/>
+          <p:nvPr/>
+        </p:nvSpPr>
+        <p:spPr>
+          <a:xfrm>
+            <a:off x="548640" y="2606040"/>
+            <a:ext cx="3474720" cy="868680"/>
+          </a:xfrm>
+          <a:prstGeom prst="roundRect">
+            <a:avLst>
+              <a:gd name="adj" fmla="val 12632"/>
+            </a:avLst>
+          </a:prstGeom>
+          <a:solidFill>
+            <a:schemeClr val="bg2"/>
+          </a:solidFill>
+          <a:ln/>
+        </p:spPr>
+      </p:sp>
+      <p:sp>
+        <p:nvSpPr>
+          <p:cNvPr id="10" name="Marca nome 4"/>
+          <p:cNvSpPr txBox="1"/>
+          <p:nvPr/>
+        </p:nvSpPr>
+        <p:spPr>
+          <a:xfrm>
+            <a:off x="548640" y="2606040"/>
+            <a:ext cx="3474720" cy="868680"/>
+          </a:xfrm>
+          <a:prstGeom prst="rect">
+            <a:avLst/>
+          </a:prstGeom>
+          <a:noFill/>
+          <a:ln/>
+        </p:spPr>
+        <p:txBody>
+          <a:bodyPr wrap="square" lIns="0" tIns="0" rIns="0" bIns="0" rtlCol="0" anchor="ctr"/>
+          <a:lstStyle/>
+          <a:p>
+            <a:pPr algn="ctr" indent="0" marL="0">
+              <a:buNone/>
+            </a:pPr>
+            <a:r>
+              <a:rPr lang="en-US" sz="2200" b="1" dirty="0">
+                <a:solidFill>
+                  <a:schemeClr val="tx2"/>
+                </a:solidFill>
+              </a:rPr>
+              <a:t>Museu do Amanhã</a:t>
+            </a:r>
+            <a:endParaRPr lang="en-US" sz="2200" dirty="0"/>
+          </a:p>
+        </p:txBody>
+      </p:sp>
+      <p:sp>
+        <p:nvSpPr>
+          <p:cNvPr id="11" name="Marca Animalia"/>
+          <p:cNvSpPr/>
+          <p:nvPr/>
+        </p:nvSpPr>
+        <p:spPr>
+          <a:xfrm>
+            <a:off x="4297680" y="2606040"/>
+            <a:ext cx="3474720" cy="868680"/>
+          </a:xfrm>
+          <a:prstGeom prst="roundRect">
+            <a:avLst>
+              <a:gd name="adj" fmla="val 12632"/>
+            </a:avLst>
+          </a:prstGeom>
+          <a:solidFill>
+            <a:schemeClr val="bg2"/>
+          </a:solidFill>
+          <a:ln/>
+        </p:spPr>
+      </p:sp>
+      <p:sp>
+        <p:nvSpPr>
+          <p:cNvPr id="12" name="Marca nome 5"/>
+          <p:cNvSpPr txBox="1"/>
+          <p:nvPr/>
+        </p:nvSpPr>
+        <p:spPr>
+          <a:xfrm>
+            <a:off x="4297680" y="2606040"/>
+            <a:ext cx="3474720" cy="868680"/>
+          </a:xfrm>
+          <a:prstGeom prst="rect">
+            <a:avLst/>
+          </a:prstGeom>
+          <a:noFill/>
+          <a:ln/>
+        </p:spPr>
+        <p:txBody>
+          <a:bodyPr wrap="square" lIns="0" tIns="0" rIns="0" bIns="0" rtlCol="0" anchor="ctr"/>
+          <a:lstStyle/>
+          <a:p>
+            <a:pPr algn="ctr" indent="0" marL="0">
+              <a:buNone/>
+            </a:pPr>
+            <a:r>
+              <a:rPr lang="en-US" sz="2200" b="1" dirty="0">
+                <a:solidFill>
+                  <a:schemeClr val="tx2"/>
+                </a:solidFill>
+              </a:rPr>
+              <a:t>Animalia</a:t>
+            </a:r>
+            <a:endParaRPr lang="en-US" sz="2200" dirty="0"/>
+          </a:p>
+        </p:txBody>
+      </p:sp>
+      <p:sp>
+        <p:nvSpPr>
+          <p:cNvPr id="13" name="Marca Volkswagen"/>
+          <p:cNvSpPr/>
+          <p:nvPr/>
+        </p:nvSpPr>
+        <p:spPr>
+          <a:xfrm>
+            <a:off x="8046720" y="2606040"/>
+            <a:ext cx="3474720" cy="868680"/>
+          </a:xfrm>
+          <a:prstGeom prst="roundRect">
+            <a:avLst>
+              <a:gd name="adj" fmla="val 12632"/>
+            </a:avLst>
+          </a:prstGeom>
+          <a:solidFill>
+            <a:schemeClr val="bg2"/>
+          </a:solidFill>
+          <a:ln/>
+        </p:spPr>
+      </p:sp>
+      <p:sp>
+        <p:nvSpPr>
+          <p:cNvPr id="14" name="Marca nome 6"/>
+          <p:cNvSpPr txBox="1"/>
+          <p:nvPr/>
+        </p:nvSpPr>
+        <p:spPr>
+          <a:xfrm>
+            <a:off x="8046720" y="2606040"/>
+            <a:ext cx="3474720" cy="868680"/>
+          </a:xfrm>
+          <a:prstGeom prst="rect">
+            <a:avLst/>
+          </a:prstGeom>
+          <a:noFill/>
+          <a:ln/>
+        </p:spPr>
+        <p:txBody>
+          <a:bodyPr wrap="square" lIns="0" tIns="0" rIns="0" bIns="0" rtlCol="0" anchor="ctr"/>
+          <a:lstStyle/>
+          <a:p>
+            <a:pPr algn="ctr" indent="0" marL="0">
+              <a:buNone/>
+            </a:pPr>
+            <a:r>
+              <a:rPr lang="en-US" sz="2200" b="1" dirty="0">
+                <a:solidFill>
+                  <a:schemeClr val="tx2"/>
+                </a:solidFill>
+              </a:rPr>
+              <a:t>Volkswagen</a:t>
+            </a:r>
+            <a:endParaRPr lang="en-US" sz="2200" dirty="0"/>
+          </a:p>
+        </p:txBody>
+      </p:sp>
+      <p:sp>
+        <p:nvSpPr>
+          <p:cNvPr id="15" name="Ranking Exame círculo"/>
+          <p:cNvSpPr/>
+          <p:nvPr/>
+        </p:nvSpPr>
+        <p:spPr>
+          <a:xfrm>
+            <a:off x="548640" y="4069080"/>
+            <a:ext cx="777240" cy="777240"/>
           </a:xfrm>
           <a:prstGeom prst="ellipse">
             <a:avLst/>
           </a:prstGeom>
           <a:solidFill>
-            <a:srgbClr val="E0218A"/>
+            <a:srgbClr val="2B1A63"/>
           </a:solidFill>
           <a:ln/>
         </p:spPr>
       </p:sp>
       <p:pic>
         <p:nvPicPr>
-          <p:cNvPr id="5" name="Propósito ícone" descr="preencoded.png">    </p:cNvPr>
+          <p:cNvPr id="16" name="Ranking Exame ícone" descr="preencoded.png">    </p:cNvPr>
           <p:cNvPicPr>
             <a:picLocks noChangeAspect="1"/>
           </p:cNvPicPr>
@@ -7870,14 +9124,399 @@
         </p:blipFill>
         <p:spPr>
           <a:xfrm>
-            <a:off x="10126980" y="2537460"/>
-            <a:ext cx="868680" cy="868680"/>
+            <a:off x="742950" y="4263390"/>
+            <a:ext cx="388620" cy="388620"/>
           </a:xfrm>
           <a:prstGeom prst="rect">
             <a:avLst/>
           </a:prstGeom>
         </p:spPr>
       </p:pic>
+      <p:sp>
+        <p:nvSpPr>
+          <p:cNvPr id="17" name="Ranking Exame título"/>
+          <p:cNvSpPr txBox="1"/>
+          <p:nvPr/>
+        </p:nvSpPr>
+        <p:spPr>
+          <a:xfrm>
+            <a:off x="1508760" y="4069080"/>
+            <a:ext cx="2514600" cy="411480"/>
+          </a:xfrm>
+          <a:prstGeom prst="rect">
+            <a:avLst/>
+          </a:prstGeom>
+          <a:noFill/>
+          <a:ln/>
+        </p:spPr>
+        <p:txBody>
+          <a:bodyPr wrap="square" lIns="0" tIns="0" rIns="0" bIns="0" rtlCol="0" anchor="t"/>
+          <a:lstStyle/>
+          <a:p>
+            <a:pPr indent="0" marL="0">
+              <a:buNone/>
+            </a:pPr>
+            <a:r>
+              <a:rPr lang="en-US" sz="1700" b="1" dirty="0">
+                <a:solidFill>
+                  <a:schemeClr val="tx1"/>
+                </a:solidFill>
+              </a:rPr>
+              <a:t>Ranking Exame</a:t>
+            </a:r>
+            <a:endParaRPr lang="en-US" sz="1700" dirty="0"/>
+          </a:p>
+        </p:txBody>
+      </p:sp>
+      <p:sp>
+        <p:nvSpPr>
+          <p:cNvPr id="18" name="Ranking Exame texto"/>
+          <p:cNvSpPr txBox="1"/>
+          <p:nvPr/>
+        </p:nvSpPr>
+        <p:spPr>
+          <a:xfrm>
+            <a:off x="1508760" y="4526280"/>
+            <a:ext cx="2514600" cy="914400"/>
+          </a:xfrm>
+          <a:prstGeom prst="rect">
+            <a:avLst/>
+          </a:prstGeom>
+          <a:noFill/>
+          <a:ln/>
+        </p:spPr>
+        <p:txBody>
+          <a:bodyPr wrap="square" lIns="0" tIns="0" rIns="0" bIns="0" rtlCol="0" anchor="t"/>
+          <a:lstStyle/>
+          <a:p>
+            <a:pPr indent="0" marL="0">
+              <a:buNone/>
+            </a:pPr>
+            <a:r>
+              <a:rPr lang="en-US" sz="1400" dirty="0">
+                <a:solidFill>
+                  <a:schemeClr val="tx2"/>
+                </a:solidFill>
+              </a:rPr>
+              <a:t>4 anos seguidos, nº 1 do segmento em 2025</a:t>
+            </a:r>
+            <a:endParaRPr lang="en-US" sz="1400" dirty="0"/>
+          </a:p>
+        </p:txBody>
+      </p:sp>
+      <p:sp>
+        <p:nvSpPr>
+          <p:cNvPr id="19" name="ABF Expo círculo"/>
+          <p:cNvSpPr/>
+          <p:nvPr/>
+        </p:nvSpPr>
+        <p:spPr>
+          <a:xfrm>
+            <a:off x="4297680" y="4069080"/>
+            <a:ext cx="777240" cy="777240"/>
+          </a:xfrm>
+          <a:prstGeom prst="ellipse">
+            <a:avLst/>
+          </a:prstGeom>
+          <a:solidFill>
+            <a:srgbClr val="2B1A63"/>
+          </a:solidFill>
+          <a:ln/>
+        </p:spPr>
+      </p:sp>
+      <p:pic>
+        <p:nvPicPr>
+          <p:cNvPr id="20" name="ABF Expo ícone" descr="preencoded.png">    </p:cNvPr>
+          <p:cNvPicPr>
+            <a:picLocks noChangeAspect="1"/>
+          </p:cNvPicPr>
+          <p:nvPr/>
+        </p:nvPicPr>
+        <p:blipFill>
+          <a:blip r:embed="rId2"/>
+          <a:stretch>
+            <a:fillRect/>
+          </a:stretch>
+        </p:blipFill>
+        <p:spPr>
+          <a:xfrm>
+            <a:off x="4491990" y="4263390"/>
+            <a:ext cx="388620" cy="388620"/>
+          </a:xfrm>
+          <a:prstGeom prst="rect">
+            <a:avLst/>
+          </a:prstGeom>
+        </p:spPr>
+      </p:pic>
+      <p:sp>
+        <p:nvSpPr>
+          <p:cNvPr id="21" name="ABF Expo título"/>
+          <p:cNvSpPr txBox="1"/>
+          <p:nvPr/>
+        </p:nvSpPr>
+        <p:spPr>
+          <a:xfrm>
+            <a:off x="5257800" y="4069080"/>
+            <a:ext cx="2514600" cy="411480"/>
+          </a:xfrm>
+          <a:prstGeom prst="rect">
+            <a:avLst/>
+          </a:prstGeom>
+          <a:noFill/>
+          <a:ln/>
+        </p:spPr>
+        <p:txBody>
+          <a:bodyPr wrap="square" lIns="0" tIns="0" rIns="0" bIns="0" rtlCol="0" anchor="t"/>
+          <a:lstStyle/>
+          <a:p>
+            <a:pPr indent="0" marL="0">
+              <a:buNone/>
+            </a:pPr>
+            <a:r>
+              <a:rPr lang="en-US" sz="1700" b="1" dirty="0">
+                <a:solidFill>
+                  <a:schemeClr val="tx1"/>
+                </a:solidFill>
+              </a:rPr>
+              <a:t>ABF Expo</a:t>
+            </a:r>
+            <a:endParaRPr lang="en-US" sz="1700" dirty="0"/>
+          </a:p>
+        </p:txBody>
+      </p:sp>
+      <p:sp>
+        <p:nvSpPr>
+          <p:cNvPr id="22" name="ABF Expo texto"/>
+          <p:cNvSpPr txBox="1"/>
+          <p:nvPr/>
+        </p:nvSpPr>
+        <p:spPr>
+          <a:xfrm>
+            <a:off x="5257800" y="4526280"/>
+            <a:ext cx="2514600" cy="914400"/>
+          </a:xfrm>
+          <a:prstGeom prst="rect">
+            <a:avLst/>
+          </a:prstGeom>
+          <a:noFill/>
+          <a:ln/>
+        </p:spPr>
+        <p:txBody>
+          <a:bodyPr wrap="square" lIns="0" tIns="0" rIns="0" bIns="0" rtlCol="0" anchor="t"/>
+          <a:lstStyle/>
+          <a:p>
+            <a:pPr indent="0" marL="0">
+              <a:buNone/>
+            </a:pPr>
+            <a:r>
+              <a:rPr lang="en-US" sz="1400" dirty="0">
+                <a:solidFill>
+                  <a:schemeClr val="tx2"/>
+                </a:solidFill>
+              </a:rPr>
+              <a:t>Parceira oficial da maior feira de franquias do país</a:t>
+            </a:r>
+            <a:endParaRPr lang="en-US" sz="1400" dirty="0"/>
+          </a:p>
+        </p:txBody>
+      </p:sp>
+      <p:sp>
+        <p:nvSpPr>
+          <p:cNvPr id="23" name="NRF 2026, Nova York círculo"/>
+          <p:cNvSpPr/>
+          <p:nvPr/>
+        </p:nvSpPr>
+        <p:spPr>
+          <a:xfrm>
+            <a:off x="8046720" y="4069080"/>
+            <a:ext cx="777240" cy="777240"/>
+          </a:xfrm>
+          <a:prstGeom prst="ellipse">
+            <a:avLst/>
+          </a:prstGeom>
+          <a:solidFill>
+            <a:srgbClr val="2B1A63"/>
+          </a:solidFill>
+          <a:ln/>
+        </p:spPr>
+      </p:sp>
+      <p:pic>
+        <p:nvPicPr>
+          <p:cNvPr id="24" name="NRF 2026, Nova York ícone" descr="preencoded.png">    </p:cNvPr>
+          <p:cNvPicPr>
+            <a:picLocks noChangeAspect="1"/>
+          </p:cNvPicPr>
+          <p:nvPr/>
+        </p:nvPicPr>
+        <p:blipFill>
+          <a:blip r:embed="rId3"/>
+          <a:stretch>
+            <a:fillRect/>
+          </a:stretch>
+        </p:blipFill>
+        <p:spPr>
+          <a:xfrm>
+            <a:off x="8241030" y="4263390"/>
+            <a:ext cx="388620" cy="388620"/>
+          </a:xfrm>
+          <a:prstGeom prst="rect">
+            <a:avLst/>
+          </a:prstGeom>
+        </p:spPr>
+      </p:pic>
+      <p:sp>
+        <p:nvSpPr>
+          <p:cNvPr id="25" name="NRF 2026, Nova York título"/>
+          <p:cNvSpPr txBox="1"/>
+          <p:nvPr/>
+        </p:nvSpPr>
+        <p:spPr>
+          <a:xfrm>
+            <a:off x="9006840" y="4069080"/>
+            <a:ext cx="2514600" cy="411480"/>
+          </a:xfrm>
+          <a:prstGeom prst="rect">
+            <a:avLst/>
+          </a:prstGeom>
+          <a:noFill/>
+          <a:ln/>
+        </p:spPr>
+        <p:txBody>
+          <a:bodyPr wrap="square" lIns="0" tIns="0" rIns="0" bIns="0" rtlCol="0" anchor="t"/>
+          <a:lstStyle/>
+          <a:p>
+            <a:pPr indent="0" marL="0">
+              <a:buNone/>
+            </a:pPr>
+            <a:r>
+              <a:rPr lang="en-US" sz="1700" b="1" dirty="0">
+                <a:solidFill>
+                  <a:schemeClr val="tx1"/>
+                </a:solidFill>
+              </a:rPr>
+              <a:t>NRF 2026, Nova York</a:t>
+            </a:r>
+            <a:endParaRPr lang="en-US" sz="1700" dirty="0"/>
+          </a:p>
+        </p:txBody>
+      </p:sp>
+      <p:sp>
+        <p:nvSpPr>
+          <p:cNvPr id="26" name="NRF 2026, Nova York texto"/>
+          <p:cNvSpPr txBox="1"/>
+          <p:nvPr/>
+        </p:nvSpPr>
+        <p:spPr>
+          <a:xfrm>
+            <a:off x="9006840" y="4526280"/>
+            <a:ext cx="2514600" cy="914400"/>
+          </a:xfrm>
+          <a:prstGeom prst="rect">
+            <a:avLst/>
+          </a:prstGeom>
+          <a:noFill/>
+          <a:ln/>
+        </p:spPr>
+        <p:txBody>
+          <a:bodyPr wrap="square" lIns="0" tIns="0" rIns="0" bIns="0" rtlCol="0" anchor="t"/>
+          <a:lstStyle/>
+          <a:p>
+            <a:pPr indent="0" marL="0">
+              <a:buNone/>
+            </a:pPr>
+            <a:r>
+              <a:rPr lang="en-US" sz="1400" dirty="0">
+                <a:solidFill>
+                  <a:schemeClr val="tx2"/>
+                </a:solidFill>
+              </a:rPr>
+              <a:t>Estande próprio na maior feira de varejo do mundo</a:t>
+            </a:r>
+            <a:endParaRPr lang="en-US" sz="1400" dirty="0"/>
+          </a:p>
+        </p:txBody>
+      </p:sp>
+      <p:sp>
+        <p:nvSpPr>
+          <p:cNvPr id="27" name="Instrução logos"/>
+          <p:cNvSpPr txBox="1"/>
+          <p:nvPr/>
+        </p:nvSpPr>
+        <p:spPr>
+          <a:xfrm>
+            <a:off x="548640" y="5715000"/>
+            <a:ext cx="10972800" cy="274320"/>
+          </a:xfrm>
+          <a:prstGeom prst="rect">
+            <a:avLst/>
+          </a:prstGeom>
+          <a:noFill/>
+          <a:ln/>
+        </p:spPr>
+        <p:txBody>
+          <a:bodyPr wrap="square" lIns="0" tIns="0" rIns="0" bIns="0" rtlCol="0" anchor="t"/>
+          <a:lstStyle/>
+          <a:p>
+            <a:pPr indent="0" marL="0">
+              <a:buNone/>
+            </a:pPr>
+            <a:r>
+              <a:rPr lang="en-US" sz="1100" i="1" dirty="0">
+                <a:solidFill>
+                  <a:srgbClr val="6B6385"/>
+                </a:solidFill>
+              </a:rPr>
+              <a:t>Troque os nomes pelos logos oficiais dos clientes antes de enviar o arquivo.</a:t>
+            </a:r>
+            <a:endParaRPr lang="en-US" sz="1100" dirty="0"/>
+          </a:p>
+        </p:txBody>
+      </p:sp>
+      <p:sp>
+        <p:nvSpPr>
+          <p:cNvPr id="25" name="Slide Number Placeholder 0"/>
+          <p:cNvSpPr>
+            <a:spLocks noGrp="1"/>
+          </p:cNvSpPr>
+          <p:nvPr>
+            <p:ph type="sldNum" sz="quarter" idx="4294967295"/>
+          </p:nvPr>
+        </p:nvSpPr>
+        <p:spPr>
+          <a:xfrm>
+            <a:off x="11155680" y="6355080"/>
+            <a:ext cx="457200" cy="274320"/>
+          </a:xfrm>
+          <a:prstGeom prst="rect">
+            <a:avLst/>
+          </a:prstGeom>
+          <a:extLst>
+            <a:ext uri="{C572A759-6A51-4108-AA02-DFA0A04FC94B}">
+              <ma14:wrappingTextBoxFlag xmlns:ma14="http://schemas.microsoft.com/office/mac/drawingml/2011/main" val="0"/>
+            </a:ext>
+          </a:extLst>
+        </p:spPr>
+        <p:txBody>
+          <a:bodyPr/>
+          <a:lstStyle>
+            <a:lvl1pPr>
+              <a:defRPr sz="1000">
+                <a:solidFill>
+                  <a:srgbClr val="6B6385"/>
+                </a:solidFill>
+              </a:defRPr>
+            </a:lvl1pPr>
+          </a:lstStyle>
+          <a:p>
+            <a:pPr algn="r"/>
+            <a:fld id="{F7021451-1387-4CA6-816F-3879F97B5CBC}" type="slidenum">
+              <a:rPr b="0" lang="en-US"/>
+              <a:t>8</a:t>
+            </a:fld>
+            <a:endParaRPr lang="en-US"/>
+          </a:p>
+        </p:txBody>
+      </p:sp>
     </p:spTree>
   </p:cSld>
   <p:clrMapOvr>
@@ -7913,29 +9552,67 @@
         </p:nvSpPr>
         <p:spPr>
           <a:xfrm>
-            <a:off x="548640" y="411480"/>
-            <a:ext cx="11064240" cy="822960"/>
-          </a:xfrm>
-          <a:prstGeom prst="rect">
-            <a:avLst/>
-          </a:prstGeom>
-          <a:noFill/>
-          <a:ln/>
-        </p:spPr>
-        <p:txBody>
-          <a:bodyPr wrap="square" lIns="0" tIns="0" rIns="0" bIns="0" rtlCol="0" anchor="ctr"/>
+            <a:off x="822960" y="1371600"/>
+            <a:ext cx="10515600" cy="457200"/>
+          </a:xfrm>
+          <a:prstGeom prst="rect">
+            <a:avLst/>
+          </a:prstGeom>
+          <a:noFill/>
+          <a:ln/>
+        </p:spPr>
+        <p:txBody>
+          <a:bodyPr wrap="square" lIns="0" tIns="0" rIns="0" bIns="0" rtlCol="0"/>
           <a:lstStyle/>
           <a:p>
             <a:pPr algn="l" indent="0" marL="0">
               <a:buNone/>
             </a:pPr>
             <a:r>
+              <a:rPr lang="en-US" sz="1800" b="1" dirty="0">
+                <a:solidFill>
+                  <a:schemeClr val="accent1"/>
+                </a:solidFill>
+              </a:rPr>
+              <a:t>Por que digitalizar o seu espaço</a:t>
+            </a:r>
+            <a:endParaRPr lang="en-US" sz="1800" dirty="0"/>
+          </a:p>
+        </p:txBody>
+      </p:sp>
+      <p:sp>
+        <p:nvSpPr>
+          <p:cNvPr id="3" name="Text 1"/>
+          <p:cNvSpPr/>
+          <p:nvPr>
+            <p:ph idx="102" type="body" hasCustomPrompt="1"/>
+          </p:nvPr>
+        </p:nvSpPr>
+        <p:spPr>
+          <a:xfrm>
+            <a:off x="822960" y="2011680"/>
+            <a:ext cx="8229600" cy="3291840"/>
+          </a:xfrm>
+          <a:prstGeom prst="rect">
+            <a:avLst/>
+          </a:prstGeom>
+          <a:noFill/>
+          <a:ln/>
+        </p:spPr>
+        <p:txBody>
+          <a:bodyPr wrap="square" lIns="0" tIns="0" rIns="0" bIns="0" rtlCol="0" anchor="t"/>
+          <a:lstStyle/>
+          <a:p>
+            <a:pPr algn="l" indent="0" marL="0">
+              <a:buNone/>
+            </a:pPr>
+            <a:r>
               <a:rPr lang="en-US" sz="3200" b="1" dirty="0">
                 <a:solidFill>
-                  <a:schemeClr val="tx1"/>
-                </a:solidFill>
-              </a:rPr>
-              <a:t>Imagine o seu espaço</a:t>
+                  <a:schemeClr val="bg1"/>
+                </a:solidFill>
+              </a:rPr>
+              <a:t>Transformar a vitrine em um vendedor que trabalha 24h, chama o cliente pelo movimento e conta a história da coleção antes de ele entrar.</a:t>
             </a:r>
             <a:endParaRPr lang="en-US" sz="3200" dirty="0"/>
           </a:p>
@@ -7943,126 +9620,27 @@
       </p:sp>
       <p:sp>
         <p:nvSpPr>
-          <p:cNvPr id="3" name="História"/>
-          <p:cNvSpPr txBox="1"/>
-          <p:nvPr/>
-        </p:nvSpPr>
-        <p:spPr>
-          <a:xfrm>
-            <a:off x="548640" y="1691640"/>
-            <a:ext cx="4937760" cy="3291840"/>
-          </a:xfrm>
-          <a:prstGeom prst="rect">
-            <a:avLst/>
-          </a:prstGeom>
-          <a:noFill/>
-          <a:ln/>
-        </p:spPr>
-        <p:txBody>
-          <a:bodyPr wrap="square" lIns="0" tIns="0" rIns="0" bIns="0" rtlCol="0" anchor="t"/>
-          <a:lstStyle/>
-          <a:p>
-            <a:pPr indent="0" marL="0">
-              <a:buNone/>
-            </a:pPr>
-            <a:r>
-              <a:rPr lang="en-US" sz="1800" dirty="0">
-                <a:solidFill>
-                  <a:schemeClr val="tx1"/>
-                </a:solidFill>
-              </a:rPr>
-              <a:t>Antes x depois: a mesma vitrine com um banner de liquidação desbotado e, ao lado, a coleção nova em movimento, com troca de conteúdo do celular em minutos. O olho humano é programado para seguir movimento.</a:t>
-            </a:r>
-            <a:endParaRPr lang="en-US" sz="1800" dirty="0"/>
-          </a:p>
-        </p:txBody>
-      </p:sp>
-      <p:sp>
-        <p:nvSpPr>
-          <p:cNvPr id="4" name="Frase de efeito"/>
-          <p:cNvSpPr txBox="1"/>
-          <p:nvPr/>
-        </p:nvSpPr>
-        <p:spPr>
-          <a:xfrm>
-            <a:off x="548640" y="5029200"/>
-            <a:ext cx="4937760" cy="914400"/>
-          </a:xfrm>
-          <a:prstGeom prst="rect">
-            <a:avLst/>
-          </a:prstGeom>
-          <a:noFill/>
-          <a:ln/>
-        </p:spPr>
-        <p:txBody>
-          <a:bodyPr wrap="square" lIns="0" tIns="0" rIns="0" bIns="0" rtlCol="0" anchor="t"/>
-          <a:lstStyle/>
-          <a:p>
-            <a:pPr indent="0" marL="0">
-              <a:buNone/>
-            </a:pPr>
-            <a:r>
-              <a:rPr lang="en-US" sz="2000" b="1" i="1" dirty="0">
-                <a:solidFill>
-                  <a:schemeClr val="accent1"/>
-                </a:solidFill>
-              </a:rPr>
-              <a:t>Vitrine parada é vendedor dormindo.</a:t>
-            </a:r>
-            <a:endParaRPr lang="en-US" sz="2000" dirty="0"/>
-          </a:p>
-        </p:txBody>
-      </p:sp>
-      <p:sp>
-        <p:nvSpPr>
-          <p:cNvPr id="5" name="Área da simulação"/>
+          <p:cNvPr id="4" name="Propósito círculo"/>
           <p:cNvSpPr/>
           <p:nvPr/>
         </p:nvSpPr>
         <p:spPr>
           <a:xfrm>
-            <a:off x="5943600" y="1600200"/>
-            <a:ext cx="5669280" cy="4343400"/>
-          </a:xfrm>
-          <a:prstGeom prst="roundRect">
-            <a:avLst>
-              <a:gd name="adj" fmla="val 2526"/>
-            </a:avLst>
+            <a:off x="9692640" y="2103120"/>
+            <a:ext cx="1737360" cy="1737360"/>
+          </a:xfrm>
+          <a:prstGeom prst="ellipse">
+            <a:avLst/>
           </a:prstGeom>
           <a:solidFill>
-            <a:schemeClr val="bg2"/>
-          </a:solidFill>
-          <a:ln w="19050">
-            <a:solidFill>
-              <a:srgbClr val="8B5CF6"/>
-            </a:solidFill>
-            <a:prstDash val="dash"/>
-          </a:ln>
-        </p:spPr>
-      </p:sp>
-      <p:sp>
-        <p:nvSpPr>
-          <p:cNvPr id="6" name="Simulação círculo"/>
-          <p:cNvSpPr/>
-          <p:nvPr/>
-        </p:nvSpPr>
-        <p:spPr>
-          <a:xfrm>
-            <a:off x="8366760" y="2743200"/>
-            <a:ext cx="822960" cy="822960"/>
-          </a:xfrm>
-          <a:prstGeom prst="ellipse">
-            <a:avLst/>
-          </a:prstGeom>
-          <a:solidFill>
-            <a:srgbClr val="8B5CF6"/>
+            <a:srgbClr val="E0218A"/>
           </a:solidFill>
           <a:ln/>
         </p:spPr>
       </p:sp>
       <p:pic>
         <p:nvPicPr>
-          <p:cNvPr id="7" name="Simulação ícone" descr="preencoded.png">    </p:cNvPr>
+          <p:cNvPr id="5" name="Propósito ícone" descr="preencoded.png">    </p:cNvPr>
           <p:cNvPicPr>
             <a:picLocks noChangeAspect="1"/>
           </p:cNvPicPr>
@@ -8076,8 +9654,8 @@
         </p:blipFill>
         <p:spPr>
           <a:xfrm>
-            <a:off x="8572500" y="2948940"/>
-            <a:ext cx="411480" cy="411480"/>
+            <a:off x="10126980" y="2537460"/>
+            <a:ext cx="868680" cy="868680"/>
           </a:xfrm>
           <a:prstGeom prst="rect">
             <a:avLst/>
@@ -8086,49 +9664,125 @@
       </p:pic>
       <p:sp>
         <p:nvSpPr>
-          <p:cNvPr id="8" name="Instrução simulação"/>
+          <p:cNvPr id="6" name="Propósito de compra 1"/>
+          <p:cNvSpPr/>
+          <p:nvPr/>
+        </p:nvSpPr>
+        <p:spPr>
+          <a:xfrm>
+            <a:off x="822960" y="5486400"/>
+            <a:ext cx="2468880" cy="502920"/>
+          </a:xfrm>
+          <a:prstGeom prst="roundRect">
+            <a:avLst>
+              <a:gd name="adj" fmla="val 49091"/>
+            </a:avLst>
+          </a:prstGeom>
+          <a:solidFill>
+            <a:schemeClr val="tx1"/>
+          </a:solidFill>
+          <a:ln w="19050">
+            <a:solidFill>
+              <a:srgbClr val="E0218A"/>
+            </a:solidFill>
+            <a:prstDash val="solid"/>
+          </a:ln>
+        </p:spPr>
+      </p:sp>
+      <p:sp>
+        <p:nvSpPr>
+          <p:cNvPr id="7" name="Propósito de compra texto 1"/>
           <p:cNvSpPr txBox="1"/>
           <p:nvPr/>
         </p:nvSpPr>
         <p:spPr>
           <a:xfrm>
-            <a:off x="6217920" y="3749040"/>
-            <a:ext cx="5120640" cy="822960"/>
-          </a:xfrm>
-          <a:prstGeom prst="rect">
-            <a:avLst/>
-          </a:prstGeom>
-          <a:noFill/>
-          <a:ln/>
-        </p:spPr>
-        <p:txBody>
-          <a:bodyPr wrap="square" lIns="0" tIns="0" rIns="0" bIns="0" rtlCol="0" anchor="t"/>
+            <a:off x="822960" y="5486400"/>
+            <a:ext cx="2468880" cy="502920"/>
+          </a:xfrm>
+          <a:prstGeom prst="rect">
+            <a:avLst/>
+          </a:prstGeom>
+          <a:noFill/>
+          <a:ln/>
+        </p:spPr>
+        <p:txBody>
+          <a:bodyPr wrap="square" lIns="0" tIns="0" rIns="0" bIns="0" rtlCol="0" anchor="ctr"/>
           <a:lstStyle/>
           <a:p>
             <a:pPr algn="ctr" indent="0" marL="0">
               <a:buNone/>
             </a:pPr>
             <a:r>
-              <a:rPr lang="en-US" sz="1400" dirty="0">
-                <a:solidFill>
-                  <a:schemeClr val="tx2"/>
-                </a:solidFill>
-              </a:rPr>
-              <a:t>Simulação do painel no espaço do cliente</a:t>
+              <a:rPr lang="en-US" sz="1400" b="1" dirty="0">
+                <a:solidFill>
+                  <a:schemeClr val="bg1"/>
+                </a:solidFill>
+              </a:rPr>
+              <a:t>Branding</a:t>
             </a:r>
             <a:endParaRPr lang="en-US" sz="1400" dirty="0"/>
           </a:p>
+        </p:txBody>
+      </p:sp>
+      <p:sp>
+        <p:nvSpPr>
+          <p:cNvPr id="8" name="Propósito de compra 2"/>
+          <p:cNvSpPr/>
+          <p:nvPr/>
+        </p:nvSpPr>
+        <p:spPr>
+          <a:xfrm>
+            <a:off x="3474720" y="5486400"/>
+            <a:ext cx="2468880" cy="502920"/>
+          </a:xfrm>
+          <a:prstGeom prst="roundRect">
+            <a:avLst>
+              <a:gd name="adj" fmla="val 49091"/>
+            </a:avLst>
+          </a:prstGeom>
+          <a:solidFill>
+            <a:schemeClr val="tx1"/>
+          </a:solidFill>
+          <a:ln w="19050">
+            <a:solidFill>
+              <a:srgbClr val="E0218A"/>
+            </a:solidFill>
+            <a:prstDash val="solid"/>
+          </a:ln>
+        </p:spPr>
+      </p:sp>
+      <p:sp>
+        <p:nvSpPr>
+          <p:cNvPr id="9" name="Propósito de compra texto 2"/>
+          <p:cNvSpPr txBox="1"/>
+          <p:nvPr/>
+        </p:nvSpPr>
+        <p:spPr>
+          <a:xfrm>
+            <a:off x="3474720" y="5486400"/>
+            <a:ext cx="2468880" cy="502920"/>
+          </a:xfrm>
+          <a:prstGeom prst="rect">
+            <a:avLst/>
+          </a:prstGeom>
+          <a:noFill/>
+          <a:ln/>
+        </p:spPr>
+        <p:txBody>
+          <a:bodyPr wrap="square" lIns="0" tIns="0" rIns="0" bIns="0" rtlCol="0" anchor="ctr"/>
+          <a:lstStyle/>
           <a:p>
             <a:pPr algn="ctr" indent="0" marL="0">
               <a:buNone/>
             </a:pPr>
             <a:r>
-              <a:rPr lang="en-US" sz="1400" dirty="0">
-                <a:solidFill>
-                  <a:schemeClr val="tx2"/>
-                </a:solidFill>
-              </a:rPr>
-              <a:t>(insira aqui o mockup antes da reunião)</a:t>
+              <a:rPr lang="en-US" sz="1400" b="1" dirty="0">
+                <a:solidFill>
+                  <a:schemeClr val="bg1"/>
+                </a:solidFill>
+              </a:rPr>
+              <a:t>Experiência</a:t>
             </a:r>
             <a:endParaRPr lang="en-US" sz="1400" dirty="0"/>
           </a:p>
@@ -8136,46 +9790,64 @@
       </p:sp>
       <p:sp>
         <p:nvSpPr>
-          <p:cNvPr id="25" name="Slide Number Placeholder 0"/>
-          <p:cNvSpPr>
-            <a:spLocks noGrp="1"/>
-          </p:cNvSpPr>
-          <p:nvPr>
-            <p:ph type="sldNum" sz="quarter" idx="4294967295"/>
-          </p:nvPr>
-        </p:nvSpPr>
-        <p:spPr>
-          <a:xfrm>
-            <a:off x="11155680" y="6355080"/>
-            <a:ext cx="457200" cy="274320"/>
-          </a:xfrm>
-          <a:prstGeom prst="rect">
-            <a:avLst/>
-          </a:prstGeom>
-          <a:extLst>
-            <a:ext uri="{C572A759-6A51-4108-AA02-DFA0A04FC94B}">
-              <ma14:wrappingTextBoxFlag xmlns:ma14="http://schemas.microsoft.com/office/mac/drawingml/2011/main" val="0"/>
-            </a:ext>
-          </a:extLst>
-        </p:spPr>
-        <p:txBody>
-          <a:bodyPr/>
-          <a:lstStyle>
-            <a:lvl1pPr>
-              <a:defRPr sz="1000">
-                <a:solidFill>
-                  <a:srgbClr val="6B6385"/>
-                </a:solidFill>
-              </a:defRPr>
-            </a:lvl1pPr>
-          </a:lstStyle>
-          <a:p>
-            <a:pPr algn="r"/>
-            <a:fld id="{F7021451-1387-4CA6-816F-3879F97B5CBC}" type="slidenum">
-              <a:rPr b="0" lang="en-US"/>
-              <a:t>9</a:t>
-            </a:fld>
-            <a:endParaRPr lang="en-US"/>
+          <p:cNvPr id="10" name="Propósito de compra 3"/>
+          <p:cNvSpPr/>
+          <p:nvPr/>
+        </p:nvSpPr>
+        <p:spPr>
+          <a:xfrm>
+            <a:off x="6126480" y="5486400"/>
+            <a:ext cx="2468880" cy="502920"/>
+          </a:xfrm>
+          <a:prstGeom prst="roundRect">
+            <a:avLst>
+              <a:gd name="adj" fmla="val 49091"/>
+            </a:avLst>
+          </a:prstGeom>
+          <a:solidFill>
+            <a:schemeClr val="tx1"/>
+          </a:solidFill>
+          <a:ln w="19050">
+            <a:solidFill>
+              <a:srgbClr val="E0218A"/>
+            </a:solidFill>
+            <a:prstDash val="solid"/>
+          </a:ln>
+        </p:spPr>
+      </p:sp>
+      <p:sp>
+        <p:nvSpPr>
+          <p:cNvPr id="11" name="Propósito de compra texto 3"/>
+          <p:cNvSpPr txBox="1"/>
+          <p:nvPr/>
+        </p:nvSpPr>
+        <p:spPr>
+          <a:xfrm>
+            <a:off x="6126480" y="5486400"/>
+            <a:ext cx="2468880" cy="502920"/>
+          </a:xfrm>
+          <a:prstGeom prst="rect">
+            <a:avLst/>
+          </a:prstGeom>
+          <a:noFill/>
+          <a:ln/>
+        </p:spPr>
+        <p:txBody>
+          <a:bodyPr wrap="square" lIns="0" tIns="0" rIns="0" bIns="0" rtlCol="0" anchor="ctr"/>
+          <a:lstStyle/>
+          <a:p>
+            <a:pPr algn="ctr" indent="0" marL="0">
+              <a:buNone/>
+            </a:pPr>
+            <a:r>
+              <a:rPr lang="en-US" sz="1400" b="1" dirty="0">
+                <a:solidFill>
+                  <a:schemeClr val="bg1"/>
+                </a:solidFill>
+              </a:rPr>
+              <a:t>Trade</a:t>
+            </a:r>
+            <a:endParaRPr lang="en-US" sz="1400" dirty="0"/>
           </a:p>
         </p:txBody>
       </p:sp>

--- a/ledwave-comercial/apresentacoes/LedWave_Varejo_de_Moda_e_Vitrines.pptx
+++ b/ledwave-comercial/apresentacoes/LedWave_Varejo_de_Moda_e_Vitrines.pptx
@@ -120,18 +120,18 @@
   <p:extLst>
     <p:ext uri="{521415D9-36F7-43E2-AB2F-B90AF26B5E84}">
       <p14:sectionLst xmlns:p14="http://schemas.microsoft.com/office/powerpoint/2010/main">
-        <p14:section name="Abertura" id="{91f34ebb-f6b5-2f56-bada-42d8202a9631}">
+        <p14:section name="Abertura" id="{d581e46b-e375-1625-0d40-326810e3f948}">
           <p14:sldIdLst>
             <p14:sldId id="256"/>
             <p14:sldId id="257"/>
           </p14:sldIdLst>
         </p14:section>
-        <p14:section name="O seu cenário" id="{8d9ad57c-2658-03b0-e225-29aba54401a9}">
+        <p14:section name="O seu cenário" id="{7131a125-28dc-510d-abdc-affc140c4289}">
           <p14:sldIdLst>
             <p14:sldId id="258"/>
           </p14:sldIdLst>
         </p14:section>
-        <p14:section name="LedWave" id="{33150ff6-426a-7d88-bec9-c21c965c8182}">
+        <p14:section name="LedWave" id="{8e40f868-c8b5-53dd-eea6-cb66b9cc7dde}">
           <p14:sldIdLst>
             <p14:sldId id="259"/>
             <p14:sldId id="260"/>
@@ -140,20 +140,20 @@
             <p14:sldId id="263"/>
           </p14:sldIdLst>
         </p14:section>
-        <p14:section name="Por que digitalizar" id="{62c7a57d-9c98-6943-bf62-fb624086948c}">
+        <p14:section name="Por que digitalizar" id="{373e89a2-0125-f568-c362-ae507f7fa875}">
           <p14:sldIdLst>
             <p14:sldId id="264"/>
             <p14:sldId id="265"/>
           </p14:sldIdLst>
         </p14:section>
-        <p14:section name="Ganhos e solução" id="{aac13c33-6070-6568-506b-4edafa110d70}">
+        <p14:section name="Ganhos e solução" id="{e9c67039-fdc5-0a71-157c-6c9eef96fae0}">
           <p14:sldIdLst>
             <p14:sldId id="266"/>
             <p14:sldId id="267"/>
             <p14:sldId id="268"/>
           </p14:sldIdLst>
         </p14:section>
-        <p14:section name="Próximo passo" id="{5a202989-fa3a-21d8-cfb5-4e8bac060df8}">
+        <p14:section name="Próximo passo" id="{0bc70b43-d6ed-d27e-d265-882dacf61501}">
           <p14:sldIdLst>
             <p14:sldId id="269"/>
           </p14:sldIdLst>
@@ -1802,7 +1802,7 @@
     <p:bg>
       <p:bgPr>
         <a:solidFill>
-          <a:srgbClr val="140C2E"/>
+          <a:srgbClr val="FFFFFF"/>
         </a:solidFill>
       </p:bgPr>
     </p:bg>
@@ -1820,54 +1820,66 @@
           <a:chExt cx="0" cy="0"/>
         </a:xfrm>
       </p:grpSpPr>
-      <p:sp>
-        <p:nvSpPr>
-          <p:cNvPr id="2" name="Text 0"/>
-          <p:cNvSpPr txBox="1"/>
-          <p:nvPr/>
-        </p:nvSpPr>
-        <p:spPr>
-          <a:xfrm>
-            <a:off x="548640" y="365760"/>
-            <a:ext cx="2743200" cy="365760"/>
-          </a:xfrm>
-          <a:prstGeom prst="rect">
-            <a:avLst/>
-          </a:prstGeom>
-          <a:noFill/>
-          <a:ln/>
-        </p:spPr>
-        <p:txBody>
-          <a:bodyPr wrap="square" lIns="0" tIns="0" rIns="0" bIns="0" rtlCol="0" anchor="ctr"/>
-          <a:lstStyle/>
-          <a:p>
-            <a:pPr indent="0" marL="0">
-              <a:buNone/>
-            </a:pPr>
-            <a:r>
-              <a:rPr lang="en-US" sz="1600" b="1" dirty="0">
-                <a:solidFill>
-                  <a:srgbClr val="FFFFFF"/>
-                </a:solidFill>
-              </a:rPr>
-              <a:t>LedWave</a:t>
-            </a:r>
-            <a:endParaRPr lang="en-US" sz="1600" dirty="0"/>
-          </a:p>
-        </p:txBody>
-      </p:sp>
-      <p:sp>
-        <p:nvSpPr>
-          <p:cNvPr id="3" name="Text 1"/>
+      <p:pic>
+        <p:nvPicPr>
+          <p:cNvPr id="2" name="Image 0" descr="/tmp/claude-0/-home-user-Treino/88533c10-46fb-551a-b2bc-454e1913f5b1/scratchpad/build/assets/logo-ledwave.png">    </p:cNvPr>
+          <p:cNvPicPr>
+            <a:picLocks noChangeAspect="1"/>
+          </p:cNvPicPr>
+          <p:nvPr/>
+        </p:nvPicPr>
+        <p:blipFill>
+          <a:blip r:embed="rId1"/>
+          <a:stretch>
+            <a:fillRect/>
+          </a:stretch>
+        </p:blipFill>
+        <p:spPr>
+          <a:xfrm>
+            <a:off x="548640" y="411480"/>
+            <a:ext cx="2743200" cy="939769"/>
+          </a:xfrm>
+          <a:prstGeom prst="rect">
+            <a:avLst/>
+          </a:prstGeom>
+        </p:spPr>
+      </p:pic>
+      <p:pic>
+        <p:nvPicPr>
+          <p:cNvPr id="3" name="Image 1" descr="/tmp/claude-0/-home-user-Treino/88533c10-46fb-551a-b2bc-454e1913f5b1/scratchpad/build/assets/pixels-capa.png">    </p:cNvPr>
+          <p:cNvPicPr>
+            <a:picLocks noChangeAspect="1"/>
+          </p:cNvPicPr>
+          <p:nvPr/>
+        </p:nvPicPr>
+        <p:blipFill>
+          <a:blip r:embed="rId2"/>
+          <a:stretch>
+            <a:fillRect/>
+          </a:stretch>
+        </p:blipFill>
+        <p:spPr>
+          <a:xfrm>
+            <a:off x="7863840" y="914400"/>
+            <a:ext cx="3904488" cy="4572000"/>
+          </a:xfrm>
+          <a:prstGeom prst="rect">
+            <a:avLst/>
+          </a:prstGeom>
+        </p:spPr>
+      </p:pic>
+      <p:sp>
+        <p:nvSpPr>
+          <p:cNvPr id="4" name="Text 0"/>
           <p:cNvSpPr/>
           <p:nvPr>
-            <p:ph idx="101" type="title" hasCustomPrompt="1"/>
+            <p:ph idx="102" type="title" hasCustomPrompt="1"/>
           </p:nvPr>
         </p:nvSpPr>
         <p:spPr>
           <a:xfrm>
             <a:off x="548640" y="2103120"/>
-            <a:ext cx="6949440" cy="1737360"/>
+            <a:ext cx="6675120" cy="1737360"/>
           </a:xfrm>
           <a:prstGeom prst="rect">
             <a:avLst/>
@@ -1882,7 +1894,7 @@
               <a:buNone/>
               <a:defRPr lang="en-US" sz="4000" b="1" dirty="0">
                 <a:solidFill>
-                  <a:schemeClr val="bg1"/>
+                  <a:schemeClr val="tx1"/>
                 </a:solidFill>
               </a:defRPr>
             </a:lvl1pPr>
@@ -1897,16 +1909,16 @@
       </p:sp>
       <p:sp>
         <p:nvSpPr>
-          <p:cNvPr id="4" name="Text 1"/>
+          <p:cNvPr id="5" name="Text 0"/>
           <p:cNvSpPr/>
           <p:nvPr>
-            <p:ph idx="102" type="body" hasCustomPrompt="1"/>
+            <p:ph idx="103" type="body" hasCustomPrompt="1"/>
           </p:nvPr>
         </p:nvSpPr>
         <p:spPr>
           <a:xfrm>
             <a:off x="548640" y="3977640"/>
-            <a:ext cx="6949440" cy="1097280"/>
+            <a:ext cx="6675120" cy="1097280"/>
           </a:xfrm>
           <a:prstGeom prst="rect">
             <a:avLst/>
@@ -1921,7 +1933,7 @@
               <a:buNone/>
               <a:defRPr lang="en-US" sz="2000" dirty="0">
                 <a:solidFill>
-                  <a:srgbClr val="D9D2F0"/>
+                  <a:schemeClr val="tx2"/>
                 </a:solidFill>
               </a:defRPr>
             </a:lvl1pPr>
@@ -1948,7 +1960,7 @@
     <p:bg>
       <p:bgPr>
         <a:solidFill>
-          <a:srgbClr val="140C2E"/>
+          <a:srgbClr val="FFFFFF"/>
         </a:solidFill>
       </p:bgPr>
     </p:bg>
@@ -1966,48 +1978,60 @@
           <a:chExt cx="0" cy="0"/>
         </a:xfrm>
       </p:grpSpPr>
-      <p:sp>
-        <p:nvSpPr>
-          <p:cNvPr id="2" name="Text 0"/>
-          <p:cNvSpPr txBox="1"/>
-          <p:nvPr/>
-        </p:nvSpPr>
-        <p:spPr>
-          <a:xfrm>
-            <a:off x="548640" y="365760"/>
-            <a:ext cx="2743200" cy="365760"/>
-          </a:xfrm>
-          <a:prstGeom prst="rect">
-            <a:avLst/>
-          </a:prstGeom>
-          <a:noFill/>
-          <a:ln/>
-        </p:spPr>
-        <p:txBody>
-          <a:bodyPr wrap="square" lIns="0" tIns="0" rIns="0" bIns="0" rtlCol="0" anchor="ctr"/>
-          <a:lstStyle/>
-          <a:p>
-            <a:pPr indent="0" marL="0">
-              <a:buNone/>
-            </a:pPr>
-            <a:r>
-              <a:rPr lang="en-US" sz="1600" b="1" dirty="0">
-                <a:solidFill>
-                  <a:srgbClr val="FFFFFF"/>
-                </a:solidFill>
-              </a:rPr>
-              <a:t>LedWave</a:t>
-            </a:r>
-            <a:endParaRPr lang="en-US" sz="1600" dirty="0"/>
-          </a:p>
-        </p:txBody>
-      </p:sp>
-      <p:sp>
-        <p:nvSpPr>
-          <p:cNvPr id="3" name="Text 1"/>
+      <p:pic>
+        <p:nvPicPr>
+          <p:cNvPr id="2" name="Image 0" descr="/tmp/claude-0/-home-user-Treino/88533c10-46fb-551a-b2bc-454e1913f5b1/scratchpad/build/assets/logo-ledwave.png">    </p:cNvPr>
+          <p:cNvPicPr>
+            <a:picLocks noChangeAspect="1"/>
+          </p:cNvPicPr>
+          <p:nvPr/>
+        </p:nvPicPr>
+        <p:blipFill>
+          <a:blip r:embed="rId1"/>
+          <a:stretch>
+            <a:fillRect/>
+          </a:stretch>
+        </p:blipFill>
+        <p:spPr>
+          <a:xfrm>
+            <a:off x="548640" y="411480"/>
+            <a:ext cx="2194560" cy="751815"/>
+          </a:xfrm>
+          <a:prstGeom prst="rect">
+            <a:avLst/>
+          </a:prstGeom>
+        </p:spPr>
+      </p:pic>
+      <p:pic>
+        <p:nvPicPr>
+          <p:cNvPr id="3" name="Image 1" descr="/tmp/claude-0/-home-user-Treino/88533c10-46fb-551a-b2bc-454e1913f5b1/scratchpad/build/assets/pixels-faixa.png">    </p:cNvPr>
+          <p:cNvPicPr>
+            <a:picLocks noChangeAspect="1"/>
+          </p:cNvPicPr>
+          <p:nvPr/>
+        </p:nvPicPr>
+        <p:blipFill>
+          <a:blip r:embed="rId2"/>
+          <a:stretch>
+            <a:fillRect/>
+          </a:stretch>
+        </p:blipFill>
+        <p:spPr>
+          <a:xfrm>
+            <a:off x="9281160" y="5943600"/>
+            <a:ext cx="2322576" cy="548640"/>
+          </a:xfrm>
+          <a:prstGeom prst="rect">
+            <a:avLst/>
+          </a:prstGeom>
+        </p:spPr>
+      </p:pic>
+      <p:sp>
+        <p:nvSpPr>
+          <p:cNvPr id="4" name="Text 0"/>
           <p:cNvSpPr/>
           <p:nvPr>
-            <p:ph idx="101" type="title" hasCustomPrompt="1"/>
+            <p:ph idx="102" type="title" hasCustomPrompt="1"/>
           </p:nvPr>
         </p:nvSpPr>
         <p:spPr>
@@ -2028,7 +2052,7 @@
               <a:buNone/>
               <a:defRPr lang="en-US" sz="3400" b="1" dirty="0">
                 <a:solidFill>
-                  <a:schemeClr val="bg1"/>
+                  <a:schemeClr val="tx1"/>
                 </a:solidFill>
               </a:defRPr>
             </a:lvl1pPr>
@@ -2043,16 +2067,16 @@
       </p:sp>
       <p:sp>
         <p:nvSpPr>
-          <p:cNvPr id="4" name="Text 1"/>
+          <p:cNvPr id="5" name="Text 0"/>
           <p:cNvSpPr/>
           <p:nvPr>
-            <p:ph idx="102" type="body" hasCustomPrompt="1"/>
+            <p:ph idx="103" type="body" hasCustomPrompt="1"/>
           </p:nvPr>
         </p:nvSpPr>
         <p:spPr>
           <a:xfrm>
             <a:off x="548640" y="4114800"/>
-            <a:ext cx="6949440" cy="1371600"/>
+            <a:ext cx="6949440" cy="1280160"/>
           </a:xfrm>
           <a:prstGeom prst="rect">
             <a:avLst/>
@@ -2067,7 +2091,7 @@
               <a:buNone/>
               <a:defRPr lang="en-US" sz="2000" dirty="0">
                 <a:solidFill>
-                  <a:srgbClr val="D9D2F0"/>
+                  <a:schemeClr val="tx2"/>
                 </a:solidFill>
               </a:defRPr>
             </a:lvl1pPr>
@@ -2094,7 +2118,7 @@
     <p:bg>
       <p:bgPr>
         <a:solidFill>
-          <a:srgbClr val="2B1A63"/>
+          <a:srgbClr val="F2F3F7"/>
         </a:solidFill>
       </p:bgPr>
     </p:bg>
@@ -2112,48 +2136,60 @@
           <a:chExt cx="0" cy="0"/>
         </a:xfrm>
       </p:grpSpPr>
-      <p:sp>
-        <p:nvSpPr>
-          <p:cNvPr id="2" name="Text 0"/>
-          <p:cNvSpPr txBox="1"/>
-          <p:nvPr/>
-        </p:nvSpPr>
-        <p:spPr>
-          <a:xfrm>
-            <a:off x="548640" y="365760"/>
-            <a:ext cx="2743200" cy="365760"/>
-          </a:xfrm>
-          <a:prstGeom prst="rect">
-            <a:avLst/>
-          </a:prstGeom>
-          <a:noFill/>
-          <a:ln/>
-        </p:spPr>
-        <p:txBody>
-          <a:bodyPr wrap="square" lIns="0" tIns="0" rIns="0" bIns="0" rtlCol="0" anchor="ctr"/>
-          <a:lstStyle/>
-          <a:p>
-            <a:pPr indent="0" marL="0">
-              <a:buNone/>
-            </a:pPr>
-            <a:r>
-              <a:rPr lang="en-US" sz="1600" b="1" dirty="0">
-                <a:solidFill>
-                  <a:srgbClr val="FFFFFF"/>
-                </a:solidFill>
-              </a:rPr>
-              <a:t>LedWave</a:t>
-            </a:r>
-            <a:endParaRPr lang="en-US" sz="1600" dirty="0"/>
-          </a:p>
-        </p:txBody>
-      </p:sp>
-      <p:sp>
-        <p:nvSpPr>
-          <p:cNvPr id="3" name="Text 1"/>
+      <p:pic>
+        <p:nvPicPr>
+          <p:cNvPr id="2" name="Image 0" descr="/tmp/claude-0/-home-user-Treino/88533c10-46fb-551a-b2bc-454e1913f5b1/scratchpad/build/assets/logo-ledwave.png">    </p:cNvPr>
+          <p:cNvPicPr>
+            <a:picLocks noChangeAspect="1"/>
+          </p:cNvPicPr>
+          <p:nvPr/>
+        </p:nvPicPr>
+        <p:blipFill>
+          <a:blip r:embed="rId1"/>
+          <a:stretch>
+            <a:fillRect/>
+          </a:stretch>
+        </p:blipFill>
+        <p:spPr>
+          <a:xfrm>
+            <a:off x="548640" y="411480"/>
+            <a:ext cx="1645920" cy="563862"/>
+          </a:xfrm>
+          <a:prstGeom prst="rect">
+            <a:avLst/>
+          </a:prstGeom>
+        </p:spPr>
+      </p:pic>
+      <p:pic>
+        <p:nvPicPr>
+          <p:cNvPr id="3" name="Image 1" descr="/tmp/claude-0/-home-user-Treino/88533c10-46fb-551a-b2bc-454e1913f5b1/scratchpad/build/assets/pixels-faixa.png">    </p:cNvPr>
+          <p:cNvPicPr>
+            <a:picLocks noChangeAspect="1"/>
+          </p:cNvPicPr>
+          <p:nvPr/>
+        </p:nvPicPr>
+        <p:blipFill>
+          <a:blip r:embed="rId2"/>
+          <a:stretch>
+            <a:fillRect/>
+          </a:stretch>
+        </p:blipFill>
+        <p:spPr>
+          <a:xfrm>
+            <a:off x="9098280" y="5897880"/>
+            <a:ext cx="2514600" cy="594360"/>
+          </a:xfrm>
+          <a:prstGeom prst="rect">
+            <a:avLst/>
+          </a:prstGeom>
+        </p:spPr>
+      </p:pic>
+      <p:sp>
+        <p:nvSpPr>
+          <p:cNvPr id="4" name="Text 0"/>
           <p:cNvSpPr/>
           <p:nvPr>
-            <p:ph idx="101" type="title" hasCustomPrompt="1"/>
+            <p:ph idx="102" type="title" hasCustomPrompt="1"/>
           </p:nvPr>
         </p:nvSpPr>
         <p:spPr>
@@ -2189,10 +2225,10 @@
       </p:sp>
       <p:sp>
         <p:nvSpPr>
-          <p:cNvPr id="4" name="Text 1"/>
+          <p:cNvPr id="5" name="Text 0"/>
           <p:cNvSpPr/>
           <p:nvPr>
-            <p:ph idx="102" type="body" hasCustomPrompt="1"/>
+            <p:ph idx="103" type="body" hasCustomPrompt="1"/>
           </p:nvPr>
         </p:nvSpPr>
         <p:spPr>
@@ -2213,7 +2249,7 @@
               <a:buNone/>
               <a:defRPr lang="en-US" sz="3200" b="1" dirty="0">
                 <a:solidFill>
-                  <a:schemeClr val="bg1"/>
+                  <a:schemeClr val="tx1"/>
                 </a:solidFill>
               </a:defRPr>
             </a:lvl1pPr>
@@ -2258,15 +2294,39 @@
           <a:chExt cx="0" cy="0"/>
         </a:xfrm>
       </p:grpSpPr>
-      <p:sp>
-        <p:nvSpPr>
-          <p:cNvPr id="2" name="Text 0"/>
+      <p:pic>
+        <p:nvPicPr>
+          <p:cNvPr id="2" name="Image 0" descr="/tmp/claude-0/-home-user-Treino/88533c10-46fb-551a-b2bc-454e1913f5b1/scratchpad/build/assets/logo-ledwave.png">    </p:cNvPr>
+          <p:cNvPicPr>
+            <a:picLocks noChangeAspect="1"/>
+          </p:cNvPicPr>
+          <p:nvPr/>
+        </p:nvPicPr>
+        <p:blipFill>
+          <a:blip r:embed="rId1"/>
+          <a:stretch>
+            <a:fillRect/>
+          </a:stretch>
+        </p:blipFill>
+        <p:spPr>
+          <a:xfrm>
+            <a:off x="548640" y="6272784"/>
+            <a:ext cx="960120" cy="328919"/>
+          </a:xfrm>
+          <a:prstGeom prst="rect">
+            <a:avLst/>
+          </a:prstGeom>
+        </p:spPr>
+      </p:pic>
+      <p:sp>
+        <p:nvSpPr>
+          <p:cNvPr id="3" name="Text 0"/>
           <p:cNvSpPr txBox="1"/>
           <p:nvPr/>
         </p:nvSpPr>
         <p:spPr>
           <a:xfrm>
-            <a:off x="548640" y="6355080"/>
+            <a:off x="1691640" y="6327648"/>
             <a:ext cx="8229600" cy="274320"/>
           </a:xfrm>
           <a:prstGeom prst="rect">
@@ -2285,10 +2345,10 @@
             <a:r>
               <a:rPr lang="en-US" sz="1000" dirty="0">
                 <a:solidFill>
-                  <a:srgbClr val="6B6385"/>
-                </a:solidFill>
-              </a:rPr>
-              <a:t>LedWave  ·  Varejo de Moda e Vitrines</a:t>
+                  <a:srgbClr val="7A7A7A"/>
+                </a:solidFill>
+              </a:rPr>
+              <a:t>Varejo de Moda e Vitrines</a:t>
             </a:r>
             <a:endParaRPr lang="en-US" sz="1000" dirty="0"/>
           </a:p>
@@ -2296,10 +2356,10 @@
       </p:sp>
       <p:sp>
         <p:nvSpPr>
-          <p:cNvPr id="3" name="Text 1"/>
+          <p:cNvPr id="4" name="Text 1"/>
           <p:cNvSpPr/>
           <p:nvPr>
-            <p:ph idx="101" type="title" hasCustomPrompt="1"/>
+            <p:ph idx="102" type="title" hasCustomPrompt="1"/>
           </p:nvPr>
         </p:nvSpPr>
         <p:spPr>
@@ -2363,7 +2423,7 @@
             <a:lvl1pPr>
               <a:defRPr sz="1000">
                 <a:solidFill>
-                  <a:srgbClr val="6B6385"/>
+                  <a:srgbClr val="7A7A7A"/>
                 </a:solidFill>
               </a:defRPr>
             </a:lvl1pPr>
@@ -2433,7 +2493,7 @@
             <a:lvl1pPr>
               <a:defRPr sz="1000">
                 <a:solidFill>
-                  <a:srgbClr val="6B6385"/>
+                  <a:srgbClr val="7A7A7A"/>
                 </a:solidFill>
               </a:defRPr>
             </a:lvl1pPr>
@@ -2731,16 +2791,16 @@
       </p:grpSpPr>
       <p:sp>
         <p:nvSpPr>
-          <p:cNvPr id="2" name="Text 1"/>
+          <p:cNvPr id="2" name="Text 0"/>
           <p:cNvSpPr/>
           <p:nvPr>
-            <p:ph idx="101" type="title" hasCustomPrompt="1"/>
+            <p:ph idx="102" type="title" hasCustomPrompt="1"/>
           </p:nvPr>
         </p:nvSpPr>
         <p:spPr>
           <a:xfrm>
             <a:off x="548640" y="2103120"/>
-            <a:ext cx="6949440" cy="1737360"/>
+            <a:ext cx="6675120" cy="1737360"/>
           </a:xfrm>
           <a:prstGeom prst="rect">
             <a:avLst/>
@@ -2758,7 +2818,7 @@
             <a:r>
               <a:rPr lang="en-US" sz="4000" b="1" dirty="0">
                 <a:solidFill>
-                  <a:schemeClr val="bg1"/>
+                  <a:schemeClr val="tx1"/>
                 </a:solidFill>
               </a:rPr>
               <a:t>Varejo de Moda e Vitrines</a:t>
@@ -2769,16 +2829,16 @@
       </p:sp>
       <p:sp>
         <p:nvSpPr>
-          <p:cNvPr id="3" name="Text 1"/>
+          <p:cNvPr id="3" name="Text 0"/>
           <p:cNvSpPr/>
           <p:nvPr>
-            <p:ph idx="102" type="body" hasCustomPrompt="1"/>
+            <p:ph idx="103" type="body" hasCustomPrompt="1"/>
           </p:nvPr>
         </p:nvSpPr>
         <p:spPr>
           <a:xfrm>
             <a:off x="548640" y="3977640"/>
-            <a:ext cx="6949440" cy="1097280"/>
+            <a:ext cx="6675120" cy="1097280"/>
           </a:xfrm>
           <a:prstGeom prst="rect">
             <a:avLst/>
@@ -2796,7 +2856,7 @@
             <a:r>
               <a:rPr lang="en-US" sz="2000" dirty="0">
                 <a:solidFill>
-                  <a:srgbClr val="D9D2F0"/>
+                  <a:schemeClr val="tx2"/>
                 </a:solidFill>
               </a:rPr>
               <a:t>Vitrine parada é vendedor dormindo.</a:t>
@@ -2832,7 +2892,7 @@
             <a:r>
               <a:rPr lang="en-US" sz="1400" dirty="0">
                 <a:solidFill>
-                  <a:srgbClr val="B8AED8"/>
+                  <a:srgbClr val="7A7A7A"/>
                 </a:solidFill>
               </a:rPr>
               <a:t>Proposta para [Nome do cliente]  ·  [Data]</a:t>
@@ -2849,14 +2909,14 @@
         </p:nvSpPr>
         <p:spPr>
           <a:xfrm>
-            <a:off x="8412480" y="1737360"/>
-            <a:ext cx="3017520" cy="3017520"/>
+            <a:off x="7360920" y="4160520"/>
+            <a:ext cx="1645920" cy="1645920"/>
           </a:xfrm>
           <a:prstGeom prst="ellipse">
             <a:avLst/>
           </a:prstGeom>
           <a:solidFill>
-            <a:srgbClr val="E0218A"/>
+            <a:srgbClr val="5F5F5F"/>
           </a:solidFill>
           <a:ln/>
         </p:spPr>
@@ -2877,8 +2937,8 @@
         </p:blipFill>
         <p:spPr>
           <a:xfrm>
-            <a:off x="9166860" y="2491740"/>
-            <a:ext cx="1508760" cy="1508760"/>
+            <a:off x="7772400" y="4572000"/>
+            <a:ext cx="822960" cy="822960"/>
           </a:xfrm>
           <a:prstGeom prst="rect">
             <a:avLst/>
@@ -2915,7 +2975,7 @@
           <p:cNvPr id="2" name="Text 1"/>
           <p:cNvSpPr/>
           <p:nvPr>
-            <p:ph idx="101" type="title" hasCustomPrompt="1"/>
+            <p:ph idx="102" type="title" hasCustomPrompt="1"/>
           </p:nvPr>
         </p:nvSpPr>
         <p:spPr>
@@ -3041,7 +3101,7 @@
           </a:solidFill>
           <a:ln w="19050">
             <a:solidFill>
-              <a:srgbClr val="8B5CF6"/>
+              <a:srgbClr val="658DFF"/>
             </a:solidFill>
             <a:prstDash val="dash"/>
           </a:ln>
@@ -3062,7 +3122,7 @@
             <a:avLst/>
           </a:prstGeom>
           <a:solidFill>
-            <a:srgbClr val="8B5CF6"/>
+            <a:srgbClr val="658DFF"/>
           </a:solidFill>
           <a:ln/>
         </p:spPr>
@@ -3171,7 +3231,7 @@
             <a:lvl1pPr>
               <a:defRPr sz="1000">
                 <a:solidFill>
-                  <a:srgbClr val="6B6385"/>
+                  <a:srgbClr val="7A7A7A"/>
                 </a:solidFill>
               </a:defRPr>
             </a:lvl1pPr>
@@ -3216,7 +3276,7 @@
           <p:cNvPr id="2" name="Text 1"/>
           <p:cNvSpPr/>
           <p:nvPr>
-            <p:ph idx="101" type="title" hasCustomPrompt="1"/>
+            <p:ph idx="102" type="title" hasCustomPrompt="1"/>
           </p:nvPr>
         </p:nvSpPr>
         <p:spPr>
@@ -3286,7 +3346,7 @@
             <a:avLst/>
           </a:prstGeom>
           <a:solidFill>
-            <a:srgbClr val="E0218A"/>
+            <a:srgbClr val="E011FF"/>
           </a:solidFill>
           <a:ln/>
         </p:spPr>
@@ -3424,7 +3484,7 @@
             <a:avLst/>
           </a:prstGeom>
           <a:solidFill>
-            <a:srgbClr val="4F6BFF"/>
+            <a:srgbClr val="8A5CF6"/>
           </a:solidFill>
           <a:ln/>
         </p:spPr>
@@ -3562,7 +3622,7 @@
             <a:avLst/>
           </a:prstGeom>
           <a:solidFill>
-            <a:srgbClr val="8B5CF6"/>
+            <a:srgbClr val="658DFF"/>
           </a:solidFill>
           <a:ln/>
         </p:spPr>
@@ -3693,7 +3753,7 @@
             <a:lvl1pPr>
               <a:defRPr sz="1000">
                 <a:solidFill>
-                  <a:srgbClr val="6B6385"/>
+                  <a:srgbClr val="7A7A7A"/>
                 </a:solidFill>
               </a:defRPr>
             </a:lvl1pPr>
@@ -3738,7 +3798,7 @@
           <p:cNvPr id="2" name="Text 1"/>
           <p:cNvSpPr/>
           <p:nvPr>
-            <p:ph idx="101" type="title" hasCustomPrompt="1"/>
+            <p:ph idx="102" type="title" hasCustomPrompt="1"/>
           </p:nvPr>
         </p:nvSpPr>
         <p:spPr>
@@ -3822,7 +3882,7 @@
             <a:avLst/>
           </a:prstGeom>
           <a:solidFill>
-            <a:srgbClr val="2B1A63"/>
+            <a:srgbClr val="5F5F5F"/>
           </a:solidFill>
           <a:ln/>
         </p:spPr>
@@ -3902,7 +3962,7 @@
             <a:avLst/>
           </a:prstGeom>
           <a:solidFill>
-            <a:srgbClr val="2B1A63"/>
+            <a:srgbClr val="5F5F5F"/>
           </a:solidFill>
           <a:ln/>
         </p:spPr>
@@ -3982,7 +4042,7 @@
             <a:avLst/>
           </a:prstGeom>
           <a:solidFill>
-            <a:srgbClr val="2B1A63"/>
+            <a:srgbClr val="5F5F5F"/>
           </a:solidFill>
           <a:ln/>
         </p:spPr>
@@ -4062,7 +4122,7 @@
             <a:avLst/>
           </a:prstGeom>
           <a:solidFill>
-            <a:srgbClr val="2B1A63"/>
+            <a:srgbClr val="5F5F5F"/>
           </a:solidFill>
           <a:ln/>
         </p:spPr>
@@ -4309,7 +4369,7 @@
             <a:lvl1pPr>
               <a:defRPr sz="1000">
                 <a:solidFill>
-                  <a:srgbClr val="6B6385"/>
+                  <a:srgbClr val="7A7A7A"/>
                 </a:solidFill>
               </a:defRPr>
             </a:lvl1pPr>
@@ -4354,7 +4414,7 @@
           <p:cNvPr id="2" name="Text 1"/>
           <p:cNvSpPr/>
           <p:nvPr>
-            <p:ph idx="101" type="title" hasCustomPrompt="1"/>
+            <p:ph idx="102" type="title" hasCustomPrompt="1"/>
           </p:nvPr>
         </p:nvSpPr>
         <p:spPr>
@@ -4436,7 +4496,7 @@
             <a:r>
               <a:rPr lang="en-US" sz="1800" b="1" dirty="0">
                 <a:solidFill>
-                  <a:schemeClr val="accent1"/>
+                  <a:schemeClr val="accent2"/>
                 </a:solidFill>
               </a:rPr>
               <a:t>Boulevard.Live</a:t>
@@ -4538,7 +4598,7 @@
           </a:solidFill>
           <a:ln w="19050">
             <a:solidFill>
-              <a:srgbClr val="8B5CF6"/>
+              <a:srgbClr val="658DFF"/>
             </a:solidFill>
             <a:prstDash val="dash"/>
           </a:ln>
@@ -4706,7 +4766,7 @@
             <a:lvl1pPr>
               <a:defRPr sz="1000">
                 <a:solidFill>
-                  <a:srgbClr val="6B6385"/>
+                  <a:srgbClr val="7A7A7A"/>
                 </a:solidFill>
               </a:defRPr>
             </a:lvl1pPr>
@@ -4748,10 +4808,10 @@
       </p:grpSpPr>
       <p:sp>
         <p:nvSpPr>
-          <p:cNvPr id="2" name="Text 1"/>
+          <p:cNvPr id="2" name="Text 0"/>
           <p:cNvSpPr/>
           <p:nvPr>
-            <p:ph idx="101" type="title" hasCustomPrompt="1"/>
+            <p:ph idx="102" type="title" hasCustomPrompt="1"/>
           </p:nvPr>
         </p:nvSpPr>
         <p:spPr>
@@ -4775,7 +4835,7 @@
             <a:r>
               <a:rPr lang="en-US" sz="3400" b="1" dirty="0">
                 <a:solidFill>
-                  <a:schemeClr val="bg1"/>
+                  <a:schemeClr val="tx1"/>
                 </a:solidFill>
               </a:rPr>
               <a:t>Vitrine parada é vendedor dormindo.</a:t>
@@ -4786,16 +4846,16 @@
       </p:sp>
       <p:sp>
         <p:nvSpPr>
-          <p:cNvPr id="3" name="Text 1"/>
+          <p:cNvPr id="3" name="Text 0"/>
           <p:cNvSpPr/>
           <p:nvPr>
-            <p:ph idx="102" type="body" hasCustomPrompt="1"/>
+            <p:ph idx="103" type="body" hasCustomPrompt="1"/>
           </p:nvPr>
         </p:nvSpPr>
         <p:spPr>
           <a:xfrm>
             <a:off x="548640" y="4114800"/>
-            <a:ext cx="6949440" cy="1371600"/>
+            <a:ext cx="6949440" cy="1280160"/>
           </a:xfrm>
           <a:prstGeom prst="rect">
             <a:avLst/>
@@ -4813,7 +4873,7 @@
             <a:r>
               <a:rPr lang="en-US" sz="2000" dirty="0">
                 <a:solidFill>
-                  <a:srgbClr val="D9D2F0"/>
+                  <a:schemeClr val="tx2"/>
                 </a:solidFill>
               </a:rPr>
               <a:t>A coleção nova merece uma vitrine à altura. Vamos colocar a sua loja para falar com quem passa?</a:t>
@@ -4839,7 +4899,7 @@
             </a:avLst>
           </a:prstGeom>
           <a:solidFill>
-            <a:schemeClr val="accent1"/>
+            <a:schemeClr val="tx2"/>
           </a:solidFill>
           <a:ln/>
         </p:spPr>
@@ -4871,7 +4931,7 @@
             <a:r>
               <a:rPr lang="en-US" sz="1800" b="1" dirty="0">
                 <a:solidFill>
-                  <a:schemeClr val="bg1"/>
+                  <a:schemeClr val="accent2"/>
                 </a:solidFill>
               </a:rPr>
               <a:t>Próximo passo</a:t>
@@ -4925,7 +4985,7 @@
         <p:spPr>
           <a:xfrm>
             <a:off x="548640" y="6035040"/>
-            <a:ext cx="10972800" cy="365760"/>
+            <a:ext cx="8229600" cy="365760"/>
           </a:xfrm>
           <a:prstGeom prst="rect">
             <a:avLst/>
@@ -4943,7 +5003,7 @@
             <a:r>
               <a:rPr lang="en-US" sz="1400" dirty="0">
                 <a:solidFill>
-                  <a:srgbClr val="B8AED8"/>
+                  <a:srgbClr val="7A7A7A"/>
                 </a:solidFill>
               </a:rPr>
               <a:t>[Nome do executivo]  ·  [Telefone / WhatsApp]  ·  [E-mail]  ·  ledwave.com.br</a:t>
@@ -4979,10 +5039,10 @@
       </p:grpSpPr>
       <p:sp>
         <p:nvSpPr>
-          <p:cNvPr id="2" name="Text 1"/>
+          <p:cNvPr id="2" name="Text 0"/>
           <p:cNvSpPr/>
           <p:nvPr>
-            <p:ph idx="101" type="title" hasCustomPrompt="1"/>
+            <p:ph idx="102" type="title" hasCustomPrompt="1"/>
           </p:nvPr>
         </p:nvSpPr>
         <p:spPr>
@@ -5017,10 +5077,10 @@
       </p:sp>
       <p:sp>
         <p:nvSpPr>
-          <p:cNvPr id="3" name="Text 1"/>
+          <p:cNvPr id="3" name="Text 0"/>
           <p:cNvSpPr/>
           <p:nvPr>
-            <p:ph idx="102" type="body" hasCustomPrompt="1"/>
+            <p:ph idx="103" type="body" hasCustomPrompt="1"/>
           </p:nvPr>
         </p:nvSpPr>
         <p:spPr>
@@ -5044,7 +5104,7 @@
             <a:r>
               <a:rPr lang="en-US" sz="3200" b="1" dirty="0">
                 <a:solidFill>
-                  <a:schemeClr val="bg1"/>
+                  <a:schemeClr val="tx1"/>
                 </a:solidFill>
               </a:rPr>
               <a:t>Quantas pessoas passam na frente da sua loja por dia? Agora, quantas param? A diferença entre esses dois números é o tamanho da oportunidade que estamos aqui para discutir.</a:t>
@@ -5068,7 +5128,7 @@
             <a:avLst/>
           </a:prstGeom>
           <a:solidFill>
-            <a:srgbClr val="E0218A"/>
+            <a:srgbClr val="E011FF"/>
           </a:solidFill>
           <a:ln/>
         </p:spPr>
@@ -5127,7 +5187,7 @@
           <p:cNvPr id="2" name="Text 1"/>
           <p:cNvSpPr/>
           <p:nvPr>
-            <p:ph idx="101" type="title" hasCustomPrompt="1"/>
+            <p:ph idx="102" type="title" hasCustomPrompt="1"/>
           </p:nvPr>
         </p:nvSpPr>
         <p:spPr>
@@ -5197,7 +5257,7 @@
             <a:avLst/>
           </a:prstGeom>
           <a:solidFill>
-            <a:srgbClr val="4F6BFF"/>
+            <a:srgbClr val="658DFF"/>
           </a:solidFill>
           <a:ln/>
         </p:spPr>
@@ -5335,7 +5395,7 @@
             <a:avLst/>
           </a:prstGeom>
           <a:solidFill>
-            <a:srgbClr val="E0218A"/>
+            <a:srgbClr val="E011FF"/>
           </a:solidFill>
           <a:ln/>
         </p:spPr>
@@ -5466,7 +5526,7 @@
             <a:lvl1pPr>
               <a:defRPr sz="1000">
                 <a:solidFill>
-                  <a:srgbClr val="6B6385"/>
+                  <a:srgbClr val="7A7A7A"/>
                 </a:solidFill>
               </a:defRPr>
             </a:lvl1pPr>
@@ -5511,7 +5571,7 @@
           <p:cNvPr id="2" name="Text 1"/>
           <p:cNvSpPr/>
           <p:nvPr>
-            <p:ph idx="101" type="title" hasCustomPrompt="1"/>
+            <p:ph idx="102" type="title" hasCustomPrompt="1"/>
           </p:nvPr>
         </p:nvSpPr>
         <p:spPr>
@@ -5653,7 +5713,7 @@
           <a:noFill/>
           <a:ln w="38100">
             <a:solidFill>
-              <a:srgbClr val="F3F0FA"/>
+              <a:srgbClr val="F2F3F7"/>
             </a:solidFill>
             <a:prstDash val="solid"/>
           </a:ln>
@@ -6077,7 +6137,7 @@
             <a:lvl1pPr>
               <a:defRPr sz="1000">
                 <a:solidFill>
-                  <a:srgbClr val="6B6385"/>
+                  <a:srgbClr val="7A7A7A"/>
                 </a:solidFill>
               </a:defRPr>
             </a:lvl1pPr>
@@ -6122,7 +6182,7 @@
           <p:cNvPr id="2" name="Text 1"/>
           <p:cNvSpPr/>
           <p:nvPr>
-            <p:ph idx="101" type="title" hasCustomPrompt="1"/>
+            <p:ph idx="102" type="title" hasCustomPrompt="1"/>
           </p:nvPr>
         </p:nvSpPr>
         <p:spPr>
@@ -6558,7 +6618,7 @@
             <a:r>
               <a:rPr lang="en-US" sz="1100" dirty="0">
                 <a:solidFill>
-                  <a:srgbClr val="6B6385"/>
+                  <a:srgbClr val="7A7A7A"/>
                 </a:solidFill>
               </a:rPr>
               <a:t>Ranking Exame Negócios em Expansão com dados auditados pela PwC.</a:t>
@@ -6597,7 +6657,7 @@
             <a:lvl1pPr>
               <a:defRPr sz="1000">
                 <a:solidFill>
-                  <a:srgbClr val="6B6385"/>
+                  <a:srgbClr val="7A7A7A"/>
                 </a:solidFill>
               </a:defRPr>
             </a:lvl1pPr>
@@ -6642,7 +6702,7 @@
           <p:cNvPr id="2" name="Text 1"/>
           <p:cNvSpPr/>
           <p:nvPr>
-            <p:ph idx="101" type="title" hasCustomPrompt="1"/>
+            <p:ph idx="102" type="title" hasCustomPrompt="1"/>
           </p:nvPr>
         </p:nvSpPr>
         <p:spPr>
@@ -6690,7 +6750,7 @@
             <a:avLst/>
           </a:prstGeom>
           <a:solidFill>
-            <a:srgbClr val="2B1A63"/>
+            <a:srgbClr val="5F5F5F"/>
           </a:solidFill>
           <a:ln/>
         </p:spPr>
@@ -6830,7 +6890,7 @@
             <a:avLst/>
           </a:prstGeom>
           <a:solidFill>
-            <a:srgbClr val="2B1A63"/>
+            <a:srgbClr val="5F5F5F"/>
           </a:solidFill>
           <a:ln/>
         </p:spPr>
@@ -6970,7 +7030,7 @@
             <a:avLst/>
           </a:prstGeom>
           <a:solidFill>
-            <a:srgbClr val="2B1A63"/>
+            <a:srgbClr val="5F5F5F"/>
           </a:solidFill>
           <a:ln/>
         </p:spPr>
@@ -7110,7 +7170,7 @@
             <a:avLst/>
           </a:prstGeom>
           <a:solidFill>
-            <a:srgbClr val="2B1A63"/>
+            <a:srgbClr val="5F5F5F"/>
           </a:solidFill>
           <a:ln/>
         </p:spPr>
@@ -7250,7 +7310,7 @@
             <a:avLst/>
           </a:prstGeom>
           <a:solidFill>
-            <a:srgbClr val="2B1A63"/>
+            <a:srgbClr val="5F5F5F"/>
           </a:solidFill>
           <a:ln/>
         </p:spPr>
@@ -7450,7 +7510,7 @@
             <a:lvl1pPr>
               <a:defRPr sz="1000">
                 <a:solidFill>
-                  <a:srgbClr val="6B6385"/>
+                  <a:srgbClr val="7A7A7A"/>
                 </a:solidFill>
               </a:defRPr>
             </a:lvl1pPr>
@@ -7495,7 +7555,7 @@
           <p:cNvPr id="2" name="Text 1"/>
           <p:cNvSpPr/>
           <p:nvPr>
-            <p:ph idx="101" type="title" hasCustomPrompt="1"/>
+            <p:ph idx="102" type="title" hasCustomPrompt="1"/>
           </p:nvPr>
         </p:nvSpPr>
         <p:spPr>
@@ -7565,7 +7625,7 @@
             <a:avLst/>
           </a:prstGeom>
           <a:solidFill>
-            <a:srgbClr val="2B1A63"/>
+            <a:srgbClr val="5F5F5F"/>
           </a:solidFill>
           <a:ln/>
         </p:spPr>
@@ -7703,7 +7763,7 @@
             <a:avLst/>
           </a:prstGeom>
           <a:solidFill>
-            <a:srgbClr val="E0218A"/>
+            <a:srgbClr val="E011FF"/>
           </a:solidFill>
           <a:ln/>
         </p:spPr>
@@ -7841,7 +7901,7 @@
             <a:avLst/>
           </a:prstGeom>
           <a:solidFill>
-            <a:srgbClr val="2B1A63"/>
+            <a:srgbClr val="5F5F5F"/>
           </a:solidFill>
           <a:ln/>
         </p:spPr>
@@ -7979,7 +8039,7 @@
             <a:avLst/>
           </a:prstGeom>
           <a:solidFill>
-            <a:srgbClr val="E0218A"/>
+            <a:srgbClr val="E011FF"/>
           </a:solidFill>
           <a:ln/>
         </p:spPr>
@@ -8117,7 +8177,7 @@
             <a:avLst/>
           </a:prstGeom>
           <a:solidFill>
-            <a:srgbClr val="2B1A63"/>
+            <a:srgbClr val="5F5F5F"/>
           </a:solidFill>
           <a:ln/>
         </p:spPr>
@@ -8255,7 +8315,7 @@
             <a:avLst/>
           </a:prstGeom>
           <a:solidFill>
-            <a:srgbClr val="E0218A"/>
+            <a:srgbClr val="E011FF"/>
           </a:solidFill>
           <a:ln/>
         </p:spPr>
@@ -8393,7 +8453,7 @@
             <a:avLst/>
           </a:prstGeom>
           <a:solidFill>
-            <a:srgbClr val="2B1A63"/>
+            <a:srgbClr val="5F5F5F"/>
           </a:solidFill>
           <a:ln/>
         </p:spPr>
@@ -8531,7 +8591,7 @@
             <a:avLst/>
           </a:prstGeom>
           <a:solidFill>
-            <a:srgbClr val="E0218A"/>
+            <a:srgbClr val="E011FF"/>
           </a:solidFill>
           <a:ln/>
         </p:spPr>
@@ -8662,7 +8722,7 @@
             <a:lvl1pPr>
               <a:defRPr sz="1000">
                 <a:solidFill>
-                  <a:srgbClr val="6B6385"/>
+                  <a:srgbClr val="7A7A7A"/>
                 </a:solidFill>
               </a:defRPr>
             </a:lvl1pPr>
@@ -8707,7 +8767,7 @@
           <p:cNvPr id="2" name="Text 1"/>
           <p:cNvSpPr/>
           <p:nvPr>
-            <p:ph idx="101" type="title" hasCustomPrompt="1"/>
+            <p:ph idx="102" type="title" hasCustomPrompt="1"/>
           </p:nvPr>
         </p:nvSpPr>
         <p:spPr>
@@ -9103,7 +9163,7 @@
             <a:avLst/>
           </a:prstGeom>
           <a:solidFill>
-            <a:srgbClr val="2B1A63"/>
+            <a:srgbClr val="5F5F5F"/>
           </a:solidFill>
           <a:ln/>
         </p:spPr>
@@ -9219,7 +9279,7 @@
             <a:avLst/>
           </a:prstGeom>
           <a:solidFill>
-            <a:srgbClr val="2B1A63"/>
+            <a:srgbClr val="5F5F5F"/>
           </a:solidFill>
           <a:ln/>
         </p:spPr>
@@ -9335,7 +9395,7 @@
             <a:avLst/>
           </a:prstGeom>
           <a:solidFill>
-            <a:srgbClr val="2B1A63"/>
+            <a:srgbClr val="5F5F5F"/>
           </a:solidFill>
           <a:ln/>
         </p:spPr>
@@ -9463,7 +9523,7 @@
             <a:r>
               <a:rPr lang="en-US" sz="1100" i="1" dirty="0">
                 <a:solidFill>
-                  <a:srgbClr val="6B6385"/>
+                  <a:srgbClr val="7A7A7A"/>
                 </a:solidFill>
               </a:rPr>
               <a:t>Troque os nomes pelos logos oficiais dos clientes antes de enviar o arquivo.</a:t>
@@ -9502,7 +9562,7 @@
             <a:lvl1pPr>
               <a:defRPr sz="1000">
                 <a:solidFill>
-                  <a:srgbClr val="6B6385"/>
+                  <a:srgbClr val="7A7A7A"/>
                 </a:solidFill>
               </a:defRPr>
             </a:lvl1pPr>
@@ -9544,10 +9604,10 @@
       </p:grpSpPr>
       <p:sp>
         <p:nvSpPr>
-          <p:cNvPr id="2" name="Text 1"/>
+          <p:cNvPr id="2" name="Text 0"/>
           <p:cNvSpPr/>
           <p:nvPr>
-            <p:ph idx="101" type="title" hasCustomPrompt="1"/>
+            <p:ph idx="102" type="title" hasCustomPrompt="1"/>
           </p:nvPr>
         </p:nvSpPr>
         <p:spPr>
@@ -9582,10 +9642,10 @@
       </p:sp>
       <p:sp>
         <p:nvSpPr>
-          <p:cNvPr id="3" name="Text 1"/>
+          <p:cNvPr id="3" name="Text 0"/>
           <p:cNvSpPr/>
           <p:nvPr>
-            <p:ph idx="102" type="body" hasCustomPrompt="1"/>
+            <p:ph idx="103" type="body" hasCustomPrompt="1"/>
           </p:nvPr>
         </p:nvSpPr>
         <p:spPr>
@@ -9609,7 +9669,7 @@
             <a:r>
               <a:rPr lang="en-US" sz="3200" b="1" dirty="0">
                 <a:solidFill>
-                  <a:schemeClr val="bg1"/>
+                  <a:schemeClr val="tx1"/>
                 </a:solidFill>
               </a:rPr>
               <a:t>Transformar a vitrine em um vendedor que trabalha 24h, chama o cliente pelo movimento e conta a história da coleção antes de ele entrar.</a:t>
@@ -9633,7 +9693,7 @@
             <a:avLst/>
           </a:prstGeom>
           <a:solidFill>
-            <a:srgbClr val="E0218A"/>
+            <a:srgbClr val="E011FF"/>
           </a:solidFill>
           <a:ln/>
         </p:spPr>
@@ -9683,7 +9743,7 @@
           </a:solidFill>
           <a:ln w="19050">
             <a:solidFill>
-              <a:srgbClr val="E0218A"/>
+              <a:srgbClr val="E011FF"/>
             </a:solidFill>
             <a:prstDash val="solid"/>
           </a:ln>
@@ -9746,7 +9806,7 @@
           </a:solidFill>
           <a:ln w="19050">
             <a:solidFill>
-              <a:srgbClr val="E0218A"/>
+              <a:srgbClr val="E011FF"/>
             </a:solidFill>
             <a:prstDash val="solid"/>
           </a:ln>
@@ -9809,7 +9869,7 @@
           </a:solidFill>
           <a:ln w="19050">
             <a:solidFill>
-              <a:srgbClr val="E0218A"/>
+              <a:srgbClr val="E011FF"/>
             </a:solidFill>
             <a:prstDash val="solid"/>
           </a:ln>
@@ -9864,40 +9924,40 @@
   <a:themeElements>
     <a:clrScheme name="LedWave">
       <a:dk1>
-        <a:srgbClr val="140C2E"/>
+        <a:srgbClr val="3D3D3D"/>
       </a:dk1>
       <a:lt1>
         <a:srgbClr val="FFFFFF"/>
       </a:lt1>
       <a:dk2>
-        <a:srgbClr val="2B1A63"/>
+        <a:srgbClr val="5F5F5F"/>
       </a:dk2>
       <a:lt2>
-        <a:srgbClr val="F3F0FA"/>
+        <a:srgbClr val="F2F3F7"/>
       </a:lt2>
       <a:accent1>
-        <a:srgbClr val="E0218A"/>
+        <a:srgbClr val="E011FF"/>
       </a:accent1>
       <a:accent2>
-        <a:srgbClr val="4F6BFF"/>
+        <a:srgbClr val="12D9FF"/>
       </a:accent2>
       <a:accent3>
-        <a:srgbClr val="8B5CF6"/>
+        <a:srgbClr val="658DFF"/>
       </a:accent3>
       <a:accent4>
-        <a:srgbClr val="22C3A6"/>
+        <a:srgbClr val="8A5CF6"/>
       </a:accent4>
       <a:accent5>
-        <a:srgbClr val="FFB020"/>
+        <a:srgbClr val="3EB1FE"/>
       </a:accent5>
       <a:accent6>
-        <a:srgbClr val="6B6385"/>
+        <a:srgbClr val="7A7A7A"/>
       </a:accent6>
       <a:hlink>
-        <a:srgbClr val="4F6BFF"/>
+        <a:srgbClr val="658DFF"/>
       </a:hlink>
       <a:folHlink>
-        <a:srgbClr val="8B5CF6"/>
+        <a:srgbClr val="8A5CF6"/>
       </a:folHlink>
     </a:clrScheme>
     <a:fontScheme name="LedWave">
